--- a/lectures/week-07/gsa.pptx
+++ b/lectures/week-07/gsa.pptx
@@ -5,7 +5,7 @@
     <p:sldMasterId id="2147483648" r:id="rId1"/>
   </p:sldMasterIdLst>
   <p:notesMasterIdLst>
-    <p:notesMasterId r:id="rId22"/>
+    <p:notesMasterId r:id="rId21"/>
   </p:notesMasterIdLst>
   <p:sldIdLst>
     <p:sldId id="256" r:id="rId2"/>
@@ -27,7 +27,6 @@
     <p:sldId id="272" r:id="rId18"/>
     <p:sldId id="273" r:id="rId19"/>
     <p:sldId id="274" r:id="rId20"/>
-    <p:sldId id="275" r:id="rId21"/>
   </p:sldIdLst>
   <p:sldSz cx="9144000" cy="5143500" type="screen16x9"/>
   <p:notesSz cx="6858000" cy="9144000"/>
@@ -565,7 +564,7 @@
           <a:p>
             <a:fld id="{18BDFEC3-8487-43E8-A154-7C12CBC1FFF2}" type="slidenum">
               <a:rPr lang="en-US"/>
-              <a:t>4</a:t>
+              <a:t>3</a:t>
             </a:fld>
             <a:endParaRPr lang="en-US"/>
           </a:p>
@@ -671,7 +670,7 @@
           <a:p>
             <a:fld id="{18BDFEC3-8487-43E8-A154-7C12CBC1FFF2}" type="slidenum">
               <a:rPr lang="en-US"/>
-              <a:t>14</a:t>
+              <a:t>13</a:t>
             </a:fld>
             <a:endParaRPr lang="en-US"/>
           </a:p>
@@ -753,7 +752,7 @@
           <a:p>
             <a:fld id="{18BDFEC3-8487-43E8-A154-7C12CBC1FFF2}" type="slidenum">
               <a:rPr lang="en-US"/>
-              <a:t>16</a:t>
+              <a:t>15</a:t>
             </a:fld>
             <a:endParaRPr lang="en-US"/>
           </a:p>
@@ -835,7 +834,7 @@
           <a:p>
             <a:fld id="{18BDFEC3-8487-43E8-A154-7C12CBC1FFF2}" type="slidenum">
               <a:rPr lang="en-US"/>
-              <a:t>17</a:t>
+              <a:t>16</a:t>
             </a:fld>
             <a:endParaRPr lang="en-US"/>
           </a:p>
@@ -917,7 +916,7 @@
           <a:p>
             <a:fld id="{18BDFEC3-8487-43E8-A154-7C12CBC1FFF2}" type="slidenum">
               <a:rPr lang="en-US"/>
-              <a:t>18</a:t>
+              <a:t>17</a:t>
             </a:fld>
             <a:endParaRPr lang="en-US"/>
           </a:p>
@@ -977,7 +976,7 @@
             </a:pPr>
             <a:r>
               <a:rPr/>
-              <a:t>“Two complementary tools, same requirement. Next week we break that requirement.” “Friday’s lab puts VOI to work on the dike problem from Lab 5.”</a:t>
+              <a:t>“Two complementary tools, same requirement. Next week we break that requirement.” “Friday’s lab puts VOI to work on a house elevation problem under sea-level rise uncertainty.”</a:t>
             </a:r>
           </a:p>
         </p:txBody>
@@ -999,7 +998,7 @@
           <a:p>
             <a:fld id="{18BDFEC3-8487-43E8-A154-7C12CBC1FFF2}" type="slidenum">
               <a:rPr lang="en-US"/>
-              <a:t>19</a:t>
+              <a:t>18</a:t>
             </a:fld>
             <a:endParaRPr lang="en-US"/>
           </a:p>
@@ -1081,7 +1080,7 @@
           <a:p>
             <a:fld id="{18BDFEC3-8487-43E8-A154-7C12CBC1FFF2}" type="slidenum">
               <a:rPr lang="en-US"/>
-              <a:t>5</a:t>
+              <a:t>4</a:t>
             </a:fld>
             <a:endParaRPr lang="en-US"/>
           </a:p>
@@ -1163,7 +1162,7 @@
           <a:p>
             <a:fld id="{18BDFEC3-8487-43E8-A154-7C12CBC1FFF2}" type="slidenum">
               <a:rPr lang="en-US"/>
-              <a:t>6</a:t>
+              <a:t>5</a:t>
             </a:fld>
             <a:endParaRPr lang="en-US"/>
           </a:p>
@@ -1245,7 +1244,7 @@
           <a:p>
             <a:fld id="{18BDFEC3-8487-43E8-A154-7C12CBC1FFF2}" type="slidenum">
               <a:rPr lang="en-US"/>
-              <a:t>7</a:t>
+              <a:t>6</a:t>
             </a:fld>
             <a:endParaRPr lang="en-US"/>
           </a:p>
@@ -1327,7 +1326,7 @@
           <a:p>
             <a:fld id="{18BDFEC3-8487-43E8-A154-7C12CBC1FFF2}" type="slidenum">
               <a:rPr lang="en-US"/>
-              <a:t>8</a:t>
+              <a:t>7</a:t>
             </a:fld>
             <a:endParaRPr lang="en-US"/>
           </a:p>
@@ -1409,7 +1408,7 @@
           <a:p>
             <a:fld id="{18BDFEC3-8487-43E8-A154-7C12CBC1FFF2}" type="slidenum">
               <a:rPr lang="en-US"/>
-              <a:t>9</a:t>
+              <a:t>8</a:t>
             </a:fld>
             <a:endParaRPr lang="en-US"/>
           </a:p>
@@ -1491,7 +1490,7 @@
           <a:p>
             <a:fld id="{18BDFEC3-8487-43E8-A154-7C12CBC1FFF2}" type="slidenum">
               <a:rPr lang="en-US"/>
-              <a:t>10</a:t>
+              <a:t>9</a:t>
             </a:fld>
             <a:endParaRPr lang="en-US"/>
           </a:p>
@@ -1573,7 +1572,7 @@
           <a:p>
             <a:fld id="{18BDFEC3-8487-43E8-A154-7C12CBC1FFF2}" type="slidenum">
               <a:rPr lang="en-US"/>
-              <a:t>12</a:t>
+              <a:t>11</a:t>
             </a:fld>
             <a:endParaRPr lang="en-US"/>
           </a:p>
@@ -1655,7 +1654,7 @@
           <a:p>
             <a:fld id="{18BDFEC3-8487-43E8-A154-7C12CBC1FFF2}" type="slidenum">
               <a:rPr lang="en-US"/>
-              <a:t>13</a:t>
+              <a:t>12</a:t>
             </a:fld>
             <a:endParaRPr lang="en-US"/>
           </a:p>
@@ -4730,6 +4729,2986 @@
 </file>
 
 <file path=ppt/slides/slide10.xml><?xml version="1.0" encoding="utf-8"?>
+<p:sld xmlns:a="http://schemas.openxmlformats.org/drawingml/2006/main" xmlns:r="http://schemas.openxmlformats.org/officeDocument/2006/relationships" xmlns:p="http://schemas.openxmlformats.org/presentationml/2006/main">
+  <p:cSld>
+    <p:spTree>
+      <p:nvGrpSpPr>
+        <p:cNvPr id="1" name=""/>
+        <p:cNvGrpSpPr/>
+        <p:nvPr/>
+      </p:nvGrpSpPr>
+      <p:grpSpPr>
+        <a:xfrm>
+          <a:off x="0" y="0"/>
+          <a:ext cx="0" cy="0"/>
+          <a:chOff x="0" y="0"/>
+          <a:chExt cx="0" cy="0"/>
+        </a:xfrm>
+      </p:grpSpPr>
+      <p:sp>
+        <p:nvSpPr>
+          <p:cNvPr id="2" name="Title 1"/>
+          <p:cNvSpPr>
+            <a:spLocks noGrp="1"/>
+          </p:cNvSpPr>
+          <p:nvPr>
+            <p:ph type="title"/>
+          </p:nvPr>
+        </p:nvSpPr>
+        <p:spPr/>
+        <p:txBody>
+          <a:bodyPr/>
+          <a:lstStyle/>
+          <a:p>
+            <a:pPr lvl="0" indent="0" marL="0">
+              <a:buNone/>
+            </a:pPr>
+            <a:r>
+              <a:rPr/>
+              <a:t>Reading a Morris Plot</a:t>
+            </a:r>
+          </a:p>
+        </p:txBody>
+      </p:sp>
+      <p:pic>
+        <p:nvPicPr>
+          <p:cNvPr descr="pianosi_fig_appendix_4.png" id="0" name="Picture 1"/>
+          <p:cNvPicPr>
+            <a:picLocks noGrp="1" noChangeAspect="1"/>
+          </p:cNvPicPr>
+          <p:nvPr/>
+        </p:nvPicPr>
+        <p:blipFill>
+          <a:blip r:embed="rId2"/>
+          <a:stretch>
+            <a:fillRect/>
+          </a:stretch>
+        </p:blipFill>
+        <p:spPr bwMode="auto">
+          <a:xfrm>
+            <a:off x="2895600" y="1193800"/>
+            <a:ext cx="3352800" cy="2882900"/>
+          </a:xfrm>
+          <a:prstGeom prst="rect">
+            <a:avLst/>
+          </a:prstGeom>
+          <a:noFill/>
+          <a:ln w="9525">
+            <a:noFill/>
+            <a:headEnd/>
+            <a:tailEnd/>
+          </a:ln>
+        </p:spPr>
+      </p:pic>
+      <p:sp>
+        <p:nvSpPr>
+          <p:cNvPr id="1" name="TextBox 3"/>
+          <p:cNvSpPr txBox="1"/>
+          <p:nvPr/>
+        </p:nvSpPr>
+        <p:spPr>
+          <a:xfrm>
+            <a:off x="457200" y="4076700"/>
+            <a:ext cx="8229600" cy="508000"/>
+          </a:xfrm>
+          <a:prstGeom prst="rect">
+            <a:avLst/>
+          </a:prstGeom>
+          <a:noFill/>
+        </p:spPr>
+        <p:txBody>
+          <a:bodyPr/>
+          <a:lstStyle/>
+          <a:p>
+            <a:pPr lvl="0" indent="0" marL="0" algn="ctr">
+              <a:buNone/>
+            </a:pPr>
+            <a:r>
+              <a:rPr/>
+              <a:t>Figure 1: Source: Pianosi et al. (2016), Appendix A.</a:t>
+            </a:r>
+          </a:p>
+        </p:txBody>
+      </p:sp>
+    </p:spTree>
+  </p:cSld>
+</p:sld>
+</file>
+
+<file path=ppt/slides/slide11.xml><?xml version="1.0" encoding="utf-8"?>
+<p:sld xmlns:a="http://schemas.openxmlformats.org/drawingml/2006/main" xmlns:r="http://schemas.openxmlformats.org/officeDocument/2006/relationships" xmlns:p="http://schemas.openxmlformats.org/presentationml/2006/main">
+  <p:cSld>
+    <p:spTree>
+      <p:nvGrpSpPr>
+        <p:cNvPr id="1" name=""/>
+        <p:cNvGrpSpPr/>
+        <p:nvPr/>
+      </p:nvGrpSpPr>
+      <p:grpSpPr>
+        <a:xfrm>
+          <a:off x="0" y="0"/>
+          <a:ext cx="0" cy="0"/>
+          <a:chOff x="0" y="0"/>
+          <a:chExt cx="0" cy="0"/>
+        </a:xfrm>
+      </p:grpSpPr>
+      <p:sp>
+        <p:nvSpPr>
+          <p:cNvPr id="3" name="Content Placeholder 2"/>
+          <p:cNvSpPr>
+            <a:spLocks noGrp="1"/>
+          </p:cNvSpPr>
+          <p:nvPr>
+            <p:ph idx="1"/>
+          </p:nvPr>
+        </p:nvSpPr>
+        <p:spPr/>
+        <p:txBody>
+          <a:bodyPr/>
+          <a:lstStyle/>
+          <a:p>
+            <a:pPr lvl="0"/>
+            <a:r>
+              <a:rPr/>
+              <a:t>Near origin: </a:t>
+            </a:r>
+            <a:r>
+              <a:rPr b="1"/>
+              <a:t>unimportant</a:t>
+            </a:r>
+            <a:r>
+              <a:rPr/>
+              <a:t> — screen out</a:t>
+            </a:r>
+          </a:p>
+          <a:p>
+            <a:pPr lvl="0"/>
+            <a:r>
+              <a:rPr/>
+              <a:t>Far right, low SD: strong </a:t>
+            </a:r>
+            <a:r>
+              <a:rPr b="1"/>
+              <a:t>main effect</a:t>
+            </a:r>
+          </a:p>
+          <a:p>
+            <a:pPr lvl="0"/>
+            <a:r>
+              <a:rPr/>
+              <a:t>Far right, high SD: important and </a:t>
+            </a:r>
+            <a:r>
+              <a:rPr b="1"/>
+              <a:t>interactive</a:t>
+            </a:r>
+          </a:p>
+        </p:txBody>
+      </p:sp>
+    </p:spTree>
+  </p:cSld>
+</p:sld>
+</file>
+
+<file path=ppt/slides/slide12.xml><?xml version="1.0" encoding="utf-8"?>
+<p:sld xmlns:a="http://schemas.openxmlformats.org/drawingml/2006/main" xmlns:r="http://schemas.openxmlformats.org/officeDocument/2006/relationships" xmlns:p="http://schemas.openxmlformats.org/presentationml/2006/main">
+  <p:cSld>
+    <p:spTree>
+      <p:nvGrpSpPr>
+        <p:cNvPr id="1" name=""/>
+        <p:cNvGrpSpPr/>
+        <p:nvPr/>
+      </p:nvGrpSpPr>
+      <p:grpSpPr>
+        <a:xfrm>
+          <a:off x="0" y="0"/>
+          <a:ext cx="0" cy="0"/>
+          <a:chOff x="0" y="0"/>
+          <a:chExt cx="0" cy="0"/>
+        </a:xfrm>
+      </p:grpSpPr>
+      <p:sp>
+        <p:nvSpPr>
+          <p:cNvPr id="2" name="Title 1"/>
+          <p:cNvSpPr>
+            <a:spLocks noGrp="1"/>
+          </p:cNvSpPr>
+          <p:nvPr>
+            <p:ph type="title"/>
+          </p:nvPr>
+        </p:nvSpPr>
+        <p:spPr/>
+        <p:txBody>
+          <a:bodyPr/>
+          <a:lstStyle/>
+          <a:p>
+            <a:pPr lvl="0" indent="0" marL="0">
+              <a:buNone/>
+            </a:pPr>
+            <a:r>
+              <a:rPr/>
+              <a:t>Variance Decomposition</a:t>
+            </a:r>
+          </a:p>
+        </p:txBody>
+      </p:sp>
+      <mc:AlternateContent xmlns:mc="http://schemas.openxmlformats.org/markup-compatibility/2006">
+        <mc:Choice xmlns:a14="http://schemas.microsoft.com/office/drawing/2010/main" Requires="a14">
+          <p:sp>
+            <p:nvSpPr>
+              <p:cNvPr id="3" name="Content Placeholder 2"/>
+              <p:cNvSpPr>
+                <a:spLocks noGrp="1"/>
+              </p:cNvSpPr>
+              <p:nvPr>
+                <p:ph idx="1"/>
+              </p:nvPr>
+            </p:nvSpPr>
+            <p:spPr/>
+            <p:txBody>
+              <a:bodyPr/>
+              <a:lstStyle/>
+              <a:p>
+                <a:pPr lvl="0" indent="0" marL="0">
+                  <a:buNone/>
+                </a:pPr>
+                <a:r>
+                  <a:rPr/>
+                  <a:t>For independent inputs, the total variance decomposes:</a:t>
+                </a:r>
+              </a:p>
+              <a:p>
+                <a:pPr lvl="0" indent="0" marL="0">
+                  <a:buNone/>
+                </a:pPr>
+                <a14:m>
+                  <m:oMathPara xmlns:m="http://schemas.openxmlformats.org/officeDocument/2006/math">
+                    <m:oMathParaPr>
+                      <m:jc m:val="center"/>
+                    </m:oMathParaPr>
+                    <m:oMath>
+                      <m:r>
+                        <m:rPr>
+                          <m:nor/>
+                          <m:sty m:val="p"/>
+                        </m:rPr>
+                        <m:t>Var</m:t>
+                      </m:r>
+                      <m:d>
+                        <m:dPr>
+                          <m:begChr m:val="("/>
+                          <m:sepChr m:val=""/>
+                          <m:endChr m:val=")"/>
+                          <m:grow/>
+                        </m:dPr>
+                        <m:e>
+                          <m:r>
+                            <m:t>Y</m:t>
+                          </m:r>
+                        </m:e>
+                      </m:d>
+                      <m:r>
+                        <m:rPr>
+                          <m:sty m:val="p"/>
+                        </m:rPr>
+                        <m:t>=</m:t>
+                      </m:r>
+                      <m:nary>
+                        <m:naryPr>
+                          <m:chr m:val="∑"/>
+                          <m:limLoc m:val="undOvr"/>
+                          <m:subHide m:val="off"/>
+                          <m:supHide m:val="on"/>
+                        </m:naryPr>
+                        <m:sub>
+                          <m:r>
+                            <m:t>i</m:t>
+                          </m:r>
+                        </m:sub>
+                        <m:sup>
+                          <m:r>
+                            <m:t>​</m:t>
+                          </m:r>
+                        </m:sup>
+                        <m:e>
+                          <m:sSub>
+                            <m:e>
+                              <m:r>
+                                <m:t>V</m:t>
+                              </m:r>
+                            </m:e>
+                            <m:sub>
+                              <m:r>
+                                <m:t>i</m:t>
+                              </m:r>
+                            </m:sub>
+                          </m:sSub>
+                        </m:e>
+                      </m:nary>
+                      <m:r>
+                        <m:rPr>
+                          <m:sty m:val="p"/>
+                        </m:rPr>
+                        <m:t>+</m:t>
+                      </m:r>
+                      <m:nary>
+                        <m:naryPr>
+                          <m:chr m:val="∑"/>
+                          <m:limLoc m:val="undOvr"/>
+                          <m:subHide m:val="off"/>
+                          <m:supHide m:val="on"/>
+                        </m:naryPr>
+                        <m:sub>
+                          <m:r>
+                            <m:t>i</m:t>
+                          </m:r>
+                          <m:r>
+                            <m:rPr>
+                              <m:sty m:val="p"/>
+                            </m:rPr>
+                            <m:t>&lt;</m:t>
+                          </m:r>
+                          <m:r>
+                            <m:t>j</m:t>
+                          </m:r>
+                        </m:sub>
+                        <m:sup>
+                          <m:r>
+                            <m:t>​</m:t>
+                          </m:r>
+                        </m:sup>
+                        <m:e>
+                          <m:sSub>
+                            <m:e>
+                              <m:r>
+                                <m:t>V</m:t>
+                              </m:r>
+                            </m:e>
+                            <m:sub>
+                              <m:r>
+                                <m:t>i</m:t>
+                              </m:r>
+                              <m:r>
+                                <m:t>j</m:t>
+                              </m:r>
+                            </m:sub>
+                          </m:sSub>
+                        </m:e>
+                      </m:nary>
+                      <m:r>
+                        <m:rPr>
+                          <m:sty m:val="p"/>
+                        </m:rPr>
+                        <m:t>+</m:t>
+                      </m:r>
+                      <m:r>
+                        <m:rPr>
+                          <m:sty m:val="p"/>
+                        </m:rPr>
+                        <m:t>⋯</m:t>
+                      </m:r>
+                      <m:r>
+                        <m:rPr>
+                          <m:sty m:val="p"/>
+                        </m:rPr>
+                        <m:t>+</m:t>
+                      </m:r>
+                      <m:sSub>
+                        <m:e>
+                          <m:r>
+                            <m:t>V</m:t>
+                          </m:r>
+                        </m:e>
+                        <m:sub>
+                          <m:r>
+                            <m:t>12</m:t>
+                          </m:r>
+                          <m:r>
+                            <m:rPr>
+                              <m:sty m:val="p"/>
+                            </m:rPr>
+                            <m:t>…</m:t>
+                          </m:r>
+                          <m:r>
+                            <m:t>M</m:t>
+                          </m:r>
+                        </m:sub>
+                      </m:sSub>
+                    </m:oMath>
+                  </m:oMathPara>
+                </a14:m>
+              </a:p>
+              <a:p>
+                <a:pPr lvl="0"/>
+                <a14:m>
+                  <m:oMath xmlns:m="http://schemas.openxmlformats.org/officeDocument/2006/math">
+                    <m:sSub>
+                      <m:e>
+                        <m:r>
+                          <m:t>V</m:t>
+                        </m:r>
+                      </m:e>
+                      <m:sub>
+                        <m:r>
+                          <m:t>i</m:t>
+                        </m:r>
+                      </m:sub>
+                    </m:sSub>
+                    <m:r>
+                      <m:rPr>
+                        <m:sty m:val="p"/>
+                      </m:rPr>
+                      <m:t>=</m:t>
+                    </m:r>
+                    <m:r>
+                      <m:rPr>
+                        <m:nor/>
+                        <m:sty m:val="p"/>
+                      </m:rPr>
+                      <m:t>Var</m:t>
+                    </m:r>
+                    <m:d>
+                      <m:dPr>
+                        <m:begChr m:val="("/>
+                        <m:sepChr m:val=""/>
+                        <m:endChr m:val=")"/>
+                        <m:grow/>
+                      </m:dPr>
+                      <m:e>
+                        <m:r>
+                          <m:rPr>
+                            <m:sty m:val="p"/>
+                            <m:scr m:val="double-struck"/>
+                          </m:rPr>
+                          <m:t>E</m:t>
+                        </m:r>
+                        <m:d>
+                          <m:dPr>
+                            <m:begChr m:val="["/>
+                            <m:sepChr m:val=""/>
+                            <m:endChr m:val="]"/>
+                            <m:grow/>
+                          </m:dPr>
+                          <m:e>
+                            <m:r>
+                              <m:t>Y</m:t>
+                            </m:r>
+                            <m:r>
+                              <m:rPr>
+                                <m:sty m:val="p"/>
+                              </m:rPr>
+                              <m:t>∣</m:t>
+                            </m:r>
+                            <m:sSub>
+                              <m:e>
+                                <m:r>
+                                  <m:t>X</m:t>
+                                </m:r>
+                              </m:e>
+                              <m:sub>
+                                <m:r>
+                                  <m:t>i</m:t>
+                                </m:r>
+                              </m:sub>
+                            </m:sSub>
+                          </m:e>
+                        </m:d>
+                      </m:e>
+                    </m:d>
+                  </m:oMath>
+                </a14:m>
+                <a:r>
+                  <a:rPr/>
+                  <a:t>: main effect of </a:t>
+                </a:r>
+                <a14:m>
+                  <m:oMath xmlns:m="http://schemas.openxmlformats.org/officeDocument/2006/math">
+                    <m:sSub>
+                      <m:e>
+                        <m:r>
+                          <m:t>X</m:t>
+                        </m:r>
+                      </m:e>
+                      <m:sub>
+                        <m:r>
+                          <m:t>i</m:t>
+                        </m:r>
+                      </m:sub>
+                    </m:sSub>
+                  </m:oMath>
+                </a14:m>
+              </a:p>
+              <a:p>
+                <a:pPr lvl="0"/>
+                <a14:m>
+                  <m:oMath xmlns:m="http://schemas.openxmlformats.org/officeDocument/2006/math">
+                    <m:sSub>
+                      <m:e>
+                        <m:r>
+                          <m:t>V</m:t>
+                        </m:r>
+                      </m:e>
+                      <m:sub>
+                        <m:r>
+                          <m:t>i</m:t>
+                        </m:r>
+                        <m:r>
+                          <m:t>j</m:t>
+                        </m:r>
+                      </m:sub>
+                    </m:sSub>
+                  </m:oMath>
+                </a14:m>
+                <a:r>
+                  <a:rPr/>
+                  <a:t>: interaction between </a:t>
+                </a:r>
+                <a14:m>
+                  <m:oMath xmlns:m="http://schemas.openxmlformats.org/officeDocument/2006/math">
+                    <m:sSub>
+                      <m:e>
+                        <m:r>
+                          <m:t>X</m:t>
+                        </m:r>
+                      </m:e>
+                      <m:sub>
+                        <m:r>
+                          <m:t>i</m:t>
+                        </m:r>
+                      </m:sub>
+                    </m:sSub>
+                  </m:oMath>
+                </a14:m>
+                <a:r>
+                  <a:rPr/>
+                  <a:t> and </a:t>
+                </a:r>
+                <a14:m>
+                  <m:oMath xmlns:m="http://schemas.openxmlformats.org/officeDocument/2006/math">
+                    <m:sSub>
+                      <m:e>
+                        <m:r>
+                          <m:t>X</m:t>
+                        </m:r>
+                      </m:e>
+                      <m:sub>
+                        <m:r>
+                          <m:t>j</m:t>
+                        </m:r>
+                      </m:sub>
+                    </m:sSub>
+                  </m:oMath>
+                </a14:m>
+              </a:p>
+              <a:p>
+                <a:pPr lvl="0"/>
+                <a:r>
+                  <a:rPr/>
+                  <a:t>Higher-order terms exist but are rarely important in practice</a:t>
+                </a:r>
+              </a:p>
+            </p:txBody>
+          </p:sp>
+        </mc:Choice>
+      </mc:AlternateContent>
+    </p:spTree>
+  </p:cSld>
+</p:sld>
+</file>
+
+<file path=ppt/slides/slide13.xml><?xml version="1.0" encoding="utf-8"?>
+<p:sld xmlns:a="http://schemas.openxmlformats.org/drawingml/2006/main" xmlns:r="http://schemas.openxmlformats.org/officeDocument/2006/relationships" xmlns:p="http://schemas.openxmlformats.org/presentationml/2006/main">
+  <p:cSld>
+    <p:spTree>
+      <p:nvGrpSpPr>
+        <p:cNvPr id="1" name=""/>
+        <p:cNvGrpSpPr/>
+        <p:nvPr/>
+      </p:nvGrpSpPr>
+      <p:grpSpPr>
+        <a:xfrm>
+          <a:off x="0" y="0"/>
+          <a:ext cx="0" cy="0"/>
+          <a:chOff x="0" y="0"/>
+          <a:chExt cx="0" cy="0"/>
+        </a:xfrm>
+      </p:grpSpPr>
+      <p:sp>
+        <p:nvSpPr>
+          <p:cNvPr id="2" name="Title 1"/>
+          <p:cNvSpPr>
+            <a:spLocks noGrp="1"/>
+          </p:cNvSpPr>
+          <p:nvPr>
+            <p:ph type="title"/>
+          </p:nvPr>
+        </p:nvSpPr>
+        <p:spPr/>
+        <p:txBody>
+          <a:bodyPr/>
+          <a:lstStyle/>
+          <a:p>
+            <a:pPr lvl="0" indent="0" marL="0">
+              <a:buNone/>
+            </a:pPr>
+            <a:r>
+              <a:rPr/>
+              <a:t>Sobol Indices</a:t>
+            </a:r>
+          </a:p>
+        </p:txBody>
+      </p:sp>
+      <mc:AlternateContent xmlns:mc="http://schemas.openxmlformats.org/markup-compatibility/2006">
+        <mc:Choice xmlns:a14="http://schemas.microsoft.com/office/drawing/2010/main" Requires="a14">
+          <p:sp>
+            <p:nvSpPr>
+              <p:cNvPr id="3" name="Content Placeholder 2"/>
+              <p:cNvSpPr>
+                <a:spLocks noGrp="1"/>
+              </p:cNvSpPr>
+              <p:nvPr>
+                <p:ph idx="1"/>
+              </p:nvPr>
+            </p:nvSpPr>
+            <p:spPr/>
+            <p:txBody>
+              <a:bodyPr/>
+              <a:lstStyle/>
+              <a:p>
+                <a:pPr lvl="0" indent="0" marL="0">
+                  <a:buNone/>
+                </a:pPr>
+                <a:r>
+                  <a:rPr b="1"/>
+                  <a:t>First-order</a:t>
+                </a:r>
+                <a:r>
+                  <a:rPr/>
+                  <a:t> — if you knew </a:t>
+                </a:r>
+                <a14:m>
+                  <m:oMath xmlns:m="http://schemas.openxmlformats.org/officeDocument/2006/math">
+                    <m:sSub>
+                      <m:e>
+                        <m:r>
+                          <m:t>X</m:t>
+                        </m:r>
+                      </m:e>
+                      <m:sub>
+                        <m:r>
+                          <m:t>i</m:t>
+                        </m:r>
+                      </m:sub>
+                    </m:sSub>
+                  </m:oMath>
+                </a14:m>
+                <a:r>
+                  <a:rPr/>
+                  <a:t>, what fraction of the variance in </a:t>
+                </a:r>
+                <a14:m>
+                  <m:oMath xmlns:m="http://schemas.openxmlformats.org/officeDocument/2006/math">
+                    <m:r>
+                      <m:t>Y</m:t>
+                    </m:r>
+                  </m:oMath>
+                </a14:m>
+                <a:r>
+                  <a:rPr/>
+                  <a:t> would go away?</a:t>
+                </a:r>
+              </a:p>
+              <a:p>
+                <a:pPr lvl="0" indent="0" marL="0">
+                  <a:buNone/>
+                </a:pPr>
+                <a14:m>
+                  <m:oMathPara xmlns:m="http://schemas.openxmlformats.org/officeDocument/2006/math">
+                    <m:oMathParaPr>
+                      <m:jc m:val="center"/>
+                    </m:oMathParaPr>
+                    <m:oMath>
+                      <m:sSub>
+                        <m:e>
+                          <m:r>
+                            <m:t>S</m:t>
+                          </m:r>
+                        </m:e>
+                        <m:sub>
+                          <m:r>
+                            <m:t>i</m:t>
+                          </m:r>
+                        </m:sub>
+                      </m:sSub>
+                      <m:r>
+                        <m:rPr>
+                          <m:sty m:val="p"/>
+                        </m:rPr>
+                        <m:t>=</m:t>
+                      </m:r>
+                      <m:f>
+                        <m:fPr>
+                          <m:type m:val="bar"/>
+                        </m:fPr>
+                        <m:num>
+                          <m:r>
+                            <m:rPr>
+                              <m:nor/>
+                              <m:sty m:val="p"/>
+                            </m:rPr>
+                            <m:t>Var</m:t>
+                          </m:r>
+                          <m:d>
+                            <m:dPr>
+                              <m:begChr m:val="("/>
+                              <m:sepChr m:val=""/>
+                              <m:endChr m:val=")"/>
+                              <m:grow/>
+                            </m:dPr>
+                            <m:e>
+                              <m:r>
+                                <m:rPr>
+                                  <m:sty m:val="p"/>
+                                  <m:scr m:val="double-struck"/>
+                                </m:rPr>
+                                <m:t>E</m:t>
+                              </m:r>
+                              <m:d>
+                                <m:dPr>
+                                  <m:begChr m:val="["/>
+                                  <m:sepChr m:val=""/>
+                                  <m:endChr m:val="]"/>
+                                  <m:grow/>
+                                </m:dPr>
+                                <m:e>
+                                  <m:r>
+                                    <m:t>Y</m:t>
+                                  </m:r>
+                                  <m:r>
+                                    <m:rPr>
+                                      <m:sty m:val="p"/>
+                                    </m:rPr>
+                                    <m:t>∣</m:t>
+                                  </m:r>
+                                  <m:sSub>
+                                    <m:e>
+                                      <m:r>
+                                        <m:t>X</m:t>
+                                      </m:r>
+                                    </m:e>
+                                    <m:sub>
+                                      <m:r>
+                                        <m:t>i</m:t>
+                                      </m:r>
+                                    </m:sub>
+                                  </m:sSub>
+                                </m:e>
+                              </m:d>
+                            </m:e>
+                          </m:d>
+                        </m:num>
+                        <m:den>
+                          <m:r>
+                            <m:rPr>
+                              <m:nor/>
+                              <m:sty m:val="p"/>
+                            </m:rPr>
+                            <m:t>Var</m:t>
+                          </m:r>
+                          <m:d>
+                            <m:dPr>
+                              <m:begChr m:val="("/>
+                              <m:sepChr m:val=""/>
+                              <m:endChr m:val=")"/>
+                              <m:grow/>
+                            </m:dPr>
+                            <m:e>
+                              <m:r>
+                                <m:t>Y</m:t>
+                              </m:r>
+                            </m:e>
+                          </m:d>
+                        </m:den>
+                      </m:f>
+                    </m:oMath>
+                  </m:oMathPara>
+                </a14:m>
+              </a:p>
+              <a:p>
+                <a:pPr lvl="0" indent="0" marL="0">
+                  <a:buNone/>
+                </a:pPr>
+                <a:r>
+                  <a:rPr b="1"/>
+                  <a:t>Total-order</a:t>
+                </a:r>
+                <a:r>
+                  <a:rPr/>
+                  <a:t> — if you knew everything </a:t>
+                </a:r>
+                <a:r>
+                  <a:rPr i="1"/>
+                  <a:t>except</a:t>
+                </a:r>
+                <a:r>
+                  <a:rPr/>
+                  <a:t> </a:t>
+                </a:r>
+                <a14:m>
+                  <m:oMath xmlns:m="http://schemas.openxmlformats.org/officeDocument/2006/math">
+                    <m:sSub>
+                      <m:e>
+                        <m:r>
+                          <m:t>X</m:t>
+                        </m:r>
+                      </m:e>
+                      <m:sub>
+                        <m:r>
+                          <m:t>i</m:t>
+                        </m:r>
+                      </m:sub>
+                    </m:sSub>
+                  </m:oMath>
+                </a14:m>
+                <a:r>
+                  <a:rPr/>
+                  <a:t>, what fraction of the variance would remain?</a:t>
+                </a:r>
+              </a:p>
+              <a:p>
+                <a:pPr lvl="0" indent="0" marL="0">
+                  <a:buNone/>
+                </a:pPr>
+                <a14:m>
+                  <m:oMathPara xmlns:m="http://schemas.openxmlformats.org/officeDocument/2006/math">
+                    <m:oMathParaPr>
+                      <m:jc m:val="center"/>
+                    </m:oMathParaPr>
+                    <m:oMath>
+                      <m:sSub>
+                        <m:e>
+                          <m:r>
+                            <m:t>S</m:t>
+                          </m:r>
+                        </m:e>
+                        <m:sub>
+                          <m:sSub>
+                            <m:e>
+                              <m:r>
+                                <m:t>T</m:t>
+                              </m:r>
+                            </m:e>
+                            <m:sub>
+                              <m:r>
+                                <m:t>i</m:t>
+                              </m:r>
+                            </m:sub>
+                          </m:sSub>
+                        </m:sub>
+                      </m:sSub>
+                      <m:r>
+                        <m:rPr>
+                          <m:sty m:val="p"/>
+                        </m:rPr>
+                        <m:t>=</m:t>
+                      </m:r>
+                      <m:r>
+                        <m:t>1</m:t>
+                      </m:r>
+                      <m:r>
+                        <m:rPr>
+                          <m:sty m:val="p"/>
+                        </m:rPr>
+                        <m:t>−</m:t>
+                      </m:r>
+                      <m:f>
+                        <m:fPr>
+                          <m:type m:val="bar"/>
+                        </m:fPr>
+                        <m:num>
+                          <m:r>
+                            <m:rPr>
+                              <m:nor/>
+                              <m:sty m:val="p"/>
+                            </m:rPr>
+                            <m:t>Var</m:t>
+                          </m:r>
+                          <m:d>
+                            <m:dPr>
+                              <m:begChr m:val="("/>
+                              <m:sepChr m:val=""/>
+                              <m:endChr m:val=")"/>
+                              <m:grow/>
+                            </m:dPr>
+                            <m:e>
+                              <m:r>
+                                <m:rPr>
+                                  <m:sty m:val="p"/>
+                                  <m:scr m:val="double-struck"/>
+                                </m:rPr>
+                                <m:t>E</m:t>
+                              </m:r>
+                              <m:d>
+                                <m:dPr>
+                                  <m:begChr m:val="["/>
+                                  <m:sepChr m:val=""/>
+                                  <m:endChr m:val="]"/>
+                                  <m:grow/>
+                                </m:dPr>
+                                <m:e>
+                                  <m:r>
+                                    <m:t>Y</m:t>
+                                  </m:r>
+                                  <m:r>
+                                    <m:rPr>
+                                      <m:sty m:val="p"/>
+                                    </m:rPr>
+                                    <m:t>∣</m:t>
+                                  </m:r>
+                                  <m:sSub>
+                                    <m:e>
+                                      <m:r>
+                                        <m:t>X</m:t>
+                                      </m:r>
+                                    </m:e>
+                                    <m:sub>
+                                      <m:r>
+                                        <m:rPr>
+                                          <m:sty m:val="p"/>
+                                        </m:rPr>
+                                        <m:t>∼</m:t>
+                                      </m:r>
+                                      <m:r>
+                                        <m:t>i</m:t>
+                                      </m:r>
+                                    </m:sub>
+                                  </m:sSub>
+                                </m:e>
+                              </m:d>
+                            </m:e>
+                          </m:d>
+                        </m:num>
+                        <m:den>
+                          <m:r>
+                            <m:rPr>
+                              <m:nor/>
+                              <m:sty m:val="p"/>
+                            </m:rPr>
+                            <m:t>Var</m:t>
+                          </m:r>
+                          <m:d>
+                            <m:dPr>
+                              <m:begChr m:val="("/>
+                              <m:sepChr m:val=""/>
+                              <m:endChr m:val=")"/>
+                              <m:grow/>
+                            </m:dPr>
+                            <m:e>
+                              <m:r>
+                                <m:t>Y</m:t>
+                              </m:r>
+                            </m:e>
+                          </m:d>
+                        </m:den>
+                      </m:f>
+                    </m:oMath>
+                  </m:oMathPara>
+                </a14:m>
+              </a:p>
+              <a:p>
+                <a:pPr lvl="0" indent="0" marL="0">
+                  <a:buNone/>
+                </a:pPr>
+                <a:r>
+                  <a:rPr/>
+                  <a:t>where </a:t>
+                </a:r>
+                <a14:m>
+                  <m:oMath xmlns:m="http://schemas.openxmlformats.org/officeDocument/2006/math">
+                    <m:sSub>
+                      <m:e>
+                        <m:r>
+                          <m:t>X</m:t>
+                        </m:r>
+                      </m:e>
+                      <m:sub>
+                        <m:r>
+                          <m:rPr>
+                            <m:sty m:val="p"/>
+                          </m:rPr>
+                          <m:t>∼</m:t>
+                        </m:r>
+                        <m:r>
+                          <m:t>i</m:t>
+                        </m:r>
+                      </m:sub>
+                    </m:sSub>
+                  </m:oMath>
+                </a14:m>
+                <a:r>
+                  <a:rPr/>
+                  <a:t> denotes all inputs </a:t>
+                </a:r>
+                <a:r>
+                  <a:rPr i="1"/>
+                  <a:t>except</a:t>
+                </a:r>
+                <a:r>
+                  <a:rPr/>
+                  <a:t> </a:t>
+                </a:r>
+                <a14:m>
+                  <m:oMath xmlns:m="http://schemas.openxmlformats.org/officeDocument/2006/math">
+                    <m:sSub>
+                      <m:e>
+                        <m:r>
+                          <m:t>X</m:t>
+                        </m:r>
+                      </m:e>
+                      <m:sub>
+                        <m:r>
+                          <m:t>i</m:t>
+                        </m:r>
+                      </m:sub>
+                    </m:sSub>
+                  </m:oMath>
+                </a14:m>
+                <a:r>
+                  <a:rPr/>
+                  <a:t>.</a:t>
+                </a:r>
+              </a:p>
+            </p:txBody>
+          </p:sp>
+        </mc:Choice>
+      </mc:AlternateContent>
+    </p:spTree>
+  </p:cSld>
+</p:sld>
+</file>
+
+<file path=ppt/slides/slide14.xml><?xml version="1.0" encoding="UTF-8"?><p:sld xmlns:a="http://schemas.openxmlformats.org/drawingml/2006/main" xmlns:r="http://schemas.openxmlformats.org/officeDocument/2006/relationships" xmlns:p="http://schemas.openxmlformats.org/presentationml/2006/main"><p:cSld><p:spTree><p:nvGrpSpPr><p:cNvPr id="1" name="" /><p:cNvGrpSpPr /><p:nvPr /></p:nvGrpSpPr><p:grpSpPr><a:xfrm><a:off x="0" y="0" /><a:ext cx="0" cy="0" /><a:chOff x="0" y="0" /><a:chExt cx="0" cy="0" /></a:xfrm></p:grpSpPr><p:sp><p:nvSpPr><p:cNvPr id="2" name="Title 1" /><p:cNvSpPr><a:spLocks noGrp="1" /></p:cNvSpPr><p:nvPr><p:ph type="title" /></p:nvPr></p:nvSpPr><p:spPr /><p:txBody><a:bodyPr /><a:lstStyle /><a:p><a:pPr lvl="0" indent="0" marL="0"><a:buNone /></a:pPr><a:r><a:rPr /><a:t>Interpreting Sobol Indices</a:t></a:r></a:p></p:txBody></p:sp><p:graphicFrame><p:nvGraphicFramePr><p:cNvPr id="6" name="Content Placeholder 5" /><p:cNvGraphicFramePr><a:graphicFrameLocks noGrp="1" /></p:cNvGraphicFramePr><p:nvPr><p:ph idx="1" /></p:nvPr></p:nvGraphicFramePr><p:xfrm><a:off x="457200" y="1193800" /><a:ext cx="8229600" cy="3390900" /></p:xfrm><a:graphic><a:graphicData uri="http://schemas.openxmlformats.org/drawingml/2006/table"><a:tbl><a:tblPr firstRow="1" bandRow="1"><a:tableStyleId>{5C22544A-7EE6-4342-B048-85BDC9FD1C3A}</a:tableStyleId></a:tblPr><a:tblGrid><a:gridCol w="4114800" /><a:gridCol w="4114800" /></a:tblGrid><a:tr h="0"><a:tc><a:txBody><a:bodyPr /><a:lstStyle /><a:p><a:pPr lvl="0" indent="0" marL="0" algn="l"><a:buNone /></a:pPr><a:r><a:rPr /><a:t>Pattern</a:t></a:r></a:p></a:txBody><a:tcPr /></a:tc><a:tc><a:txBody><a:bodyPr /><a:lstStyle /><a:p><a:pPr lvl="0" indent="0" marL="0" algn="l"><a:buNone /></a:pPr><a:r><a:rPr /><a:t>Interpretation</a:t></a:r></a:p></a:txBody><a:tcPr /></a:tc></a:tr><a:tr h="0"><a:tc><a:txBody><a:bodyPr /><a:lstStyle /><a:p><a:pPr lvl="0" indent="0" marL="0" algn="l"><a:buNone /></a:pPr><a14:m><m:oMath xmlns:m="http://schemas.openxmlformats.org/officeDocument/2006/math"><m:sSub><m:e><m:r><m:t>S</m:t></m:r></m:e><m:sub><m:r><m:t>i</m:t></m:r></m:sub></m:sSub></m:oMath></a14:m><a:r><a:rPr /><a:t> large, </a:t></a:r><a14:m><m:oMath xmlns:m="http://schemas.openxmlformats.org/officeDocument/2006/math"><m:sSub><m:e><m:r><m:t>S</m:t></m:r></m:e><m:sub><m:sSub><m:e><m:r><m:t>T</m:t></m:r></m:e><m:sub><m:r><m:t>i</m:t></m:r></m:sub></m:sSub></m:sub></m:sSub><m:r><m:rPr><m:sty m:val="p" /></m:rPr><m:t>≈</m:t></m:r><m:sSub><m:e><m:r><m:t>S</m:t></m:r></m:e><m:sub><m:r><m:t>i</m:t></m:r></m:sub></m:sSub></m:oMath></a14:m></a:p></a:txBody></a:tc><a:tc><a:txBody><a:bodyPr /><a:lstStyle /><a:p><a:pPr lvl="0" indent="0" marL="0" algn="l"><a:buNone /></a:pPr><a:r><a:rPr /><a:t>Strong main effect, few interactions</a:t></a:r></a:p></a:txBody></a:tc></a:tr><a:tr h="0"><a:tc><a:txBody><a:bodyPr /><a:lstStyle /><a:p><a:pPr lvl="0" indent="0" marL="0" algn="l"><a:buNone /></a:pPr><a14:m><m:oMath xmlns:m="http://schemas.openxmlformats.org/officeDocument/2006/math"><m:sSub><m:e><m:r><m:t>S</m:t></m:r></m:e><m:sub><m:r><m:t>i</m:t></m:r></m:sub></m:sSub></m:oMath></a14:m><a:r><a:rPr /><a:t> small, </a:t></a:r><a14:m><m:oMath xmlns:m="http://schemas.openxmlformats.org/officeDocument/2006/math"><m:sSub><m:e><m:r><m:t>S</m:t></m:r></m:e><m:sub><m:sSub><m:e><m:r><m:t>T</m:t></m:r></m:e><m:sub><m:r><m:t>i</m:t></m:r></m:sub></m:sSub></m:sub></m:sSub></m:oMath></a14:m><a:r><a:rPr /><a:t> large</a:t></a:r></a:p></a:txBody></a:tc><a:tc><a:txBody><a:bodyPr /><a:lstStyle /><a:p><a:pPr lvl="0" indent="0" marL="0" algn="l"><a:buNone /></a:pPr><a:r><a:rPr /><a:t>Matters mainly through interactions</a:t></a:r></a:p></a:txBody></a:tc></a:tr><a:tr h="0"><a:tc><a:txBody><a:bodyPr /><a:lstStyle /><a:p><a:pPr lvl="0" indent="0" marL="0" algn="l"><a:buNone /></a:pPr><a14:m><m:oMath xmlns:m="http://schemas.openxmlformats.org/officeDocument/2006/math"><m:sSub><m:e><m:r><m:t>S</m:t></m:r></m:e><m:sub><m:r><m:t>i</m:t></m:r></m:sub></m:sSub></m:oMath></a14:m><a:r><a:rPr /><a:t> small, </a:t></a:r><a14:m><m:oMath xmlns:m="http://schemas.openxmlformats.org/officeDocument/2006/math"><m:sSub><m:e><m:r><m:t>S</m:t></m:r></m:e><m:sub><m:sSub><m:e><m:r><m:t>T</m:t></m:r></m:e><m:sub><m:r><m:t>i</m:t></m:r></m:sub></m:sSub></m:sub></m:sSub></m:oMath></a14:m><a:r><a:rPr /><a:t> small</a:t></a:r></a:p></a:txBody></a:tc><a:tc><a:txBody><a:bodyPr /><a:lstStyle /><a:p><a:pPr lvl="0" indent="0" marL="0" algn="l"><a:buNone /></a:pPr><a:r><a:rPr /><a:t>Doesn’t matter much</a:t></a:r></a:p></a:txBody></a:tc></a:tr><a:tr h="0"><a:tc><a:txBody><a:bodyPr /><a:lstStyle /><a:p><a:pPr lvl="0" indent="0" marL="0" algn="l"><a:buNone /></a:pPr><a14:m><m:oMath xmlns:m="http://schemas.openxmlformats.org/officeDocument/2006/math"><m:r><m:rPr><m:sty m:val="p" /></m:rPr><m:t>∑</m:t></m:r><m:sSub><m:e><m:r><m:t>S</m:t></m:r></m:e><m:sub><m:r><m:t>i</m:t></m:r></m:sub></m:sSub><m:r><m:rPr><m:sty m:val="p" /></m:rPr><m:t>≈</m:t></m:r><m:r><m:t>1</m:t></m:r></m:oMath></a14:m></a:p></a:txBody></a:tc><a:tc><a:txBody><a:bodyPr /><a:lstStyle /><a:p><a:pPr lvl="0" indent="0" marL="0" algn="l"><a:buNone /></a:pPr><a:r><a:rPr /><a:t>Model is mostly additive</a:t></a:r></a:p></a:txBody></a:tc></a:tr></a:tbl></a:graphicData></a:graphic></p:graphicFrame></p:spTree></p:cSld></p:sld>
+</file>
+
+<file path=ppt/slides/slide15.xml><?xml version="1.0" encoding="utf-8"?>
+<p:sld xmlns:a="http://schemas.openxmlformats.org/drawingml/2006/main" xmlns:r="http://schemas.openxmlformats.org/officeDocument/2006/relationships" xmlns:p="http://schemas.openxmlformats.org/presentationml/2006/main">
+  <p:cSld>
+    <p:spTree>
+      <p:nvGrpSpPr>
+        <p:cNvPr id="1" name=""/>
+        <p:cNvGrpSpPr/>
+        <p:nvPr/>
+      </p:nvGrpSpPr>
+      <p:grpSpPr>
+        <a:xfrm>
+          <a:off x="0" y="0"/>
+          <a:ext cx="0" cy="0"/>
+          <a:chOff x="0" y="0"/>
+          <a:chExt cx="0" cy="0"/>
+        </a:xfrm>
+      </p:grpSpPr>
+      <mc:AlternateContent xmlns:mc="http://schemas.openxmlformats.org/markup-compatibility/2006">
+        <mc:Choice xmlns:a14="http://schemas.microsoft.com/office/drawing/2010/main" Requires="a14">
+          <p:sp>
+            <p:nvSpPr>
+              <p:cNvPr id="3" name="Content Placeholder 2"/>
+              <p:cNvSpPr>
+                <a:spLocks noGrp="1"/>
+              </p:cNvSpPr>
+              <p:nvPr>
+                <p:ph idx="1"/>
+              </p:nvPr>
+            </p:nvSpPr>
+            <p:spPr/>
+            <p:txBody>
+              <a:bodyPr/>
+              <a:lstStyle/>
+              <a:p>
+                <a:pPr lvl="0" indent="0" marL="0">
+                  <a:buNone/>
+                </a:pPr>
+                <a:r>
+                  <a:rPr/>
+                  <a:t>Screening rule: </a:t>
+                </a:r>
+                <a14:m>
+                  <m:oMath xmlns:m="http://schemas.openxmlformats.org/officeDocument/2006/math">
+                    <m:sSub>
+                      <m:e>
+                        <m:r>
+                          <m:t>S</m:t>
+                        </m:r>
+                      </m:e>
+                      <m:sub>
+                        <m:sSub>
+                          <m:e>
+                            <m:r>
+                              <m:t>T</m:t>
+                            </m:r>
+                          </m:e>
+                          <m:sub>
+                            <m:r>
+                              <m:t>i</m:t>
+                            </m:r>
+                          </m:sub>
+                        </m:sSub>
+                      </m:sub>
+                    </m:sSub>
+                    <m:r>
+                      <m:rPr>
+                        <m:sty m:val="p"/>
+                      </m:rPr>
+                      <m:t>≈</m:t>
+                    </m:r>
+                    <m:r>
+                      <m:t>0</m:t>
+                    </m:r>
+                  </m:oMath>
+                </a14:m>
+                <a:r>
+                  <a:rPr/>
+                  <a:t> is necessary and sufficient for unimportance (Pianosi et al. 2016).</a:t>
+                </a:r>
+              </a:p>
+            </p:txBody>
+          </p:sp>
+        </mc:Choice>
+      </mc:AlternateContent>
+    </p:spTree>
+  </p:cSld>
+</p:sld>
+</file>
+
+<file path=ppt/slides/slide16.xml><?xml version="1.0" encoding="utf-8"?>
+<p:sld xmlns:a="http://schemas.openxmlformats.org/drawingml/2006/main" xmlns:r="http://schemas.openxmlformats.org/officeDocument/2006/relationships" xmlns:p="http://schemas.openxmlformats.org/presentationml/2006/main">
+  <p:cSld>
+    <p:spTree>
+      <p:nvGrpSpPr>
+        <p:cNvPr id="1" name=""/>
+        <p:cNvGrpSpPr/>
+        <p:nvPr/>
+      </p:nvGrpSpPr>
+      <p:grpSpPr>
+        <a:xfrm>
+          <a:off x="0" y="0"/>
+          <a:ext cx="0" cy="0"/>
+          <a:chOff x="0" y="0"/>
+          <a:chExt cx="0" cy="0"/>
+        </a:xfrm>
+      </p:grpSpPr>
+      <p:sp>
+        <p:nvSpPr>
+          <p:cNvPr id="2" name="Title 1"/>
+          <p:cNvSpPr>
+            <a:spLocks noGrp="1"/>
+          </p:cNvSpPr>
+          <p:nvPr>
+            <p:ph type="title"/>
+          </p:nvPr>
+        </p:nvSpPr>
+        <p:spPr/>
+        <p:txBody>
+          <a:bodyPr/>
+          <a:lstStyle/>
+          <a:p>
+            <a:pPr lvl="0" indent="0" marL="0">
+              <a:buNone/>
+            </a:pPr>
+            <a:r>
+              <a:rPr/>
+              <a:t>Reading a Sensitivity Analysis</a:t>
+            </a:r>
+          </a:p>
+        </p:txBody>
+      </p:sp>
+      <p:sp>
+        <p:nvSpPr>
+          <p:cNvPr id="3" name="Content Placeholder 2"/>
+          <p:cNvSpPr>
+            <a:spLocks noGrp="1"/>
+          </p:cNvSpPr>
+          <p:nvPr>
+            <p:ph idx="1"/>
+          </p:nvPr>
+        </p:nvSpPr>
+        <p:spPr/>
+        <p:txBody>
+          <a:bodyPr/>
+          <a:lstStyle/>
+          <a:p>
+            <a:pPr lvl="0" indent="0" marL="0">
+              <a:buNone/>
+            </a:pPr>
+            <a:r>
+              <a:rPr/>
+              <a:t>Three questions to always ask:</a:t>
+            </a:r>
+          </a:p>
+          <a:p>
+            <a:pPr lvl="0" indent="-342900" marL="342900">
+              <a:buAutoNum type="arabicPeriod"/>
+            </a:pPr>
+            <a:r>
+              <a:rPr b="1"/>
+              <a:t>What inputs were varied?</a:t>
+            </a:r>
+            <a:r>
+              <a:rPr/>
+              <a:t> Different scope → different results</a:t>
+            </a:r>
+          </a:p>
+          <a:p>
+            <a:pPr lvl="0" indent="-342900" marL="342900">
+              <a:buAutoNum type="arabicPeriod"/>
+            </a:pPr>
+            <a:r>
+              <a:rPr b="1"/>
+              <a:t>What distributions were assumed?</a:t>
+            </a:r>
+            <a:r>
+              <a:rPr/>
+              <a:t> Change the distribution, change the indices</a:t>
+            </a:r>
+          </a:p>
+          <a:p>
+            <a:pPr lvl="0" indent="-342900" marL="342900">
+              <a:buAutoNum type="arabicPeriod"/>
+            </a:pPr>
+            <a:r>
+              <a:rPr b="1"/>
+              <a:t>Are the results converged?</a:t>
+            </a:r>
+            <a:r>
+              <a:rPr/>
+              <a:t> Finite samples give estimates, not exact values</a:t>
+            </a:r>
+          </a:p>
+        </p:txBody>
+      </p:sp>
+    </p:spTree>
+  </p:cSld>
+</p:sld>
+</file>
+
+<file path=ppt/slides/slide17.xml><?xml version="1.0" encoding="utf-8"?>
+<p:sld xmlns:a="http://schemas.openxmlformats.org/drawingml/2006/main" xmlns:r="http://schemas.openxmlformats.org/officeDocument/2006/relationships" xmlns:p="http://schemas.openxmlformats.org/presentationml/2006/main">
+  <p:cSld>
+    <p:spTree>
+      <p:nvGrpSpPr>
+        <p:cNvPr id="1" name=""/>
+        <p:cNvGrpSpPr/>
+        <p:nvPr/>
+      </p:nvGrpSpPr>
+      <p:grpSpPr>
+        <a:xfrm>
+          <a:off x="0" y="0"/>
+          <a:ext cx="0" cy="0"/>
+          <a:chOff x="0" y="0"/>
+          <a:chExt cx="0" cy="0"/>
+        </a:xfrm>
+      </p:grpSpPr>
+      <p:sp>
+        <p:nvSpPr>
+          <p:cNvPr id="2" name="Title 1"/>
+          <p:cNvSpPr>
+            <a:spLocks noGrp="1"/>
+          </p:cNvSpPr>
+          <p:nvPr>
+            <p:ph type="title"/>
+          </p:nvPr>
+        </p:nvSpPr>
+        <p:spPr/>
+        <p:txBody>
+          <a:bodyPr/>
+          <a:lstStyle/>
+          <a:p>
+            <a:pPr lvl="0" indent="0" marL="0">
+              <a:buNone/>
+            </a:pPr>
+            <a:r>
+              <a:rPr/>
+              <a:t>The Distribution Assumption</a:t>
+            </a:r>
+          </a:p>
+        </p:txBody>
+      </p:sp>
+      <mc:AlternateContent xmlns:mc="http://schemas.openxmlformats.org/markup-compatibility/2006">
+        <mc:Choice xmlns:a14="http://schemas.microsoft.com/office/drawing/2010/main" Requires="a14">
+          <p:sp>
+            <p:nvSpPr>
+              <p:cNvPr id="3" name="Content Placeholder 2"/>
+              <p:cNvSpPr>
+                <a:spLocks noGrp="1"/>
+              </p:cNvSpPr>
+              <p:nvPr>
+                <p:ph idx="1"/>
+              </p:nvPr>
+            </p:nvSpPr>
+            <p:spPr/>
+            <p:txBody>
+              <a:bodyPr/>
+              <a:lstStyle/>
+              <a:p>
+                <a:pPr lvl="0" indent="0" marL="0">
+                  <a:buNone/>
+                </a:pPr>
+                <a:r>
+                  <a:rPr b="1"/>
+                  <a:t>Every GSA calculation requires a probability distribution</a:t>
+                </a:r>
+                <a:r>
+                  <a:rPr/>
+                  <a:t> </a:t>
+                </a:r>
+                <a14:m>
+                  <m:oMath xmlns:m="http://schemas.openxmlformats.org/officeDocument/2006/math">
+                    <m:r>
+                      <m:t>p</m:t>
+                    </m:r>
+                    <m:d>
+                      <m:dPr>
+                        <m:begChr m:val="("/>
+                        <m:sepChr m:val=""/>
+                        <m:endChr m:val=")"/>
+                        <m:grow/>
+                      </m:dPr>
+                      <m:e>
+                        <m:sSub>
+                          <m:e>
+                            <m:r>
+                              <m:t>X</m:t>
+                            </m:r>
+                          </m:e>
+                          <m:sub>
+                            <m:r>
+                              <m:t>1</m:t>
+                            </m:r>
+                          </m:sub>
+                        </m:sSub>
+                        <m:r>
+                          <m:rPr>
+                            <m:sty m:val="p"/>
+                          </m:rPr>
+                          <m:t>,</m:t>
+                        </m:r>
+                        <m:r>
+                          <m:rPr>
+                            <m:sty m:val="p"/>
+                          </m:rPr>
+                          <m:t>…</m:t>
+                        </m:r>
+                        <m:r>
+                          <m:rPr>
+                            <m:sty m:val="p"/>
+                          </m:rPr>
+                          <m:t>,</m:t>
+                        </m:r>
+                        <m:sSub>
+                          <m:e>
+                            <m:r>
+                              <m:t>X</m:t>
+                            </m:r>
+                          </m:e>
+                          <m:sub>
+                            <m:r>
+                              <m:t>M</m:t>
+                            </m:r>
+                          </m:sub>
+                        </m:sSub>
+                      </m:e>
+                    </m:d>
+                  </m:oMath>
+                </a14:m>
+                <a:r>
+                  <a:rPr/>
+                  <a:t>.</a:t>
+                </a:r>
+              </a:p>
+              <a:p>
+                <a:pPr lvl="0" indent="0" marL="0">
+                  <a:buNone/>
+                </a:pPr>
+                <a14:m>
+                  <m:oMath xmlns:m="http://schemas.openxmlformats.org/officeDocument/2006/math">
+                    <m:r>
+                      <m:rPr>
+                        <m:nor/>
+                        <m:sty m:val="p"/>
+                      </m:rPr>
+                      <m:t>Uniform</m:t>
+                    </m:r>
+                    <m:d>
+                      <m:dPr>
+                        <m:begChr m:val="("/>
+                        <m:sepChr m:val=""/>
+                        <m:endChr m:val=")"/>
+                        <m:grow/>
+                      </m:dPr>
+                      <m:e>
+                        <m:r>
+                          <m:rPr>
+                            <m:sty m:val="p"/>
+                          </m:rPr>
+                          <m:t>−</m:t>
+                        </m:r>
+                        <m:r>
+                          <m:t>π</m:t>
+                        </m:r>
+                        <m:r>
+                          <m:rPr>
+                            <m:sty m:val="p"/>
+                          </m:rPr>
+                          <m:t>,</m:t>
+                        </m:r>
+                        <m:r>
+                          <m:t>π</m:t>
+                        </m:r>
+                      </m:e>
+                    </m:d>
+                  </m:oMath>
+                </a14:m>
+                <a:r>
+                  <a:rPr/>
+                  <a:t> gives different Sobol indices than </a:t>
+                </a:r>
+                <a14:m>
+                  <m:oMath xmlns:m="http://schemas.openxmlformats.org/officeDocument/2006/math">
+                    <m:r>
+                      <m:rPr>
+                        <m:nor/>
+                        <m:sty m:val="p"/>
+                      </m:rPr>
+                      <m:t>Normal</m:t>
+                    </m:r>
+                    <m:d>
+                      <m:dPr>
+                        <m:begChr m:val="("/>
+                        <m:sepChr m:val=""/>
+                        <m:endChr m:val=")"/>
+                        <m:grow/>
+                      </m:dPr>
+                      <m:e>
+                        <m:r>
+                          <m:t>0</m:t>
+                        </m:r>
+                        <m:r>
+                          <m:rPr>
+                            <m:sty m:val="p"/>
+                          </m:rPr>
+                          <m:t>,</m:t>
+                        </m:r>
+                        <m:r>
+                          <m:t>0.1</m:t>
+                        </m:r>
+                      </m:e>
+                    </m:d>
+                  </m:oMath>
+                </a14:m>
+                <a:r>
+                  <a:rPr/>
+                  <a:t>.</a:t>
+                </a:r>
+              </a:p>
+              <a:p>
+                <a:pPr lvl="0" indent="0" marL="1270000">
+                  <a:buNone/>
+                </a:pPr>
+                <a:r>
+                  <a:rPr sz="2000"/>
+                  <a:t>“The definition of the input variability space is one of the most delicate steps in the application of GSA.” — Pianosi et al. (2016)</a:t>
+                </a:r>
+              </a:p>
+            </p:txBody>
+          </p:sp>
+        </mc:Choice>
+      </mc:AlternateContent>
+    </p:spTree>
+  </p:cSld>
+</p:sld>
+</file>
+
+<file path=ppt/slides/slide18.xml><?xml version="1.0" encoding="utf-8"?>
+<p:sld xmlns:a="http://schemas.openxmlformats.org/drawingml/2006/main" xmlns:r="http://schemas.openxmlformats.org/officeDocument/2006/relationships" xmlns:p="http://schemas.openxmlformats.org/presentationml/2006/main">
+  <p:cSld>
+    <p:spTree>
+      <p:nvGrpSpPr>
+        <p:cNvPr id="1" name=""/>
+        <p:cNvGrpSpPr/>
+        <p:nvPr/>
+      </p:nvGrpSpPr>
+      <p:grpSpPr>
+        <a:xfrm>
+          <a:off x="0" y="0"/>
+          <a:ext cx="0" cy="0"/>
+          <a:chOff x="0" y="0"/>
+          <a:chExt cx="0" cy="0"/>
+        </a:xfrm>
+      </p:grpSpPr>
+      <p:sp>
+        <p:nvSpPr>
+          <p:cNvPr id="2" name="Title 1"/>
+          <p:cNvSpPr>
+            <a:spLocks noGrp="1"/>
+          </p:cNvSpPr>
+          <p:nvPr>
+            <p:ph type="title"/>
+          </p:nvPr>
+        </p:nvSpPr>
+        <p:spPr/>
+        <p:txBody>
+          <a:bodyPr/>
+          <a:lstStyle/>
+          <a:p>
+            <a:pPr lvl="0" indent="0" marL="0">
+              <a:buNone/>
+            </a:pPr>
+            <a:r>
+              <a:rPr/>
+              <a:t>Summary</a:t>
+            </a:r>
+          </a:p>
+        </p:txBody>
+      </p:sp>
+      <p:sp>
+        <p:nvSpPr>
+          <p:cNvPr id="3" name="Content Placeholder 2"/>
+          <p:cNvSpPr>
+            <a:spLocks noGrp="1"/>
+          </p:cNvSpPr>
+          <p:nvPr>
+            <p:ph idx="1"/>
+          </p:nvPr>
+        </p:nvSpPr>
+        <p:spPr/>
+        <p:txBody>
+          <a:bodyPr/>
+          <a:lstStyle/>
+          <a:p>
+            <a:pPr lvl="0"/>
+            <a:r>
+              <a:rPr b="1"/>
+              <a:t>VOI</a:t>
+            </a:r>
+            <a:r>
+              <a:rPr/>
+              <a:t>: which uncertainty affects the </a:t>
+            </a:r>
+            <a:r>
+              <a:rPr b="1"/>
+              <a:t>decision</a:t>
+            </a:r>
+            <a:r>
+              <a:rPr/>
+              <a:t>?</a:t>
+            </a:r>
+          </a:p>
+          <a:p>
+            <a:pPr lvl="0"/>
+            <a:r>
+              <a:rPr b="1"/>
+              <a:t>GSA</a:t>
+            </a:r>
+            <a:r>
+              <a:rPr/>
+              <a:t>: which uncertainty affects the </a:t>
+            </a:r>
+            <a:r>
+              <a:rPr b="1"/>
+              <a:t>output</a:t>
+            </a:r>
+            <a:r>
+              <a:rPr/>
+              <a:t>?</a:t>
+            </a:r>
+          </a:p>
+          <a:p>
+            <a:pPr lvl="0"/>
+            <a:r>
+              <a:rPr/>
+              <a:t>These are </a:t>
+            </a:r>
+            <a:r>
+              <a:rPr b="1"/>
+              <a:t>not the same</a:t>
+            </a:r>
+            <a:r>
+              <a:rPr/>
+              <a:t> — answers can disagree</a:t>
+            </a:r>
+          </a:p>
+          <a:p>
+            <a:pPr lvl="0"/>
+            <a:r>
+              <a:rPr/>
+              <a:t>Both require </a:t>
+            </a:r>
+            <a:r>
+              <a:rPr b="1"/>
+              <a:t>probability distributions</a:t>
+            </a:r>
+            <a:r>
+              <a:rPr/>
+              <a:t> over inputs</a:t>
+            </a:r>
+          </a:p>
+          <a:p>
+            <a:pPr lvl="0"/>
+            <a:r>
+              <a:rPr/>
+              <a:t>When you can’t specify distributions → </a:t>
+            </a:r>
+            <a:r>
+              <a:rPr b="1"/>
+              <a:t>deep uncertainty</a:t>
+            </a:r>
+            <a:r>
+              <a:rPr/>
+              <a:t> (Week 8)</a:t>
+            </a:r>
+          </a:p>
+        </p:txBody>
+      </p:sp>
+    </p:spTree>
+  </p:cSld>
+</p:sld>
+</file>
+
+<file path=ppt/slides/slide19.xml><?xml version="1.0" encoding="utf-8"?>
+<p:sld xmlns:a="http://schemas.openxmlformats.org/drawingml/2006/main" xmlns:r="http://schemas.openxmlformats.org/officeDocument/2006/relationships" xmlns:p="http://schemas.openxmlformats.org/presentationml/2006/main">
+  <p:cSld>
+    <p:spTree>
+      <p:nvGrpSpPr>
+        <p:cNvPr id="1" name=""/>
+        <p:cNvGrpSpPr/>
+        <p:nvPr/>
+      </p:nvGrpSpPr>
+      <p:grpSpPr>
+        <a:xfrm>
+          <a:off x="0" y="0"/>
+          <a:ext cx="0" cy="0"/>
+          <a:chOff x="0" y="0"/>
+          <a:chExt cx="0" cy="0"/>
+        </a:xfrm>
+      </p:grpSpPr>
+      <p:sp>
+        <p:nvSpPr>
+          <p:cNvPr id="2" name="Title 1"/>
+          <p:cNvSpPr>
+            <a:spLocks noGrp="1"/>
+          </p:cNvSpPr>
+          <p:nvPr>
+            <p:ph type="title"/>
+          </p:nvPr>
+        </p:nvSpPr>
+        <p:spPr/>
+        <p:txBody>
+          <a:bodyPr/>
+          <a:lstStyle/>
+          <a:p>
+            <a:pPr lvl="0" indent="0" marL="0">
+              <a:buNone/>
+            </a:pPr>
+            <a:r>
+              <a:rPr/>
+              <a:t>References</a:t>
+            </a:r>
+          </a:p>
+        </p:txBody>
+      </p:sp>
+      <p:sp>
+        <p:nvSpPr>
+          <p:cNvPr id="3" name="Content Placeholder 2"/>
+          <p:cNvSpPr>
+            <a:spLocks noGrp="1"/>
+          </p:cNvSpPr>
+          <p:nvPr>
+            <p:ph idx="1"/>
+          </p:nvPr>
+        </p:nvSpPr>
+        <p:spPr/>
+        <p:txBody>
+          <a:bodyPr/>
+          <a:lstStyle/>
+          <a:p>
+            <a:pPr lvl="0" indent="0" marL="0">
+              <a:buNone/>
+            </a:pPr>
+            <a:r>
+              <a:rPr/>
+              <a:t>Pianosi, Francesca, Keith Beven, Jim Freer, Jim W. Hall, Jonathan Rougier, David B. Stephenson, and Thorsten Wagener. 2016. “Sensitivity Analysis of Environmental Models: A Systematic Review with Practical Workflow.” </a:t>
+            </a:r>
+            <a:r>
+              <a:rPr i="1"/>
+              <a:t>Environmental Modelling &amp; Software</a:t>
+            </a:r>
+            <a:r>
+              <a:rPr/>
+              <a:t> 79 (May): 214–32. </a:t>
+            </a:r>
+            <a:r>
+              <a:rPr>
+                <a:hlinkClick r:id="rId2"/>
+              </a:rPr>
+              <a:t>https://doi.org/10/f8n6zw</a:t>
+            </a:r>
+            <a:r>
+              <a:rPr/>
+              <a:t>.</a:t>
+            </a:r>
+          </a:p>
+          <a:p>
+            <a:pPr lvl="0" indent="0" marL="0">
+              <a:buNone/>
+            </a:pPr>
+            <a:r>
+              <a:rPr/>
+              <a:t>Reed, Patrick M., Antonia Hadjimichael, Keyvan Malek, Tina Karimi, Chris R. Vernon, Vivek Srikrishnan, Rohini S. Gupta, et al. 2022. </a:t>
+            </a:r>
+            <a:r>
+              <a:rPr i="1"/>
+              <a:t>Addressing Uncertainty in Multisector Dynamics Research</a:t>
+            </a:r>
+            <a:r>
+              <a:rPr/>
+              <a:t>. Zenodo. </a:t>
+            </a:r>
+            <a:r>
+              <a:rPr>
+                <a:hlinkClick r:id="rId3"/>
+              </a:rPr>
+              <a:t>https://doi.org/10.5281/zenodo.6110623</a:t>
+            </a:r>
+            <a:r>
+              <a:rPr/>
+              <a:t>.</a:t>
+            </a:r>
+          </a:p>
+          <a:p>
+            <a:pPr lvl="0" indent="0" marL="0">
+              <a:buNone/>
+            </a:pPr>
+            <a:r>
+              <a:rPr/>
+              <a:t>Saltelli, Andrea, Marco Ratto, Terry Andres, Francesca Campolongo, Jessica Cariboni, Debora Gatelli, Michaela Saisana, and Stefano Tarantola. 2008. </a:t>
+            </a:r>
+            <a:r>
+              <a:rPr i="1"/>
+              <a:t>Global Sensitivity Analysis: The Primer</a:t>
+            </a:r>
+            <a:r>
+              <a:rPr/>
+              <a:t>. John Wiley &amp; Sons, Ltd. </a:t>
+            </a:r>
+            <a:r>
+              <a:rPr>
+                <a:hlinkClick r:id="rId4"/>
+              </a:rPr>
+              <a:t>http://onlinelibrary.wiley.com/doi/abs/10.1002/9780470725184.ch1</a:t>
+            </a:r>
+            <a:r>
+              <a:rPr/>
+              <a:t>.</a:t>
+            </a:r>
+          </a:p>
+        </p:txBody>
+      </p:sp>
+    </p:spTree>
+  </p:cSld>
+</p:sld>
+</file>
+
+<file path=ppt/slides/slide2.xml><?xml version="1.0" encoding="utf-8"?>
+<p:sld xmlns:a="http://schemas.openxmlformats.org/drawingml/2006/main" xmlns:r="http://schemas.openxmlformats.org/officeDocument/2006/relationships" xmlns:p="http://schemas.openxmlformats.org/presentationml/2006/main">
+  <p:cSld>
+    <p:spTree>
+      <p:nvGrpSpPr>
+        <p:cNvPr id="1" name=""/>
+        <p:cNvGrpSpPr/>
+        <p:nvPr/>
+      </p:nvGrpSpPr>
+      <p:grpSpPr>
+        <a:xfrm>
+          <a:off x="0" y="0"/>
+          <a:ext cx="0" cy="0"/>
+          <a:chOff x="0" y="0"/>
+          <a:chExt cx="0" cy="0"/>
+        </a:xfrm>
+      </p:grpSpPr>
+      <p:sp>
+        <p:nvSpPr>
+          <p:cNvPr id="2" name="Title 1"/>
+          <p:cNvSpPr>
+            <a:spLocks noGrp="1"/>
+          </p:cNvSpPr>
+          <p:nvPr>
+            <p:ph type="title"/>
+          </p:nvPr>
+        </p:nvSpPr>
+        <p:spPr/>
+        <p:txBody>
+          <a:bodyPr/>
+          <a:lstStyle/>
+          <a:p>
+            <a:pPr lvl="0" indent="0" marL="0">
+              <a:buNone/>
+            </a:pPr>
+            <a:r>
+              <a:rPr/>
+              <a:t>Reading</a:t>
+            </a:r>
+          </a:p>
+        </p:txBody>
+      </p:sp>
+      <p:sp>
+        <p:nvSpPr>
+          <p:cNvPr id="3" name="Content Placeholder 2"/>
+          <p:cNvSpPr>
+            <a:spLocks noGrp="1"/>
+          </p:cNvSpPr>
+          <p:nvPr>
+            <p:ph idx="1"/>
+          </p:nvPr>
+        </p:nvSpPr>
+        <p:spPr/>
+        <p:txBody>
+          <a:bodyPr/>
+          <a:lstStyle/>
+          <a:p>
+            <a:pPr lvl="0"/>
+            <a:r>
+              <a:rPr>
+                <a:hlinkClick r:id="rId2"/>
+              </a:rPr>
+              <a:t>Sensitivity Analysis: The Basics</a:t>
+            </a:r>
+            <a:r>
+              <a:rPr/>
+              <a:t> from Reed et al. (2022)</a:t>
+            </a:r>
+          </a:p>
+          <a:p>
+            <a:pPr lvl="0"/>
+            <a:r>
+              <a:rPr/>
+              <a:t>Pianosi et al. (2016)</a:t>
+            </a:r>
+          </a:p>
+          <a:p>
+            <a:pPr lvl="0"/>
+            <a:r>
+              <a:rPr/>
+              <a:t>Saltelli et al. (2008)</a:t>
+            </a:r>
+          </a:p>
+        </p:txBody>
+      </p:sp>
+    </p:spTree>
+  </p:cSld>
+</p:sld>
+</file>
+
+<file path=ppt/slides/slide3.xml><?xml version="1.0" encoding="utf-8"?>
+<p:sld xmlns:a="http://schemas.openxmlformats.org/drawingml/2006/main" xmlns:r="http://schemas.openxmlformats.org/officeDocument/2006/relationships" xmlns:p="http://schemas.openxmlformats.org/presentationml/2006/main">
+  <p:cSld>
+    <p:spTree>
+      <p:nvGrpSpPr>
+        <p:cNvPr id="1" name=""/>
+        <p:cNvGrpSpPr/>
+        <p:nvPr/>
+      </p:nvGrpSpPr>
+      <p:grpSpPr>
+        <a:xfrm>
+          <a:off x="0" y="0"/>
+          <a:ext cx="0" cy="0"/>
+          <a:chOff x="0" y="0"/>
+          <a:chExt cx="0" cy="0"/>
+        </a:xfrm>
+      </p:grpSpPr>
+      <p:sp>
+        <p:nvSpPr>
+          <p:cNvPr id="2" name="Title 1"/>
+          <p:cNvSpPr>
+            <a:spLocks noGrp="1"/>
+          </p:cNvSpPr>
+          <p:nvPr>
+            <p:ph type="title"/>
+          </p:nvPr>
+        </p:nvSpPr>
+        <p:spPr/>
+        <p:txBody>
+          <a:bodyPr/>
+          <a:lstStyle/>
+          <a:p>
+            <a:pPr lvl="0" indent="0" marL="0">
+              <a:buNone/>
+            </a:pPr>
+            <a:r>
+              <a:rPr/>
+              <a:t>Two Questions About Uncertainty</a:t>
+            </a:r>
+          </a:p>
+        </p:txBody>
+      </p:sp>
+      <p:sp>
+        <p:nvSpPr>
+          <p:cNvPr id="3" name="Content Placeholder 2"/>
+          <p:cNvSpPr>
+            <a:spLocks noGrp="1"/>
+          </p:cNvSpPr>
+          <p:nvPr>
+            <p:ph idx="1"/>
+          </p:nvPr>
+        </p:nvSpPr>
+        <p:spPr/>
+        <p:txBody>
+          <a:bodyPr/>
+          <a:lstStyle/>
+          <a:p>
+            <a:pPr lvl="0"/>
+            <a:r>
+              <a:rPr b="1"/>
+              <a:t>VOI</a:t>
+            </a:r>
+            <a:r>
+              <a:rPr/>
+              <a:t>: Which uncertainty, if resolved, would most change my </a:t>
+            </a:r>
+            <a:r>
+              <a:rPr b="1"/>
+              <a:t>decision</a:t>
+            </a:r>
+            <a:r>
+              <a:rPr/>
+              <a:t>?</a:t>
+            </a:r>
+          </a:p>
+          <a:p>
+            <a:pPr lvl="0"/>
+            <a:r>
+              <a:rPr b="1"/>
+              <a:t>GSA</a:t>
+            </a:r>
+            <a:r>
+              <a:rPr/>
+              <a:t>: Which uncertainty contributes most to the variability in my </a:t>
+            </a:r>
+            <a:r>
+              <a:rPr b="1"/>
+              <a:t>output</a:t>
+            </a:r>
+            <a:r>
+              <a:rPr/>
+              <a:t>?</a:t>
+            </a:r>
+          </a:p>
+          <a:p>
+            <a:pPr lvl="0" indent="0" marL="0">
+              <a:buNone/>
+            </a:pPr>
+            <a:r>
+              <a:rPr/>
+              <a:t>These are </a:t>
+            </a:r>
+            <a:r>
+              <a:rPr b="1"/>
+              <a:t>not the same question</a:t>
+            </a:r>
+            <a:r>
+              <a:rPr/>
+              <a:t>, and the answers can disagree.</a:t>
+            </a:r>
+          </a:p>
+        </p:txBody>
+      </p:sp>
+    </p:spTree>
+  </p:cSld>
+</p:sld>
+</file>
+
+<file path=ppt/slides/slide4.xml><?xml version="1.0" encoding="utf-8"?>
+<p:sld xmlns:a="http://schemas.openxmlformats.org/drawingml/2006/main" xmlns:r="http://schemas.openxmlformats.org/officeDocument/2006/relationships" xmlns:p="http://schemas.openxmlformats.org/presentationml/2006/main">
+  <p:cSld>
+    <p:spTree>
+      <p:nvGrpSpPr>
+        <p:cNvPr id="1" name=""/>
+        <p:cNvGrpSpPr/>
+        <p:nvPr/>
+      </p:nvGrpSpPr>
+      <p:grpSpPr>
+        <a:xfrm>
+          <a:off x="0" y="0"/>
+          <a:ext cx="0" cy="0"/>
+          <a:chOff x="0" y="0"/>
+          <a:chExt cx="0" cy="0"/>
+        </a:xfrm>
+      </p:grpSpPr>
+      <p:sp>
+        <p:nvSpPr>
+          <p:cNvPr id="2" name="Title 1"/>
+          <p:cNvSpPr>
+            <a:spLocks noGrp="1"/>
+          </p:cNvSpPr>
+          <p:nvPr>
+            <p:ph type="title"/>
+          </p:nvPr>
+        </p:nvSpPr>
+        <p:spPr/>
+        <p:txBody>
+          <a:bodyPr/>
+          <a:lstStyle/>
+          <a:p>
+            <a:pPr lvl="0" indent="0" marL="0">
+              <a:buNone/>
+            </a:pPr>
+            <a:r>
+              <a:rPr/>
+              <a:t>What Is Sensitivity Analysis?</a:t>
+            </a:r>
+          </a:p>
+        </p:txBody>
+      </p:sp>
+      <mc:AlternateContent xmlns:mc="http://schemas.openxmlformats.org/markup-compatibility/2006">
+        <mc:Choice xmlns:a14="http://schemas.microsoft.com/office/drawing/2010/main" Requires="a14">
+          <p:sp>
+            <p:nvSpPr>
+              <p:cNvPr id="3" name="Content Placeholder 2"/>
+              <p:cNvSpPr>
+                <a:spLocks noGrp="1"/>
+              </p:cNvSpPr>
+              <p:nvPr>
+                <p:ph idx="1"/>
+              </p:nvPr>
+            </p:nvSpPr>
+            <p:spPr/>
+            <p:txBody>
+              <a:bodyPr/>
+              <a:lstStyle/>
+              <a:p>
+                <a:pPr lvl="0" indent="0" marL="0">
+                  <a:buNone/>
+                </a:pPr>
+                <a:r>
+                  <a:rPr/>
+                  <a:t>SA investigates how variation in a model’s output is attributed to variation in its inputs (Pianosi et al. 2016).</a:t>
+                </a:r>
+              </a:p>
+              <a:p>
+                <a:pPr lvl="0" indent="0" marL="0">
+                  <a:buNone/>
+                </a:pPr>
+                <a14:m>
+                  <m:oMathPara xmlns:m="http://schemas.openxmlformats.org/officeDocument/2006/math">
+                    <m:oMathParaPr>
+                      <m:jc m:val="center"/>
+                    </m:oMathParaPr>
+                    <m:oMath>
+                      <m:r>
+                        <m:t>Y</m:t>
+                      </m:r>
+                      <m:r>
+                        <m:rPr>
+                          <m:sty m:val="p"/>
+                        </m:rPr>
+                        <m:t>=</m:t>
+                      </m:r>
+                      <m:r>
+                        <m:t>g</m:t>
+                      </m:r>
+                      <m:d>
+                        <m:dPr>
+                          <m:begChr m:val="("/>
+                          <m:sepChr m:val=""/>
+                          <m:endChr m:val=")"/>
+                          <m:grow/>
+                        </m:dPr>
+                        <m:e>
+                          <m:sSub>
+                            <m:e>
+                              <m:r>
+                                <m:t>X</m:t>
+                              </m:r>
+                            </m:e>
+                            <m:sub>
+                              <m:r>
+                                <m:t>1</m:t>
+                              </m:r>
+                            </m:sub>
+                          </m:sSub>
+                          <m:r>
+                            <m:rPr>
+                              <m:sty m:val="p"/>
+                            </m:rPr>
+                            <m:t>,</m:t>
+                          </m:r>
+                          <m:sSub>
+                            <m:e>
+                              <m:r>
+                                <m:t>X</m:t>
+                              </m:r>
+                            </m:e>
+                            <m:sub>
+                              <m:r>
+                                <m:t>2</m:t>
+                              </m:r>
+                            </m:sub>
+                          </m:sSub>
+                          <m:r>
+                            <m:rPr>
+                              <m:sty m:val="p"/>
+                            </m:rPr>
+                            <m:t>,</m:t>
+                          </m:r>
+                          <m:r>
+                            <m:rPr>
+                              <m:sty m:val="p"/>
+                            </m:rPr>
+                            <m:t>…</m:t>
+                          </m:r>
+                          <m:r>
+                            <m:rPr>
+                              <m:sty m:val="p"/>
+                            </m:rPr>
+                            <m:t>,</m:t>
+                          </m:r>
+                          <m:sSub>
+                            <m:e>
+                              <m:r>
+                                <m:t>X</m:t>
+                              </m:r>
+                            </m:e>
+                            <m:sub>
+                              <m:r>
+                                <m:t>M</m:t>
+                              </m:r>
+                            </m:sub>
+                          </m:sSub>
+                        </m:e>
+                      </m:d>
+                    </m:oMath>
+                  </m:oMathPara>
+                </a14:m>
+              </a:p>
+              <a:p>
+                <a:pPr lvl="0"/>
+                <a:r>
+                  <a:rPr/>
+                  <a:t>Which inputs cause the largest variation in </a:t>
+                </a:r>
+                <a14:m>
+                  <m:oMath xmlns:m="http://schemas.openxmlformats.org/officeDocument/2006/math">
+                    <m:r>
+                      <m:t>Y</m:t>
+                    </m:r>
+                  </m:oMath>
+                </a14:m>
+                <a:r>
+                  <a:rPr/>
+                  <a:t>?</a:t>
+                </a:r>
+              </a:p>
+              <a:p>
+                <a:pPr lvl="0"/>
+                <a:r>
+                  <a:rPr/>
+                  <a:t>Are there inputs whose variability has negligible effect?</a:t>
+                </a:r>
+              </a:p>
+              <a:p>
+                <a:pPr lvl="0"/>
+                <a:r>
+                  <a:rPr/>
+                  <a:t>Are there </a:t>
+                </a:r>
+                <a:r>
+                  <a:rPr b="1"/>
+                  <a:t>interactions</a:t>
+                </a:r>
+                <a:r>
+                  <a:rPr/>
+                  <a:t> between inputs?</a:t>
+                </a:r>
+              </a:p>
+            </p:txBody>
+          </p:sp>
+        </mc:Choice>
+      </mc:AlternateContent>
+    </p:spTree>
+  </p:cSld>
+</p:sld>
+</file>
+
+<file path=ppt/slides/slide5.xml><?xml version="1.0" encoding="utf-8"?>
+<p:sld xmlns:a="http://schemas.openxmlformats.org/drawingml/2006/main" xmlns:r="http://schemas.openxmlformats.org/officeDocument/2006/relationships" xmlns:p="http://schemas.openxmlformats.org/presentationml/2006/main">
+  <p:cSld>
+    <p:spTree>
+      <p:nvGrpSpPr>
+        <p:cNvPr id="1" name=""/>
+        <p:cNvGrpSpPr/>
+        <p:nvPr/>
+      </p:nvGrpSpPr>
+      <p:grpSpPr>
+        <a:xfrm>
+          <a:off x="0" y="0"/>
+          <a:ext cx="0" cy="0"/>
+          <a:chOff x="0" y="0"/>
+          <a:chExt cx="0" cy="0"/>
+        </a:xfrm>
+      </p:grpSpPr>
+      <p:sp>
+        <p:nvSpPr>
+          <p:cNvPr id="2" name="Title 1"/>
+          <p:cNvSpPr>
+            <a:spLocks noGrp="1"/>
+          </p:cNvSpPr>
+          <p:nvPr>
+            <p:ph type="title"/>
+          </p:nvPr>
+        </p:nvSpPr>
+        <p:spPr/>
+        <p:txBody>
+          <a:bodyPr/>
+          <a:lstStyle/>
+          <a:p>
+            <a:pPr lvl="0" indent="0" marL="0">
+              <a:buNone/>
+            </a:pPr>
+            <a:r>
+              <a:rPr/>
+              <a:t>Three Purposes of SA</a:t>
+            </a:r>
+          </a:p>
+        </p:txBody>
+      </p:sp>
+      <p:sp>
+        <p:nvSpPr>
+          <p:cNvPr id="3" name="Content Placeholder 2"/>
+          <p:cNvSpPr>
+            <a:spLocks noGrp="1"/>
+          </p:cNvSpPr>
+          <p:nvPr>
+            <p:ph idx="1"/>
+          </p:nvPr>
+        </p:nvSpPr>
+        <p:spPr/>
+        <p:txBody>
+          <a:bodyPr/>
+          <a:lstStyle/>
+          <a:p>
+            <a:pPr lvl="0" indent="-342900" marL="342900">
+              <a:buAutoNum type="arabicPeriod"/>
+            </a:pPr>
+            <a:r>
+              <a:rPr b="1"/>
+              <a:t>Screening</a:t>
+            </a:r>
+            <a:r>
+              <a:rPr/>
+              <a:t> (factor fixing): which inputs can I safely ignore?</a:t>
+            </a:r>
+          </a:p>
+          <a:p>
+            <a:pPr lvl="0" indent="-342900" marL="342900">
+              <a:buAutoNum type="arabicPeriod"/>
+            </a:pPr>
+            <a:r>
+              <a:rPr b="1"/>
+              <a:t>Ranking</a:t>
+            </a:r>
+            <a:r>
+              <a:rPr/>
+              <a:t> (factor prioritization): which input matters most?</a:t>
+            </a:r>
+          </a:p>
+          <a:p>
+            <a:pPr lvl="0" indent="-342900" marL="342900">
+              <a:buAutoNum type="arabicPeriod"/>
+            </a:pPr>
+            <a:r>
+              <a:rPr b="1"/>
+              <a:t>Mapping</a:t>
+            </a:r>
+            <a:r>
+              <a:rPr/>
+              <a:t>: what input combinations produce extreme outputs?</a:t>
+            </a:r>
+          </a:p>
+          <a:p>
+            <a:pPr lvl="0" indent="0" marL="0">
+              <a:buNone/>
+            </a:pPr>
+            <a:r>
+              <a:rPr/>
+              <a:t>Typical workflow: screen → rank → map.</a:t>
+            </a:r>
+          </a:p>
+        </p:txBody>
+      </p:sp>
+    </p:spTree>
+  </p:cSld>
+</p:sld>
+</file>
+
+<file path=ppt/slides/slide6.xml><?xml version="1.0" encoding="utf-8"?>
+<p:sld xmlns:a="http://schemas.openxmlformats.org/drawingml/2006/main" xmlns:r="http://schemas.openxmlformats.org/officeDocument/2006/relationships" xmlns:p="http://schemas.openxmlformats.org/presentationml/2006/main">
+  <p:cSld>
+    <p:spTree>
+      <p:nvGrpSpPr>
+        <p:cNvPr id="1" name=""/>
+        <p:cNvGrpSpPr/>
+        <p:nvPr/>
+      </p:nvGrpSpPr>
+      <p:grpSpPr>
+        <a:xfrm>
+          <a:off x="0" y="0"/>
+          <a:ext cx="0" cy="0"/>
+          <a:chOff x="0" y="0"/>
+          <a:chExt cx="0" cy="0"/>
+        </a:xfrm>
+      </p:grpSpPr>
+      <p:sp>
+        <p:nvSpPr>
+          <p:cNvPr id="2" name="Title 1"/>
+          <p:cNvSpPr>
+            <a:spLocks noGrp="1"/>
+          </p:cNvSpPr>
+          <p:nvPr>
+            <p:ph type="title"/>
+          </p:nvPr>
+        </p:nvSpPr>
+        <p:spPr/>
+        <p:txBody>
+          <a:bodyPr/>
+          <a:lstStyle/>
+          <a:p>
+            <a:pPr lvl="0" indent="0" marL="0">
+              <a:buNone/>
+            </a:pPr>
+            <a:r>
+              <a:rPr/>
+              <a:t>Local Sensitivity: One-at-a-Time</a:t>
+            </a:r>
+          </a:p>
+        </p:txBody>
+      </p:sp>
+      <mc:AlternateContent xmlns:mc="http://schemas.openxmlformats.org/markup-compatibility/2006">
+        <mc:Choice xmlns:a14="http://schemas.microsoft.com/office/drawing/2010/main" Requires="a14">
+          <p:sp>
+            <p:nvSpPr>
+              <p:cNvPr id="3" name="Content Placeholder 2"/>
+              <p:cNvSpPr>
+                <a:spLocks noGrp="1"/>
+              </p:cNvSpPr>
+              <p:nvPr>
+                <p:ph idx="1"/>
+              </p:nvPr>
+            </p:nvSpPr>
+            <p:spPr/>
+            <p:txBody>
+              <a:bodyPr/>
+              <a:lstStyle/>
+              <a:p>
+                <a:pPr lvl="0" indent="0" marL="0">
+                  <a:buNone/>
+                </a:pPr>
+                <a:r>
+                  <a:rPr/>
+                  <a:t>Vary one input at a baseline </a:t>
+                </a:r>
+                <a14:m>
+                  <m:oMath xmlns:m="http://schemas.openxmlformats.org/officeDocument/2006/math">
+                    <m:acc>
+                      <m:accPr>
+                        <m:chr m:val="‾"/>
+                      </m:accPr>
+                      <m:e>
+                        <m:r>
+                          <m:rPr>
+                            <m:sty m:val="b"/>
+                          </m:rPr>
+                          <m:t>x</m:t>
+                        </m:r>
+                      </m:e>
+                    </m:acc>
+                  </m:oMath>
+                </a14:m>
+                <a:r>
+                  <a:rPr/>
+                  <a:t>, hold all others fixed:</a:t>
+                </a:r>
+              </a:p>
+              <a:p>
+                <a:pPr lvl="0" indent="0" marL="0">
+                  <a:buNone/>
+                </a:pPr>
+                <a14:m>
+                  <m:oMathPara xmlns:m="http://schemas.openxmlformats.org/officeDocument/2006/math">
+                    <m:oMathParaPr>
+                      <m:jc m:val="center"/>
+                    </m:oMathParaPr>
+                    <m:oMath>
+                      <m:sSubSup>
+                        <m:e>
+                          <m:r>
+                            <m:t>S</m:t>
+                          </m:r>
+                        </m:e>
+                        <m:sub>
+                          <m:r>
+                            <m:t>i</m:t>
+                          </m:r>
+                        </m:sub>
+                        <m:sup>
+                          <m:r>
+                            <m:rPr>
+                              <m:nor/>
+                              <m:sty m:val="p"/>
+                            </m:rPr>
+                            <m:t>local</m:t>
+                          </m:r>
+                        </m:sup>
+                      </m:sSubSup>
+                      <m:r>
+                        <m:rPr>
+                          <m:sty m:val="p"/>
+                        </m:rPr>
+                        <m:t>≈</m:t>
+                      </m:r>
+                      <m:f>
+                        <m:fPr>
+                          <m:type m:val="bar"/>
+                        </m:fPr>
+                        <m:num>
+                          <m:r>
+                            <m:rPr>
+                              <m:sty m:val="p"/>
+                            </m:rPr>
+                            <m:t>∂</m:t>
+                          </m:r>
+                          <m:r>
+                            <m:t>g</m:t>
+                          </m:r>
+                        </m:num>
+                        <m:den>
+                          <m:r>
+                            <m:rPr>
+                              <m:sty m:val="p"/>
+                            </m:rPr>
+                            <m:t>∂</m:t>
+                          </m:r>
+                          <m:sSub>
+                            <m:e>
+                              <m:r>
+                                <m:t>x</m:t>
+                              </m:r>
+                            </m:e>
+                            <m:sub>
+                              <m:r>
+                                <m:t>i</m:t>
+                              </m:r>
+                            </m:sub>
+                          </m:sSub>
+                        </m:den>
+                      </m:f>
+                      <m:sSub>
+                        <m:e>
+                          <m:r>
+                            <m:rPr>
+                              <m:sty m:val="p"/>
+                            </m:rPr>
+                            <m:t>|</m:t>
+                          </m:r>
+                        </m:e>
+                        <m:sub>
+                          <m:r>
+                            <m:rPr>
+                              <m:sty m:val="b"/>
+                            </m:rPr>
+                            <m:t>x</m:t>
+                          </m:r>
+                          <m:r>
+                            <m:rPr>
+                              <m:sty m:val="p"/>
+                            </m:rPr>
+                            <m:t>=</m:t>
+                          </m:r>
+                          <m:acc>
+                            <m:accPr>
+                              <m:chr m:val="‾"/>
+                            </m:accPr>
+                            <m:e>
+                              <m:r>
+                                <m:rPr>
+                                  <m:sty m:val="b"/>
+                                </m:rPr>
+                                <m:t>x</m:t>
+                              </m:r>
+                            </m:e>
+                          </m:acc>
+                        </m:sub>
+                      </m:sSub>
+                    </m:oMath>
+                  </m:oMathPara>
+                </a14:m>
+              </a:p>
+              <a:p>
+                <a:pPr lvl="0" indent="0" marL="0">
+                  <a:buNone/>
+                </a:pPr>
+                <a:r>
+                  <a:rPr/>
+                  <a:t>Approximate with a finite difference (</a:t>
+                </a:r>
+                <a14:m>
+                  <m:oMath xmlns:m="http://schemas.openxmlformats.org/officeDocument/2006/math">
+                    <m:r>
+                      <m:t>M</m:t>
+                    </m:r>
+                    <m:r>
+                      <m:rPr>
+                        <m:sty m:val="p"/>
+                      </m:rPr>
+                      <m:t>+</m:t>
+                    </m:r>
+                    <m:r>
+                      <m:t>1</m:t>
+                    </m:r>
+                  </m:oMath>
+                </a14:m>
+                <a:r>
+                  <a:rPr/>
+                  <a:t> evaluations):</a:t>
+                </a:r>
+              </a:p>
+              <a:p>
+                <a:pPr lvl="0" indent="0" marL="0">
+                  <a:buNone/>
+                </a:pPr>
+                <a14:m>
+                  <m:oMathPara xmlns:m="http://schemas.openxmlformats.org/officeDocument/2006/math">
+                    <m:oMathParaPr>
+                      <m:jc m:val="center"/>
+                    </m:oMathParaPr>
+                    <m:oMath>
+                      <m:sSub>
+                        <m:e>
+                          <m:acc>
+                            <m:accPr>
+                              <m:chr m:val="̂"/>
+                            </m:accPr>
+                            <m:e>
+                              <m:r>
+                                <m:t>S</m:t>
+                              </m:r>
+                            </m:e>
+                          </m:acc>
+                        </m:e>
+                        <m:sub>
+                          <m:r>
+                            <m:t>i</m:t>
+                          </m:r>
+                        </m:sub>
+                      </m:sSub>
+                      <m:r>
+                        <m:rPr>
+                          <m:sty m:val="p"/>
+                        </m:rPr>
+                        <m:t>=</m:t>
+                      </m:r>
+                      <m:f>
+                        <m:fPr>
+                          <m:type m:val="bar"/>
+                        </m:fPr>
+                        <m:num>
+                          <m:r>
+                            <m:t>g</m:t>
+                          </m:r>
+                          <m:d>
+                            <m:dPr>
+                              <m:begChr m:val="("/>
+                              <m:sepChr m:val=""/>
+                              <m:endChr m:val=")"/>
+                              <m:grow/>
+                            </m:dPr>
+                            <m:e>
+                              <m:sSub>
+                                <m:e>
+                                  <m:acc>
+                                    <m:accPr>
+                                      <m:chr m:val="‾"/>
+                                    </m:accPr>
+                                    <m:e>
+                                      <m:r>
+                                        <m:t>x</m:t>
+                                      </m:r>
+                                    </m:e>
+                                  </m:acc>
+                                </m:e>
+                                <m:sub>
+                                  <m:r>
+                                    <m:t>1</m:t>
+                                  </m:r>
+                                </m:sub>
+                              </m:sSub>
+                              <m:r>
+                                <m:rPr>
+                                  <m:sty m:val="p"/>
+                                </m:rPr>
+                                <m:t>,</m:t>
+                              </m:r>
+                              <m:r>
+                                <m:rPr>
+                                  <m:sty m:val="p"/>
+                                </m:rPr>
+                                <m:t>…</m:t>
+                              </m:r>
+                              <m:r>
+                                <m:rPr>
+                                  <m:sty m:val="p"/>
+                                </m:rPr>
+                                <m:t>,</m:t>
+                              </m:r>
+                              <m:sSub>
+                                <m:e>
+                                  <m:acc>
+                                    <m:accPr>
+                                      <m:chr m:val="‾"/>
+                                    </m:accPr>
+                                    <m:e>
+                                      <m:r>
+                                        <m:t>x</m:t>
+                                      </m:r>
+                                    </m:e>
+                                  </m:acc>
+                                </m:e>
+                                <m:sub>
+                                  <m:r>
+                                    <m:t>i</m:t>
+                                  </m:r>
+                                </m:sub>
+                              </m:sSub>
+                              <m:r>
+                                <m:rPr>
+                                  <m:sty m:val="p"/>
+                                </m:rPr>
+                                <m:t>+</m:t>
+                              </m:r>
+                              <m:sSub>
+                                <m:e>
+                                  <m:r>
+                                    <m:t>Δ</m:t>
+                                  </m:r>
+                                </m:e>
+                                <m:sub>
+                                  <m:r>
+                                    <m:t>i</m:t>
+                                  </m:r>
+                                </m:sub>
+                              </m:sSub>
+                              <m:r>
+                                <m:rPr>
+                                  <m:sty m:val="p"/>
+                                </m:rPr>
+                                <m:t>,</m:t>
+                              </m:r>
+                              <m:r>
+                                <m:rPr>
+                                  <m:sty m:val="p"/>
+                                </m:rPr>
+                                <m:t>…</m:t>
+                              </m:r>
+                            </m:e>
+                          </m:d>
+                          <m:r>
+                            <m:rPr>
+                              <m:sty m:val="p"/>
+                            </m:rPr>
+                            <m:t>−</m:t>
+                          </m:r>
+                          <m:r>
+                            <m:t>g</m:t>
+                          </m:r>
+                          <m:d>
+                            <m:dPr>
+                              <m:begChr m:val="("/>
+                              <m:sepChr m:val=""/>
+                              <m:endChr m:val=")"/>
+                              <m:grow/>
+                            </m:dPr>
+                            <m:e>
+                              <m:acc>
+                                <m:accPr>
+                                  <m:chr m:val="‾"/>
+                                </m:accPr>
+                                <m:e>
+                                  <m:r>
+                                    <m:rPr>
+                                      <m:sty m:val="b"/>
+                                    </m:rPr>
+                                    <m:t>x</m:t>
+                                  </m:r>
+                                </m:e>
+                              </m:acc>
+                            </m:e>
+                          </m:d>
+                        </m:num>
+                        <m:den>
+                          <m:sSub>
+                            <m:e>
+                              <m:r>
+                                <m:t>Δ</m:t>
+                              </m:r>
+                            </m:e>
+                            <m:sub>
+                              <m:r>
+                                <m:t>i</m:t>
+                              </m:r>
+                            </m:sub>
+                          </m:sSub>
+                        </m:den>
+                      </m:f>
+                    </m:oMath>
+                  </m:oMathPara>
+                </a14:m>
+              </a:p>
+            </p:txBody>
+          </p:sp>
+        </mc:Choice>
+      </mc:AlternateContent>
+    </p:spTree>
+  </p:cSld>
+</p:sld>
+</file>
+
+<file path=ppt/slides/slide7.xml><?xml version="1.0" encoding="utf-8"?>
+<p:sld xmlns:a="http://schemas.openxmlformats.org/drawingml/2006/main" xmlns:r="http://schemas.openxmlformats.org/officeDocument/2006/relationships" xmlns:p="http://schemas.openxmlformats.org/presentationml/2006/main">
+  <p:cSld>
+    <p:spTree>
+      <p:nvGrpSpPr>
+        <p:cNvPr id="1" name=""/>
+        <p:cNvGrpSpPr/>
+        <p:nvPr/>
+      </p:nvGrpSpPr>
+      <p:grpSpPr>
+        <a:xfrm>
+          <a:off x="0" y="0"/>
+          <a:ext cx="0" cy="0"/>
+          <a:chOff x="0" y="0"/>
+          <a:chExt cx="0" cy="0"/>
+        </a:xfrm>
+      </p:grpSpPr>
+      <p:sp>
+        <p:nvSpPr>
+          <p:cNvPr id="2" name="Title 1"/>
+          <p:cNvSpPr>
+            <a:spLocks noGrp="1"/>
+          </p:cNvSpPr>
+          <p:nvPr>
+            <p:ph type="title"/>
+          </p:nvPr>
+        </p:nvSpPr>
+        <p:spPr/>
+        <p:txBody>
+          <a:bodyPr/>
+          <a:lstStyle/>
+          <a:p>
+            <a:pPr lvl="0" indent="0" marL="0">
+              <a:buNone/>
+            </a:pPr>
+            <a:r>
+              <a:rPr/>
+              <a:t>OAT Limitations</a:t>
+            </a:r>
+          </a:p>
+        </p:txBody>
+      </p:sp>
+      <p:sp>
+        <p:nvSpPr>
+          <p:cNvPr id="3" name="Content Placeholder 2"/>
+          <p:cNvSpPr>
+            <a:spLocks noGrp="1"/>
+          </p:cNvSpPr>
+          <p:nvPr>
+            <p:ph idx="1"/>
+          </p:nvPr>
+        </p:nvSpPr>
+        <p:spPr/>
+        <p:txBody>
+          <a:bodyPr/>
+          <a:lstStyle/>
+          <a:p>
+            <a:pPr lvl="0"/>
+            <a:r>
+              <a:rPr/>
+              <a:t>Measures sensitivity at </a:t>
+            </a:r>
+            <a:r>
+              <a:rPr b="1"/>
+              <a:t>one point</a:t>
+            </a:r>
+            <a:r>
+              <a:rPr/>
+              <a:t> — may differ elsewhere</a:t>
+            </a:r>
+          </a:p>
+          <a:p>
+            <a:pPr lvl="0"/>
+            <a:r>
+              <a:rPr/>
+              <a:t>Misses </a:t>
+            </a:r>
+            <a:r>
+              <a:rPr b="1"/>
+              <a:t>interactions</a:t>
+            </a:r>
+            <a:r>
+              <a:rPr/>
+              <a:t> between parameters</a:t>
+            </a:r>
+          </a:p>
+          <a:p>
+            <a:pPr lvl="0"/>
+            <a:r>
+              <a:rPr/>
+              <a:t>Baseline choice is arbitrary</a:t>
+            </a:r>
+          </a:p>
+          <a:p>
+            <a:pPr lvl="0"/>
+            <a:r>
+              <a:rPr/>
+              <a:t>Does not explore the full input range</a:t>
+            </a:r>
+          </a:p>
+        </p:txBody>
+      </p:sp>
+    </p:spTree>
+  </p:cSld>
+</p:sld>
+</file>
+
+<file path=ppt/slides/slide8.xml><?xml version="1.0" encoding="utf-8"?>
+<p:sld xmlns:a="http://schemas.openxmlformats.org/drawingml/2006/main" xmlns:r="http://schemas.openxmlformats.org/officeDocument/2006/relationships" xmlns:p="http://schemas.openxmlformats.org/presentationml/2006/main">
+  <p:cSld>
+    <p:spTree>
+      <p:nvGrpSpPr>
+        <p:cNvPr id="1" name=""/>
+        <p:cNvGrpSpPr/>
+        <p:nvPr/>
+      </p:nvGrpSpPr>
+      <p:grpSpPr>
+        <a:xfrm>
+          <a:off x="0" y="0"/>
+          <a:ext cx="0" cy="0"/>
+          <a:chOff x="0" y="0"/>
+          <a:chExt cx="0" cy="0"/>
+        </a:xfrm>
+      </p:grpSpPr>
+      <p:sp>
+        <p:nvSpPr>
+          <p:cNvPr id="2" name="Title 1"/>
+          <p:cNvSpPr>
+            <a:spLocks noGrp="1"/>
+          </p:cNvSpPr>
+          <p:nvPr>
+            <p:ph type="title"/>
+          </p:nvPr>
+        </p:nvSpPr>
+        <p:spPr/>
+        <p:txBody>
+          <a:bodyPr/>
+          <a:lstStyle/>
+          <a:p>
+            <a:pPr lvl="0" indent="0" marL="0">
+              <a:buNone/>
+            </a:pPr>
+            <a:r>
+              <a:rPr/>
+              <a:t>Going Global</a:t>
+            </a:r>
+          </a:p>
+        </p:txBody>
+      </p:sp>
+      <p:sp>
+        <p:nvSpPr>
+          <p:cNvPr id="3" name="Content Placeholder 2"/>
+          <p:cNvSpPr>
+            <a:spLocks noGrp="1"/>
+          </p:cNvSpPr>
+          <p:nvPr>
+            <p:ph idx="1"/>
+          </p:nvPr>
+        </p:nvSpPr>
+        <p:spPr/>
+        <p:txBody>
+          <a:bodyPr/>
+          <a:lstStyle/>
+          <a:p>
+            <a:pPr lvl="0" indent="0" marL="0">
+              <a:buNone/>
+            </a:pPr>
+            <a:r>
+              <a:rPr b="1"/>
+              <a:t>Global SA</a:t>
+            </a:r>
+            <a:r>
+              <a:rPr/>
+              <a:t> varies all inputs simultaneously across their full ranges.</a:t>
+            </a:r>
+          </a:p>
+          <a:p>
+            <a:pPr lvl="0"/>
+            <a:r>
+              <a:rPr/>
+              <a:t>Captures the full range of each input</a:t>
+            </a:r>
+          </a:p>
+          <a:p>
+            <a:pPr lvl="0"/>
+            <a:r>
+              <a:rPr/>
+              <a:t>Detects nonlinear effects</a:t>
+            </a:r>
+          </a:p>
+          <a:p>
+            <a:pPr lvl="0"/>
+            <a:r>
+              <a:rPr/>
+              <a:t>Captures interactions between inputs</a:t>
+            </a:r>
+          </a:p>
+          <a:p>
+            <a:pPr lvl="0" indent="0" marL="0">
+              <a:buNone/>
+            </a:pPr>
+            <a:r>
+              <a:rPr/>
+              <a:t>Two representative methods: </a:t>
+            </a:r>
+            <a:r>
+              <a:rPr b="1"/>
+              <a:t>Morris</a:t>
+            </a:r>
+            <a:r>
+              <a:rPr/>
+              <a:t> (OAT from many starting points) and </a:t>
+            </a:r>
+            <a:r>
+              <a:rPr b="1"/>
+              <a:t>Sobol indices</a:t>
+            </a:r>
+            <a:r>
+              <a:rPr/>
+              <a:t> (variance decomposition).</a:t>
+            </a:r>
+          </a:p>
+        </p:txBody>
+      </p:sp>
+    </p:spTree>
+  </p:cSld>
+</p:sld>
+</file>
+
+<file path=ppt/slides/slide9.xml><?xml version="1.0" encoding="utf-8"?>
 <p:sld xmlns:a="http://schemas.openxmlformats.org/drawingml/2006/main" xmlns:r="http://schemas.openxmlformats.org/officeDocument/2006/relationships" xmlns:p="http://schemas.openxmlformats.org/presentationml/2006/main">
   <p:cSld>
     <p:spTree>
@@ -5210,3037 +8189,6 @@
           </p:sp>
         </mc:Choice>
       </mc:AlternateContent>
-    </p:spTree>
-  </p:cSld>
-</p:sld>
-</file>
-
-<file path=ppt/slides/slide11.xml><?xml version="1.0" encoding="utf-8"?>
-<p:sld xmlns:a="http://schemas.openxmlformats.org/drawingml/2006/main" xmlns:r="http://schemas.openxmlformats.org/officeDocument/2006/relationships" xmlns:p="http://schemas.openxmlformats.org/presentationml/2006/main">
-  <p:cSld>
-    <p:spTree>
-      <p:nvGrpSpPr>
-        <p:cNvPr id="1" name=""/>
-        <p:cNvGrpSpPr/>
-        <p:nvPr/>
-      </p:nvGrpSpPr>
-      <p:grpSpPr>
-        <a:xfrm>
-          <a:off x="0" y="0"/>
-          <a:ext cx="0" cy="0"/>
-          <a:chOff x="0" y="0"/>
-          <a:chExt cx="0" cy="0"/>
-        </a:xfrm>
-      </p:grpSpPr>
-      <p:sp>
-        <p:nvSpPr>
-          <p:cNvPr id="2" name="Title 1"/>
-          <p:cNvSpPr>
-            <a:spLocks noGrp="1"/>
-          </p:cNvSpPr>
-          <p:nvPr>
-            <p:ph type="title"/>
-          </p:nvPr>
-        </p:nvSpPr>
-        <p:spPr/>
-        <p:txBody>
-          <a:bodyPr/>
-          <a:lstStyle/>
-          <a:p>
-            <a:pPr lvl="0" indent="0" marL="0">
-              <a:buNone/>
-            </a:pPr>
-            <a:r>
-              <a:rPr/>
-              <a:t>Reading a Morris Plot</a:t>
-            </a:r>
-          </a:p>
-        </p:txBody>
-      </p:sp>
-      <p:pic>
-        <p:nvPicPr>
-          <p:cNvPr descr="pianosi_fig_appendix_4.png" id="0" name="Picture 1"/>
-          <p:cNvPicPr>
-            <a:picLocks noGrp="1" noChangeAspect="1"/>
-          </p:cNvPicPr>
-          <p:nvPr/>
-        </p:nvPicPr>
-        <p:blipFill>
-          <a:blip r:embed="rId2"/>
-          <a:stretch>
-            <a:fillRect/>
-          </a:stretch>
-        </p:blipFill>
-        <p:spPr bwMode="auto">
-          <a:xfrm>
-            <a:off x="2895600" y="1193800"/>
-            <a:ext cx="3352800" cy="2882900"/>
-          </a:xfrm>
-          <a:prstGeom prst="rect">
-            <a:avLst/>
-          </a:prstGeom>
-          <a:noFill/>
-          <a:ln w="9525">
-            <a:noFill/>
-            <a:headEnd/>
-            <a:tailEnd/>
-          </a:ln>
-        </p:spPr>
-      </p:pic>
-      <p:sp>
-        <p:nvSpPr>
-          <p:cNvPr id="1" name="TextBox 3"/>
-          <p:cNvSpPr txBox="1"/>
-          <p:nvPr/>
-        </p:nvSpPr>
-        <p:spPr>
-          <a:xfrm>
-            <a:off x="457200" y="4076700"/>
-            <a:ext cx="8229600" cy="508000"/>
-          </a:xfrm>
-          <a:prstGeom prst="rect">
-            <a:avLst/>
-          </a:prstGeom>
-          <a:noFill/>
-        </p:spPr>
-        <p:txBody>
-          <a:bodyPr/>
-          <a:lstStyle/>
-          <a:p>
-            <a:pPr lvl="0" indent="0" marL="0" algn="ctr">
-              <a:buNone/>
-            </a:pPr>
-            <a:r>
-              <a:rPr/>
-              <a:t>Figure 1: Source: Pianosi et al. (2016), Appendix A.</a:t>
-            </a:r>
-          </a:p>
-        </p:txBody>
-      </p:sp>
-    </p:spTree>
-  </p:cSld>
-</p:sld>
-</file>
-
-<file path=ppt/slides/slide12.xml><?xml version="1.0" encoding="utf-8"?>
-<p:sld xmlns:a="http://schemas.openxmlformats.org/drawingml/2006/main" xmlns:r="http://schemas.openxmlformats.org/officeDocument/2006/relationships" xmlns:p="http://schemas.openxmlformats.org/presentationml/2006/main">
-  <p:cSld>
-    <p:spTree>
-      <p:nvGrpSpPr>
-        <p:cNvPr id="1" name=""/>
-        <p:cNvGrpSpPr/>
-        <p:nvPr/>
-      </p:nvGrpSpPr>
-      <p:grpSpPr>
-        <a:xfrm>
-          <a:off x="0" y="0"/>
-          <a:ext cx="0" cy="0"/>
-          <a:chOff x="0" y="0"/>
-          <a:chExt cx="0" cy="0"/>
-        </a:xfrm>
-      </p:grpSpPr>
-      <p:sp>
-        <p:nvSpPr>
-          <p:cNvPr id="3" name="Content Placeholder 2"/>
-          <p:cNvSpPr>
-            <a:spLocks noGrp="1"/>
-          </p:cNvSpPr>
-          <p:nvPr>
-            <p:ph idx="1"/>
-          </p:nvPr>
-        </p:nvSpPr>
-        <p:spPr/>
-        <p:txBody>
-          <a:bodyPr/>
-          <a:lstStyle/>
-          <a:p>
-            <a:pPr lvl="0"/>
-            <a:r>
-              <a:rPr/>
-              <a:t>Near origin: </a:t>
-            </a:r>
-            <a:r>
-              <a:rPr b="1"/>
-              <a:t>unimportant</a:t>
-            </a:r>
-            <a:r>
-              <a:rPr/>
-              <a:t> — screen out</a:t>
-            </a:r>
-          </a:p>
-          <a:p>
-            <a:pPr lvl="0"/>
-            <a:r>
-              <a:rPr/>
-              <a:t>Far right, low SD: strong </a:t>
-            </a:r>
-            <a:r>
-              <a:rPr b="1"/>
-              <a:t>main effect</a:t>
-            </a:r>
-          </a:p>
-          <a:p>
-            <a:pPr lvl="0"/>
-            <a:r>
-              <a:rPr/>
-              <a:t>Far right, high SD: important and </a:t>
-            </a:r>
-            <a:r>
-              <a:rPr b="1"/>
-              <a:t>interactive</a:t>
-            </a:r>
-          </a:p>
-        </p:txBody>
-      </p:sp>
-    </p:spTree>
-  </p:cSld>
-</p:sld>
-</file>
-
-<file path=ppt/slides/slide13.xml><?xml version="1.0" encoding="utf-8"?>
-<p:sld xmlns:a="http://schemas.openxmlformats.org/drawingml/2006/main" xmlns:r="http://schemas.openxmlformats.org/officeDocument/2006/relationships" xmlns:p="http://schemas.openxmlformats.org/presentationml/2006/main">
-  <p:cSld>
-    <p:spTree>
-      <p:nvGrpSpPr>
-        <p:cNvPr id="1" name=""/>
-        <p:cNvGrpSpPr/>
-        <p:nvPr/>
-      </p:nvGrpSpPr>
-      <p:grpSpPr>
-        <a:xfrm>
-          <a:off x="0" y="0"/>
-          <a:ext cx="0" cy="0"/>
-          <a:chOff x="0" y="0"/>
-          <a:chExt cx="0" cy="0"/>
-        </a:xfrm>
-      </p:grpSpPr>
-      <p:sp>
-        <p:nvSpPr>
-          <p:cNvPr id="2" name="Title 1"/>
-          <p:cNvSpPr>
-            <a:spLocks noGrp="1"/>
-          </p:cNvSpPr>
-          <p:nvPr>
-            <p:ph type="title"/>
-          </p:nvPr>
-        </p:nvSpPr>
-        <p:spPr/>
-        <p:txBody>
-          <a:bodyPr/>
-          <a:lstStyle/>
-          <a:p>
-            <a:pPr lvl="0" indent="0" marL="0">
-              <a:buNone/>
-            </a:pPr>
-            <a:r>
-              <a:rPr/>
-              <a:t>Variance Decomposition</a:t>
-            </a:r>
-          </a:p>
-        </p:txBody>
-      </p:sp>
-      <mc:AlternateContent xmlns:mc="http://schemas.openxmlformats.org/markup-compatibility/2006">
-        <mc:Choice xmlns:a14="http://schemas.microsoft.com/office/drawing/2010/main" Requires="a14">
-          <p:sp>
-            <p:nvSpPr>
-              <p:cNvPr id="3" name="Content Placeholder 2"/>
-              <p:cNvSpPr>
-                <a:spLocks noGrp="1"/>
-              </p:cNvSpPr>
-              <p:nvPr>
-                <p:ph idx="1"/>
-              </p:nvPr>
-            </p:nvSpPr>
-            <p:spPr/>
-            <p:txBody>
-              <a:bodyPr/>
-              <a:lstStyle/>
-              <a:p>
-                <a:pPr lvl="0" indent="0" marL="0">
-                  <a:buNone/>
-                </a:pPr>
-                <a:r>
-                  <a:rPr/>
-                  <a:t>For independent inputs, the total variance decomposes:</a:t>
-                </a:r>
-              </a:p>
-              <a:p>
-                <a:pPr lvl="0" indent="0" marL="0">
-                  <a:buNone/>
-                </a:pPr>
-                <a14:m>
-                  <m:oMathPara xmlns:m="http://schemas.openxmlformats.org/officeDocument/2006/math">
-                    <m:oMathParaPr>
-                      <m:jc m:val="center"/>
-                    </m:oMathParaPr>
-                    <m:oMath>
-                      <m:r>
-                        <m:rPr>
-                          <m:nor/>
-                          <m:sty m:val="p"/>
-                        </m:rPr>
-                        <m:t>Var</m:t>
-                      </m:r>
-                      <m:d>
-                        <m:dPr>
-                          <m:begChr m:val="("/>
-                          <m:sepChr m:val=""/>
-                          <m:endChr m:val=")"/>
-                          <m:grow/>
-                        </m:dPr>
-                        <m:e>
-                          <m:r>
-                            <m:t>Y</m:t>
-                          </m:r>
-                        </m:e>
-                      </m:d>
-                      <m:r>
-                        <m:rPr>
-                          <m:sty m:val="p"/>
-                        </m:rPr>
-                        <m:t>=</m:t>
-                      </m:r>
-                      <m:nary>
-                        <m:naryPr>
-                          <m:chr m:val="∑"/>
-                          <m:limLoc m:val="undOvr"/>
-                          <m:subHide m:val="off"/>
-                          <m:supHide m:val="on"/>
-                        </m:naryPr>
-                        <m:sub>
-                          <m:r>
-                            <m:t>i</m:t>
-                          </m:r>
-                        </m:sub>
-                        <m:sup>
-                          <m:r>
-                            <m:t>​</m:t>
-                          </m:r>
-                        </m:sup>
-                        <m:e>
-                          <m:sSub>
-                            <m:e>
-                              <m:r>
-                                <m:t>V</m:t>
-                              </m:r>
-                            </m:e>
-                            <m:sub>
-                              <m:r>
-                                <m:t>i</m:t>
-                              </m:r>
-                            </m:sub>
-                          </m:sSub>
-                        </m:e>
-                      </m:nary>
-                      <m:r>
-                        <m:rPr>
-                          <m:sty m:val="p"/>
-                        </m:rPr>
-                        <m:t>+</m:t>
-                      </m:r>
-                      <m:nary>
-                        <m:naryPr>
-                          <m:chr m:val="∑"/>
-                          <m:limLoc m:val="undOvr"/>
-                          <m:subHide m:val="off"/>
-                          <m:supHide m:val="on"/>
-                        </m:naryPr>
-                        <m:sub>
-                          <m:r>
-                            <m:t>i</m:t>
-                          </m:r>
-                          <m:r>
-                            <m:rPr>
-                              <m:sty m:val="p"/>
-                            </m:rPr>
-                            <m:t>&lt;</m:t>
-                          </m:r>
-                          <m:r>
-                            <m:t>j</m:t>
-                          </m:r>
-                        </m:sub>
-                        <m:sup>
-                          <m:r>
-                            <m:t>​</m:t>
-                          </m:r>
-                        </m:sup>
-                        <m:e>
-                          <m:sSub>
-                            <m:e>
-                              <m:r>
-                                <m:t>V</m:t>
-                              </m:r>
-                            </m:e>
-                            <m:sub>
-                              <m:r>
-                                <m:t>i</m:t>
-                              </m:r>
-                              <m:r>
-                                <m:t>j</m:t>
-                              </m:r>
-                            </m:sub>
-                          </m:sSub>
-                        </m:e>
-                      </m:nary>
-                      <m:r>
-                        <m:rPr>
-                          <m:sty m:val="p"/>
-                        </m:rPr>
-                        <m:t>+</m:t>
-                      </m:r>
-                      <m:r>
-                        <m:rPr>
-                          <m:sty m:val="p"/>
-                        </m:rPr>
-                        <m:t>⋯</m:t>
-                      </m:r>
-                      <m:r>
-                        <m:rPr>
-                          <m:sty m:val="p"/>
-                        </m:rPr>
-                        <m:t>+</m:t>
-                      </m:r>
-                      <m:sSub>
-                        <m:e>
-                          <m:r>
-                            <m:t>V</m:t>
-                          </m:r>
-                        </m:e>
-                        <m:sub>
-                          <m:r>
-                            <m:t>12</m:t>
-                          </m:r>
-                          <m:r>
-                            <m:rPr>
-                              <m:sty m:val="p"/>
-                            </m:rPr>
-                            <m:t>…</m:t>
-                          </m:r>
-                          <m:r>
-                            <m:t>M</m:t>
-                          </m:r>
-                        </m:sub>
-                      </m:sSub>
-                    </m:oMath>
-                  </m:oMathPara>
-                </a14:m>
-              </a:p>
-              <a:p>
-                <a:pPr lvl="0"/>
-                <a14:m>
-                  <m:oMath xmlns:m="http://schemas.openxmlformats.org/officeDocument/2006/math">
-                    <m:sSub>
-                      <m:e>
-                        <m:r>
-                          <m:t>V</m:t>
-                        </m:r>
-                      </m:e>
-                      <m:sub>
-                        <m:r>
-                          <m:t>i</m:t>
-                        </m:r>
-                      </m:sub>
-                    </m:sSub>
-                    <m:r>
-                      <m:rPr>
-                        <m:sty m:val="p"/>
-                      </m:rPr>
-                      <m:t>=</m:t>
-                    </m:r>
-                    <m:r>
-                      <m:rPr>
-                        <m:nor/>
-                        <m:sty m:val="p"/>
-                      </m:rPr>
-                      <m:t>Var</m:t>
-                    </m:r>
-                    <m:d>
-                      <m:dPr>
-                        <m:begChr m:val="("/>
-                        <m:sepChr m:val=""/>
-                        <m:endChr m:val=")"/>
-                        <m:grow/>
-                      </m:dPr>
-                      <m:e>
-                        <m:r>
-                          <m:rPr>
-                            <m:sty m:val="p"/>
-                            <m:scr m:val="double-struck"/>
-                          </m:rPr>
-                          <m:t>E</m:t>
-                        </m:r>
-                        <m:d>
-                          <m:dPr>
-                            <m:begChr m:val="["/>
-                            <m:sepChr m:val=""/>
-                            <m:endChr m:val="]"/>
-                            <m:grow/>
-                          </m:dPr>
-                          <m:e>
-                            <m:r>
-                              <m:t>Y</m:t>
-                            </m:r>
-                            <m:r>
-                              <m:rPr>
-                                <m:sty m:val="p"/>
-                              </m:rPr>
-                              <m:t>∣</m:t>
-                            </m:r>
-                            <m:sSub>
-                              <m:e>
-                                <m:r>
-                                  <m:t>X</m:t>
-                                </m:r>
-                              </m:e>
-                              <m:sub>
-                                <m:r>
-                                  <m:t>i</m:t>
-                                </m:r>
-                              </m:sub>
-                            </m:sSub>
-                          </m:e>
-                        </m:d>
-                      </m:e>
-                    </m:d>
-                  </m:oMath>
-                </a14:m>
-                <a:r>
-                  <a:rPr/>
-                  <a:t>: main effect of </a:t>
-                </a:r>
-                <a14:m>
-                  <m:oMath xmlns:m="http://schemas.openxmlformats.org/officeDocument/2006/math">
-                    <m:sSub>
-                      <m:e>
-                        <m:r>
-                          <m:t>X</m:t>
-                        </m:r>
-                      </m:e>
-                      <m:sub>
-                        <m:r>
-                          <m:t>i</m:t>
-                        </m:r>
-                      </m:sub>
-                    </m:sSub>
-                  </m:oMath>
-                </a14:m>
-              </a:p>
-              <a:p>
-                <a:pPr lvl="0"/>
-                <a14:m>
-                  <m:oMath xmlns:m="http://schemas.openxmlformats.org/officeDocument/2006/math">
-                    <m:sSub>
-                      <m:e>
-                        <m:r>
-                          <m:t>V</m:t>
-                        </m:r>
-                      </m:e>
-                      <m:sub>
-                        <m:r>
-                          <m:t>i</m:t>
-                        </m:r>
-                        <m:r>
-                          <m:t>j</m:t>
-                        </m:r>
-                      </m:sub>
-                    </m:sSub>
-                  </m:oMath>
-                </a14:m>
-                <a:r>
-                  <a:rPr/>
-                  <a:t>: interaction between </a:t>
-                </a:r>
-                <a14:m>
-                  <m:oMath xmlns:m="http://schemas.openxmlformats.org/officeDocument/2006/math">
-                    <m:sSub>
-                      <m:e>
-                        <m:r>
-                          <m:t>X</m:t>
-                        </m:r>
-                      </m:e>
-                      <m:sub>
-                        <m:r>
-                          <m:t>i</m:t>
-                        </m:r>
-                      </m:sub>
-                    </m:sSub>
-                  </m:oMath>
-                </a14:m>
-                <a:r>
-                  <a:rPr/>
-                  <a:t> and </a:t>
-                </a:r>
-                <a14:m>
-                  <m:oMath xmlns:m="http://schemas.openxmlformats.org/officeDocument/2006/math">
-                    <m:sSub>
-                      <m:e>
-                        <m:r>
-                          <m:t>X</m:t>
-                        </m:r>
-                      </m:e>
-                      <m:sub>
-                        <m:r>
-                          <m:t>j</m:t>
-                        </m:r>
-                      </m:sub>
-                    </m:sSub>
-                  </m:oMath>
-                </a14:m>
-              </a:p>
-              <a:p>
-                <a:pPr lvl="0"/>
-                <a:r>
-                  <a:rPr/>
-                  <a:t>Higher-order terms exist but are rarely important in practice</a:t>
-                </a:r>
-              </a:p>
-            </p:txBody>
-          </p:sp>
-        </mc:Choice>
-      </mc:AlternateContent>
-    </p:spTree>
-  </p:cSld>
-</p:sld>
-</file>
-
-<file path=ppt/slides/slide14.xml><?xml version="1.0" encoding="utf-8"?>
-<p:sld xmlns:a="http://schemas.openxmlformats.org/drawingml/2006/main" xmlns:r="http://schemas.openxmlformats.org/officeDocument/2006/relationships" xmlns:p="http://schemas.openxmlformats.org/presentationml/2006/main">
-  <p:cSld>
-    <p:spTree>
-      <p:nvGrpSpPr>
-        <p:cNvPr id="1" name=""/>
-        <p:cNvGrpSpPr/>
-        <p:nvPr/>
-      </p:nvGrpSpPr>
-      <p:grpSpPr>
-        <a:xfrm>
-          <a:off x="0" y="0"/>
-          <a:ext cx="0" cy="0"/>
-          <a:chOff x="0" y="0"/>
-          <a:chExt cx="0" cy="0"/>
-        </a:xfrm>
-      </p:grpSpPr>
-      <p:sp>
-        <p:nvSpPr>
-          <p:cNvPr id="2" name="Title 1"/>
-          <p:cNvSpPr>
-            <a:spLocks noGrp="1"/>
-          </p:cNvSpPr>
-          <p:nvPr>
-            <p:ph type="title"/>
-          </p:nvPr>
-        </p:nvSpPr>
-        <p:spPr/>
-        <p:txBody>
-          <a:bodyPr/>
-          <a:lstStyle/>
-          <a:p>
-            <a:pPr lvl="0" indent="0" marL="0">
-              <a:buNone/>
-            </a:pPr>
-            <a:r>
-              <a:rPr/>
-              <a:t>Sobol Indices</a:t>
-            </a:r>
-          </a:p>
-        </p:txBody>
-      </p:sp>
-      <mc:AlternateContent xmlns:mc="http://schemas.openxmlformats.org/markup-compatibility/2006">
-        <mc:Choice xmlns:a14="http://schemas.microsoft.com/office/drawing/2010/main" Requires="a14">
-          <p:sp>
-            <p:nvSpPr>
-              <p:cNvPr id="3" name="Content Placeholder 2"/>
-              <p:cNvSpPr>
-                <a:spLocks noGrp="1"/>
-              </p:cNvSpPr>
-              <p:nvPr>
-                <p:ph idx="1"/>
-              </p:nvPr>
-            </p:nvSpPr>
-            <p:spPr/>
-            <p:txBody>
-              <a:bodyPr/>
-              <a:lstStyle/>
-              <a:p>
-                <a:pPr lvl="0" indent="0" marL="0">
-                  <a:buNone/>
-                </a:pPr>
-                <a:r>
-                  <a:rPr b="1"/>
-                  <a:t>First-order</a:t>
-                </a:r>
-                <a:r>
-                  <a:rPr/>
-                  <a:t> — if you knew </a:t>
-                </a:r>
-                <a14:m>
-                  <m:oMath xmlns:m="http://schemas.openxmlformats.org/officeDocument/2006/math">
-                    <m:sSub>
-                      <m:e>
-                        <m:r>
-                          <m:t>X</m:t>
-                        </m:r>
-                      </m:e>
-                      <m:sub>
-                        <m:r>
-                          <m:t>i</m:t>
-                        </m:r>
-                      </m:sub>
-                    </m:sSub>
-                  </m:oMath>
-                </a14:m>
-                <a:r>
-                  <a:rPr/>
-                  <a:t>, what fraction of the variance in </a:t>
-                </a:r>
-                <a14:m>
-                  <m:oMath xmlns:m="http://schemas.openxmlformats.org/officeDocument/2006/math">
-                    <m:r>
-                      <m:t>Y</m:t>
-                    </m:r>
-                  </m:oMath>
-                </a14:m>
-                <a:r>
-                  <a:rPr/>
-                  <a:t> would go away?</a:t>
-                </a:r>
-              </a:p>
-              <a:p>
-                <a:pPr lvl="0" indent="0" marL="0">
-                  <a:buNone/>
-                </a:pPr>
-                <a14:m>
-                  <m:oMathPara xmlns:m="http://schemas.openxmlformats.org/officeDocument/2006/math">
-                    <m:oMathParaPr>
-                      <m:jc m:val="center"/>
-                    </m:oMathParaPr>
-                    <m:oMath>
-                      <m:sSub>
-                        <m:e>
-                          <m:r>
-                            <m:t>S</m:t>
-                          </m:r>
-                        </m:e>
-                        <m:sub>
-                          <m:r>
-                            <m:t>i</m:t>
-                          </m:r>
-                        </m:sub>
-                      </m:sSub>
-                      <m:r>
-                        <m:rPr>
-                          <m:sty m:val="p"/>
-                        </m:rPr>
-                        <m:t>=</m:t>
-                      </m:r>
-                      <m:f>
-                        <m:fPr>
-                          <m:type m:val="bar"/>
-                        </m:fPr>
-                        <m:num>
-                          <m:r>
-                            <m:rPr>
-                              <m:nor/>
-                              <m:sty m:val="p"/>
-                            </m:rPr>
-                            <m:t>Var</m:t>
-                          </m:r>
-                          <m:d>
-                            <m:dPr>
-                              <m:begChr m:val="("/>
-                              <m:sepChr m:val=""/>
-                              <m:endChr m:val=")"/>
-                              <m:grow/>
-                            </m:dPr>
-                            <m:e>
-                              <m:r>
-                                <m:rPr>
-                                  <m:sty m:val="p"/>
-                                  <m:scr m:val="double-struck"/>
-                                </m:rPr>
-                                <m:t>E</m:t>
-                              </m:r>
-                              <m:d>
-                                <m:dPr>
-                                  <m:begChr m:val="["/>
-                                  <m:sepChr m:val=""/>
-                                  <m:endChr m:val="]"/>
-                                  <m:grow/>
-                                </m:dPr>
-                                <m:e>
-                                  <m:r>
-                                    <m:t>Y</m:t>
-                                  </m:r>
-                                  <m:r>
-                                    <m:rPr>
-                                      <m:sty m:val="p"/>
-                                    </m:rPr>
-                                    <m:t>∣</m:t>
-                                  </m:r>
-                                  <m:sSub>
-                                    <m:e>
-                                      <m:r>
-                                        <m:t>X</m:t>
-                                      </m:r>
-                                    </m:e>
-                                    <m:sub>
-                                      <m:r>
-                                        <m:t>i</m:t>
-                                      </m:r>
-                                    </m:sub>
-                                  </m:sSub>
-                                </m:e>
-                              </m:d>
-                            </m:e>
-                          </m:d>
-                        </m:num>
-                        <m:den>
-                          <m:r>
-                            <m:rPr>
-                              <m:nor/>
-                              <m:sty m:val="p"/>
-                            </m:rPr>
-                            <m:t>Var</m:t>
-                          </m:r>
-                          <m:d>
-                            <m:dPr>
-                              <m:begChr m:val="("/>
-                              <m:sepChr m:val=""/>
-                              <m:endChr m:val=")"/>
-                              <m:grow/>
-                            </m:dPr>
-                            <m:e>
-                              <m:r>
-                                <m:t>Y</m:t>
-                              </m:r>
-                            </m:e>
-                          </m:d>
-                        </m:den>
-                      </m:f>
-                    </m:oMath>
-                  </m:oMathPara>
-                </a14:m>
-              </a:p>
-              <a:p>
-                <a:pPr lvl="0" indent="0" marL="0">
-                  <a:buNone/>
-                </a:pPr>
-                <a:r>
-                  <a:rPr b="1"/>
-                  <a:t>Total-order</a:t>
-                </a:r>
-                <a:r>
-                  <a:rPr/>
-                  <a:t> — if you knew everything </a:t>
-                </a:r>
-                <a:r>
-                  <a:rPr i="1"/>
-                  <a:t>except</a:t>
-                </a:r>
-                <a:r>
-                  <a:rPr/>
-                  <a:t> </a:t>
-                </a:r>
-                <a14:m>
-                  <m:oMath xmlns:m="http://schemas.openxmlformats.org/officeDocument/2006/math">
-                    <m:sSub>
-                      <m:e>
-                        <m:r>
-                          <m:t>X</m:t>
-                        </m:r>
-                      </m:e>
-                      <m:sub>
-                        <m:r>
-                          <m:t>i</m:t>
-                        </m:r>
-                      </m:sub>
-                    </m:sSub>
-                  </m:oMath>
-                </a14:m>
-                <a:r>
-                  <a:rPr/>
-                  <a:t>, what fraction of the variance would remain?</a:t>
-                </a:r>
-              </a:p>
-              <a:p>
-                <a:pPr lvl="0" indent="0" marL="0">
-                  <a:buNone/>
-                </a:pPr>
-                <a14:m>
-                  <m:oMathPara xmlns:m="http://schemas.openxmlformats.org/officeDocument/2006/math">
-                    <m:oMathParaPr>
-                      <m:jc m:val="center"/>
-                    </m:oMathParaPr>
-                    <m:oMath>
-                      <m:sSub>
-                        <m:e>
-                          <m:r>
-                            <m:t>S</m:t>
-                          </m:r>
-                        </m:e>
-                        <m:sub>
-                          <m:sSub>
-                            <m:e>
-                              <m:r>
-                                <m:t>T</m:t>
-                              </m:r>
-                            </m:e>
-                            <m:sub>
-                              <m:r>
-                                <m:t>i</m:t>
-                              </m:r>
-                            </m:sub>
-                          </m:sSub>
-                        </m:sub>
-                      </m:sSub>
-                      <m:r>
-                        <m:rPr>
-                          <m:sty m:val="p"/>
-                        </m:rPr>
-                        <m:t>=</m:t>
-                      </m:r>
-                      <m:r>
-                        <m:t>1</m:t>
-                      </m:r>
-                      <m:r>
-                        <m:rPr>
-                          <m:sty m:val="p"/>
-                        </m:rPr>
-                        <m:t>−</m:t>
-                      </m:r>
-                      <m:f>
-                        <m:fPr>
-                          <m:type m:val="bar"/>
-                        </m:fPr>
-                        <m:num>
-                          <m:r>
-                            <m:rPr>
-                              <m:nor/>
-                              <m:sty m:val="p"/>
-                            </m:rPr>
-                            <m:t>Var</m:t>
-                          </m:r>
-                          <m:d>
-                            <m:dPr>
-                              <m:begChr m:val="("/>
-                              <m:sepChr m:val=""/>
-                              <m:endChr m:val=")"/>
-                              <m:grow/>
-                            </m:dPr>
-                            <m:e>
-                              <m:r>
-                                <m:rPr>
-                                  <m:sty m:val="p"/>
-                                  <m:scr m:val="double-struck"/>
-                                </m:rPr>
-                                <m:t>E</m:t>
-                              </m:r>
-                              <m:d>
-                                <m:dPr>
-                                  <m:begChr m:val="["/>
-                                  <m:sepChr m:val=""/>
-                                  <m:endChr m:val="]"/>
-                                  <m:grow/>
-                                </m:dPr>
-                                <m:e>
-                                  <m:r>
-                                    <m:t>Y</m:t>
-                                  </m:r>
-                                  <m:r>
-                                    <m:rPr>
-                                      <m:sty m:val="p"/>
-                                    </m:rPr>
-                                    <m:t>∣</m:t>
-                                  </m:r>
-                                  <m:sSub>
-                                    <m:e>
-                                      <m:r>
-                                        <m:t>X</m:t>
-                                      </m:r>
-                                    </m:e>
-                                    <m:sub>
-                                      <m:r>
-                                        <m:rPr>
-                                          <m:sty m:val="p"/>
-                                        </m:rPr>
-                                        <m:t>∼</m:t>
-                                      </m:r>
-                                      <m:r>
-                                        <m:t>i</m:t>
-                                      </m:r>
-                                    </m:sub>
-                                  </m:sSub>
-                                </m:e>
-                              </m:d>
-                            </m:e>
-                          </m:d>
-                        </m:num>
-                        <m:den>
-                          <m:r>
-                            <m:rPr>
-                              <m:nor/>
-                              <m:sty m:val="p"/>
-                            </m:rPr>
-                            <m:t>Var</m:t>
-                          </m:r>
-                          <m:d>
-                            <m:dPr>
-                              <m:begChr m:val="("/>
-                              <m:sepChr m:val=""/>
-                              <m:endChr m:val=")"/>
-                              <m:grow/>
-                            </m:dPr>
-                            <m:e>
-                              <m:r>
-                                <m:t>Y</m:t>
-                              </m:r>
-                            </m:e>
-                          </m:d>
-                        </m:den>
-                      </m:f>
-                    </m:oMath>
-                  </m:oMathPara>
-                </a14:m>
-              </a:p>
-              <a:p>
-                <a:pPr lvl="0" indent="0" marL="0">
-                  <a:buNone/>
-                </a:pPr>
-                <a:r>
-                  <a:rPr/>
-                  <a:t>where </a:t>
-                </a:r>
-                <a14:m>
-                  <m:oMath xmlns:m="http://schemas.openxmlformats.org/officeDocument/2006/math">
-                    <m:sSub>
-                      <m:e>
-                        <m:r>
-                          <m:t>X</m:t>
-                        </m:r>
-                      </m:e>
-                      <m:sub>
-                        <m:r>
-                          <m:rPr>
-                            <m:sty m:val="p"/>
-                          </m:rPr>
-                          <m:t>∼</m:t>
-                        </m:r>
-                        <m:r>
-                          <m:t>i</m:t>
-                        </m:r>
-                      </m:sub>
-                    </m:sSub>
-                  </m:oMath>
-                </a14:m>
-                <a:r>
-                  <a:rPr/>
-                  <a:t> denotes all inputs </a:t>
-                </a:r>
-                <a:r>
-                  <a:rPr i="1"/>
-                  <a:t>except</a:t>
-                </a:r>
-                <a:r>
-                  <a:rPr/>
-                  <a:t> </a:t>
-                </a:r>
-                <a14:m>
-                  <m:oMath xmlns:m="http://schemas.openxmlformats.org/officeDocument/2006/math">
-                    <m:sSub>
-                      <m:e>
-                        <m:r>
-                          <m:t>X</m:t>
-                        </m:r>
-                      </m:e>
-                      <m:sub>
-                        <m:r>
-                          <m:t>i</m:t>
-                        </m:r>
-                      </m:sub>
-                    </m:sSub>
-                  </m:oMath>
-                </a14:m>
-                <a:r>
-                  <a:rPr/>
-                  <a:t>.</a:t>
-                </a:r>
-              </a:p>
-            </p:txBody>
-          </p:sp>
-        </mc:Choice>
-      </mc:AlternateContent>
-    </p:spTree>
-  </p:cSld>
-</p:sld>
-</file>
-
-<file path=ppt/slides/slide15.xml><?xml version="1.0" encoding="UTF-8"?><p:sld xmlns:a="http://schemas.openxmlformats.org/drawingml/2006/main" xmlns:r="http://schemas.openxmlformats.org/officeDocument/2006/relationships" xmlns:p="http://schemas.openxmlformats.org/presentationml/2006/main"><p:cSld><p:spTree><p:nvGrpSpPr><p:cNvPr id="1" name="" /><p:cNvGrpSpPr /><p:nvPr /></p:nvGrpSpPr><p:grpSpPr><a:xfrm><a:off x="0" y="0" /><a:ext cx="0" cy="0" /><a:chOff x="0" y="0" /><a:chExt cx="0" cy="0" /></a:xfrm></p:grpSpPr><p:sp><p:nvSpPr><p:cNvPr id="2" name="Title 1" /><p:cNvSpPr><a:spLocks noGrp="1" /></p:cNvSpPr><p:nvPr><p:ph type="title" /></p:nvPr></p:nvSpPr><p:spPr /><p:txBody><a:bodyPr /><a:lstStyle /><a:p><a:pPr lvl="0" indent="0" marL="0"><a:buNone /></a:pPr><a:r><a:rPr /><a:t>Interpreting Sobol Indices</a:t></a:r></a:p></p:txBody></p:sp><p:graphicFrame><p:nvGraphicFramePr><p:cNvPr id="6" name="Content Placeholder 5" /><p:cNvGraphicFramePr><a:graphicFrameLocks noGrp="1" /></p:cNvGraphicFramePr><p:nvPr><p:ph idx="1" /></p:nvPr></p:nvGraphicFramePr><p:xfrm><a:off x="457200" y="1193800" /><a:ext cx="8229600" cy="3390900" /></p:xfrm><a:graphic><a:graphicData uri="http://schemas.openxmlformats.org/drawingml/2006/table"><a:tbl><a:tblPr firstRow="1" bandRow="1"><a:tableStyleId>{5C22544A-7EE6-4342-B048-85BDC9FD1C3A}</a:tableStyleId></a:tblPr><a:tblGrid><a:gridCol w="4114800" /><a:gridCol w="4114800" /></a:tblGrid><a:tr h="0"><a:tc><a:txBody><a:bodyPr /><a:lstStyle /><a:p><a:pPr lvl="0" indent="0" marL="0" algn="l"><a:buNone /></a:pPr><a:r><a:rPr /><a:t>Pattern</a:t></a:r></a:p></a:txBody><a:tcPr /></a:tc><a:tc><a:txBody><a:bodyPr /><a:lstStyle /><a:p><a:pPr lvl="0" indent="0" marL="0" algn="l"><a:buNone /></a:pPr><a:r><a:rPr /><a:t>Interpretation</a:t></a:r></a:p></a:txBody><a:tcPr /></a:tc></a:tr><a:tr h="0"><a:tc><a:txBody><a:bodyPr /><a:lstStyle /><a:p><a:pPr lvl="0" indent="0" marL="0" algn="l"><a:buNone /></a:pPr><a14:m><m:oMath xmlns:m="http://schemas.openxmlformats.org/officeDocument/2006/math"><m:sSub><m:e><m:r><m:t>S</m:t></m:r></m:e><m:sub><m:r><m:t>i</m:t></m:r></m:sub></m:sSub></m:oMath></a14:m><a:r><a:rPr /><a:t> large, </a:t></a:r><a14:m><m:oMath xmlns:m="http://schemas.openxmlformats.org/officeDocument/2006/math"><m:sSub><m:e><m:r><m:t>S</m:t></m:r></m:e><m:sub><m:sSub><m:e><m:r><m:t>T</m:t></m:r></m:e><m:sub><m:r><m:t>i</m:t></m:r></m:sub></m:sSub></m:sub></m:sSub><m:r><m:rPr><m:sty m:val="p" /></m:rPr><m:t>≈</m:t></m:r><m:sSub><m:e><m:r><m:t>S</m:t></m:r></m:e><m:sub><m:r><m:t>i</m:t></m:r></m:sub></m:sSub></m:oMath></a14:m></a:p></a:txBody></a:tc><a:tc><a:txBody><a:bodyPr /><a:lstStyle /><a:p><a:pPr lvl="0" indent="0" marL="0" algn="l"><a:buNone /></a:pPr><a:r><a:rPr /><a:t>Strong main effect, few interactions</a:t></a:r></a:p></a:txBody></a:tc></a:tr><a:tr h="0"><a:tc><a:txBody><a:bodyPr /><a:lstStyle /><a:p><a:pPr lvl="0" indent="0" marL="0" algn="l"><a:buNone /></a:pPr><a14:m><m:oMath xmlns:m="http://schemas.openxmlformats.org/officeDocument/2006/math"><m:sSub><m:e><m:r><m:t>S</m:t></m:r></m:e><m:sub><m:r><m:t>i</m:t></m:r></m:sub></m:sSub></m:oMath></a14:m><a:r><a:rPr /><a:t> small, </a:t></a:r><a14:m><m:oMath xmlns:m="http://schemas.openxmlformats.org/officeDocument/2006/math"><m:sSub><m:e><m:r><m:t>S</m:t></m:r></m:e><m:sub><m:sSub><m:e><m:r><m:t>T</m:t></m:r></m:e><m:sub><m:r><m:t>i</m:t></m:r></m:sub></m:sSub></m:sub></m:sSub></m:oMath></a14:m><a:r><a:rPr /><a:t> large</a:t></a:r></a:p></a:txBody></a:tc><a:tc><a:txBody><a:bodyPr /><a:lstStyle /><a:p><a:pPr lvl="0" indent="0" marL="0" algn="l"><a:buNone /></a:pPr><a:r><a:rPr /><a:t>Matters mainly through interactions</a:t></a:r></a:p></a:txBody></a:tc></a:tr><a:tr h="0"><a:tc><a:txBody><a:bodyPr /><a:lstStyle /><a:p><a:pPr lvl="0" indent="0" marL="0" algn="l"><a:buNone /></a:pPr><a14:m><m:oMath xmlns:m="http://schemas.openxmlformats.org/officeDocument/2006/math"><m:sSub><m:e><m:r><m:t>S</m:t></m:r></m:e><m:sub><m:r><m:t>i</m:t></m:r></m:sub></m:sSub></m:oMath></a14:m><a:r><a:rPr /><a:t> small, </a:t></a:r><a14:m><m:oMath xmlns:m="http://schemas.openxmlformats.org/officeDocument/2006/math"><m:sSub><m:e><m:r><m:t>S</m:t></m:r></m:e><m:sub><m:sSub><m:e><m:r><m:t>T</m:t></m:r></m:e><m:sub><m:r><m:t>i</m:t></m:r></m:sub></m:sSub></m:sub></m:sSub></m:oMath></a14:m><a:r><a:rPr /><a:t> small</a:t></a:r></a:p></a:txBody></a:tc><a:tc><a:txBody><a:bodyPr /><a:lstStyle /><a:p><a:pPr lvl="0" indent="0" marL="0" algn="l"><a:buNone /></a:pPr><a:r><a:rPr /><a:t>Doesn’t matter much</a:t></a:r></a:p></a:txBody></a:tc></a:tr><a:tr h="0"><a:tc><a:txBody><a:bodyPr /><a:lstStyle /><a:p><a:pPr lvl="0" indent="0" marL="0" algn="l"><a:buNone /></a:pPr><a14:m><m:oMath xmlns:m="http://schemas.openxmlformats.org/officeDocument/2006/math"><m:r><m:rPr><m:sty m:val="p" /></m:rPr><m:t>∑</m:t></m:r><m:sSub><m:e><m:r><m:t>S</m:t></m:r></m:e><m:sub><m:r><m:t>i</m:t></m:r></m:sub></m:sSub><m:r><m:rPr><m:sty m:val="p" /></m:rPr><m:t>≈</m:t></m:r><m:r><m:t>1</m:t></m:r></m:oMath></a14:m></a:p></a:txBody></a:tc><a:tc><a:txBody><a:bodyPr /><a:lstStyle /><a:p><a:pPr lvl="0" indent="0" marL="0" algn="l"><a:buNone /></a:pPr><a:r><a:rPr /><a:t>Model is mostly additive</a:t></a:r></a:p></a:txBody></a:tc></a:tr></a:tbl></a:graphicData></a:graphic></p:graphicFrame></p:spTree></p:cSld></p:sld>
-</file>
-
-<file path=ppt/slides/slide16.xml><?xml version="1.0" encoding="utf-8"?>
-<p:sld xmlns:a="http://schemas.openxmlformats.org/drawingml/2006/main" xmlns:r="http://schemas.openxmlformats.org/officeDocument/2006/relationships" xmlns:p="http://schemas.openxmlformats.org/presentationml/2006/main">
-  <p:cSld>
-    <p:spTree>
-      <p:nvGrpSpPr>
-        <p:cNvPr id="1" name=""/>
-        <p:cNvGrpSpPr/>
-        <p:nvPr/>
-      </p:nvGrpSpPr>
-      <p:grpSpPr>
-        <a:xfrm>
-          <a:off x="0" y="0"/>
-          <a:ext cx="0" cy="0"/>
-          <a:chOff x="0" y="0"/>
-          <a:chExt cx="0" cy="0"/>
-        </a:xfrm>
-      </p:grpSpPr>
-      <mc:AlternateContent xmlns:mc="http://schemas.openxmlformats.org/markup-compatibility/2006">
-        <mc:Choice xmlns:a14="http://schemas.microsoft.com/office/drawing/2010/main" Requires="a14">
-          <p:sp>
-            <p:nvSpPr>
-              <p:cNvPr id="3" name="Content Placeholder 2"/>
-              <p:cNvSpPr>
-                <a:spLocks noGrp="1"/>
-              </p:cNvSpPr>
-              <p:nvPr>
-                <p:ph idx="1"/>
-              </p:nvPr>
-            </p:nvSpPr>
-            <p:spPr/>
-            <p:txBody>
-              <a:bodyPr/>
-              <a:lstStyle/>
-              <a:p>
-                <a:pPr lvl="0" indent="0" marL="0">
-                  <a:buNone/>
-                </a:pPr>
-                <a:r>
-                  <a:rPr/>
-                  <a:t>Screening rule: </a:t>
-                </a:r>
-                <a14:m>
-                  <m:oMath xmlns:m="http://schemas.openxmlformats.org/officeDocument/2006/math">
-                    <m:sSub>
-                      <m:e>
-                        <m:r>
-                          <m:t>S</m:t>
-                        </m:r>
-                      </m:e>
-                      <m:sub>
-                        <m:sSub>
-                          <m:e>
-                            <m:r>
-                              <m:t>T</m:t>
-                            </m:r>
-                          </m:e>
-                          <m:sub>
-                            <m:r>
-                              <m:t>i</m:t>
-                            </m:r>
-                          </m:sub>
-                        </m:sSub>
-                      </m:sub>
-                    </m:sSub>
-                    <m:r>
-                      <m:rPr>
-                        <m:sty m:val="p"/>
-                      </m:rPr>
-                      <m:t>≈</m:t>
-                    </m:r>
-                    <m:r>
-                      <m:t>0</m:t>
-                    </m:r>
-                  </m:oMath>
-                </a14:m>
-                <a:r>
-                  <a:rPr/>
-                  <a:t> is necessary and sufficient for unimportance (Pianosi et al. 2016).</a:t>
-                </a:r>
-              </a:p>
-            </p:txBody>
-          </p:sp>
-        </mc:Choice>
-      </mc:AlternateContent>
-    </p:spTree>
-  </p:cSld>
-</p:sld>
-</file>
-
-<file path=ppt/slides/slide17.xml><?xml version="1.0" encoding="utf-8"?>
-<p:sld xmlns:a="http://schemas.openxmlformats.org/drawingml/2006/main" xmlns:r="http://schemas.openxmlformats.org/officeDocument/2006/relationships" xmlns:p="http://schemas.openxmlformats.org/presentationml/2006/main">
-  <p:cSld>
-    <p:spTree>
-      <p:nvGrpSpPr>
-        <p:cNvPr id="1" name=""/>
-        <p:cNvGrpSpPr/>
-        <p:nvPr/>
-      </p:nvGrpSpPr>
-      <p:grpSpPr>
-        <a:xfrm>
-          <a:off x="0" y="0"/>
-          <a:ext cx="0" cy="0"/>
-          <a:chOff x="0" y="0"/>
-          <a:chExt cx="0" cy="0"/>
-        </a:xfrm>
-      </p:grpSpPr>
-      <p:sp>
-        <p:nvSpPr>
-          <p:cNvPr id="2" name="Title 1"/>
-          <p:cNvSpPr>
-            <a:spLocks noGrp="1"/>
-          </p:cNvSpPr>
-          <p:nvPr>
-            <p:ph type="title"/>
-          </p:nvPr>
-        </p:nvSpPr>
-        <p:spPr/>
-        <p:txBody>
-          <a:bodyPr/>
-          <a:lstStyle/>
-          <a:p>
-            <a:pPr lvl="0" indent="0" marL="0">
-              <a:buNone/>
-            </a:pPr>
-            <a:r>
-              <a:rPr/>
-              <a:t>Reading a Sensitivity Analysis</a:t>
-            </a:r>
-          </a:p>
-        </p:txBody>
-      </p:sp>
-      <p:sp>
-        <p:nvSpPr>
-          <p:cNvPr id="3" name="Content Placeholder 2"/>
-          <p:cNvSpPr>
-            <a:spLocks noGrp="1"/>
-          </p:cNvSpPr>
-          <p:nvPr>
-            <p:ph idx="1"/>
-          </p:nvPr>
-        </p:nvSpPr>
-        <p:spPr/>
-        <p:txBody>
-          <a:bodyPr/>
-          <a:lstStyle/>
-          <a:p>
-            <a:pPr lvl="0" indent="0" marL="0">
-              <a:buNone/>
-            </a:pPr>
-            <a:r>
-              <a:rPr/>
-              <a:t>Three questions to always ask:</a:t>
-            </a:r>
-          </a:p>
-          <a:p>
-            <a:pPr lvl="0" indent="-342900" marL="342900">
-              <a:buAutoNum type="arabicPeriod"/>
-            </a:pPr>
-            <a:r>
-              <a:rPr b="1"/>
-              <a:t>What inputs were varied?</a:t>
-            </a:r>
-            <a:r>
-              <a:rPr/>
-              <a:t> Different scope → different results</a:t>
-            </a:r>
-          </a:p>
-          <a:p>
-            <a:pPr lvl="0" indent="-342900" marL="342900">
-              <a:buAutoNum type="arabicPeriod"/>
-            </a:pPr>
-            <a:r>
-              <a:rPr b="1"/>
-              <a:t>What distributions were assumed?</a:t>
-            </a:r>
-            <a:r>
-              <a:rPr/>
-              <a:t> Change the distribution, change the indices</a:t>
-            </a:r>
-          </a:p>
-          <a:p>
-            <a:pPr lvl="0" indent="-342900" marL="342900">
-              <a:buAutoNum type="arabicPeriod"/>
-            </a:pPr>
-            <a:r>
-              <a:rPr b="1"/>
-              <a:t>Are the results converged?</a:t>
-            </a:r>
-            <a:r>
-              <a:rPr/>
-              <a:t> Finite samples give estimates, not exact values</a:t>
-            </a:r>
-          </a:p>
-        </p:txBody>
-      </p:sp>
-    </p:spTree>
-  </p:cSld>
-</p:sld>
-</file>
-
-<file path=ppt/slides/slide18.xml><?xml version="1.0" encoding="utf-8"?>
-<p:sld xmlns:a="http://schemas.openxmlformats.org/drawingml/2006/main" xmlns:r="http://schemas.openxmlformats.org/officeDocument/2006/relationships" xmlns:p="http://schemas.openxmlformats.org/presentationml/2006/main">
-  <p:cSld>
-    <p:spTree>
-      <p:nvGrpSpPr>
-        <p:cNvPr id="1" name=""/>
-        <p:cNvGrpSpPr/>
-        <p:nvPr/>
-      </p:nvGrpSpPr>
-      <p:grpSpPr>
-        <a:xfrm>
-          <a:off x="0" y="0"/>
-          <a:ext cx="0" cy="0"/>
-          <a:chOff x="0" y="0"/>
-          <a:chExt cx="0" cy="0"/>
-        </a:xfrm>
-      </p:grpSpPr>
-      <p:sp>
-        <p:nvSpPr>
-          <p:cNvPr id="2" name="Title 1"/>
-          <p:cNvSpPr>
-            <a:spLocks noGrp="1"/>
-          </p:cNvSpPr>
-          <p:nvPr>
-            <p:ph type="title"/>
-          </p:nvPr>
-        </p:nvSpPr>
-        <p:spPr/>
-        <p:txBody>
-          <a:bodyPr/>
-          <a:lstStyle/>
-          <a:p>
-            <a:pPr lvl="0" indent="0" marL="0">
-              <a:buNone/>
-            </a:pPr>
-            <a:r>
-              <a:rPr/>
-              <a:t>The Distribution Assumption</a:t>
-            </a:r>
-          </a:p>
-        </p:txBody>
-      </p:sp>
-      <mc:AlternateContent xmlns:mc="http://schemas.openxmlformats.org/markup-compatibility/2006">
-        <mc:Choice xmlns:a14="http://schemas.microsoft.com/office/drawing/2010/main" Requires="a14">
-          <p:sp>
-            <p:nvSpPr>
-              <p:cNvPr id="3" name="Content Placeholder 2"/>
-              <p:cNvSpPr>
-                <a:spLocks noGrp="1"/>
-              </p:cNvSpPr>
-              <p:nvPr>
-                <p:ph idx="1"/>
-              </p:nvPr>
-            </p:nvSpPr>
-            <p:spPr/>
-            <p:txBody>
-              <a:bodyPr/>
-              <a:lstStyle/>
-              <a:p>
-                <a:pPr lvl="0" indent="0" marL="0">
-                  <a:buNone/>
-                </a:pPr>
-                <a:r>
-                  <a:rPr b="1"/>
-                  <a:t>Every GSA calculation requires a probability distribution</a:t>
-                </a:r>
-                <a:r>
-                  <a:rPr/>
-                  <a:t> </a:t>
-                </a:r>
-                <a14:m>
-                  <m:oMath xmlns:m="http://schemas.openxmlformats.org/officeDocument/2006/math">
-                    <m:r>
-                      <m:t>p</m:t>
-                    </m:r>
-                    <m:d>
-                      <m:dPr>
-                        <m:begChr m:val="("/>
-                        <m:sepChr m:val=""/>
-                        <m:endChr m:val=")"/>
-                        <m:grow/>
-                      </m:dPr>
-                      <m:e>
-                        <m:sSub>
-                          <m:e>
-                            <m:r>
-                              <m:t>X</m:t>
-                            </m:r>
-                          </m:e>
-                          <m:sub>
-                            <m:r>
-                              <m:t>1</m:t>
-                            </m:r>
-                          </m:sub>
-                        </m:sSub>
-                        <m:r>
-                          <m:rPr>
-                            <m:sty m:val="p"/>
-                          </m:rPr>
-                          <m:t>,</m:t>
-                        </m:r>
-                        <m:r>
-                          <m:rPr>
-                            <m:sty m:val="p"/>
-                          </m:rPr>
-                          <m:t>…</m:t>
-                        </m:r>
-                        <m:r>
-                          <m:rPr>
-                            <m:sty m:val="p"/>
-                          </m:rPr>
-                          <m:t>,</m:t>
-                        </m:r>
-                        <m:sSub>
-                          <m:e>
-                            <m:r>
-                              <m:t>X</m:t>
-                            </m:r>
-                          </m:e>
-                          <m:sub>
-                            <m:r>
-                              <m:t>M</m:t>
-                            </m:r>
-                          </m:sub>
-                        </m:sSub>
-                      </m:e>
-                    </m:d>
-                  </m:oMath>
-                </a14:m>
-                <a:r>
-                  <a:rPr/>
-                  <a:t>.</a:t>
-                </a:r>
-              </a:p>
-              <a:p>
-                <a:pPr lvl="0" indent="0" marL="0">
-                  <a:buNone/>
-                </a:pPr>
-                <a14:m>
-                  <m:oMath xmlns:m="http://schemas.openxmlformats.org/officeDocument/2006/math">
-                    <m:r>
-                      <m:rPr>
-                        <m:nor/>
-                        <m:sty m:val="p"/>
-                      </m:rPr>
-                      <m:t>Uniform</m:t>
-                    </m:r>
-                    <m:d>
-                      <m:dPr>
-                        <m:begChr m:val="("/>
-                        <m:sepChr m:val=""/>
-                        <m:endChr m:val=")"/>
-                        <m:grow/>
-                      </m:dPr>
-                      <m:e>
-                        <m:r>
-                          <m:rPr>
-                            <m:sty m:val="p"/>
-                          </m:rPr>
-                          <m:t>−</m:t>
-                        </m:r>
-                        <m:r>
-                          <m:t>π</m:t>
-                        </m:r>
-                        <m:r>
-                          <m:rPr>
-                            <m:sty m:val="p"/>
-                          </m:rPr>
-                          <m:t>,</m:t>
-                        </m:r>
-                        <m:r>
-                          <m:t>π</m:t>
-                        </m:r>
-                      </m:e>
-                    </m:d>
-                  </m:oMath>
-                </a14:m>
-                <a:r>
-                  <a:rPr/>
-                  <a:t> gives different Sobol indices than </a:t>
-                </a:r>
-                <a14:m>
-                  <m:oMath xmlns:m="http://schemas.openxmlformats.org/officeDocument/2006/math">
-                    <m:r>
-                      <m:rPr>
-                        <m:nor/>
-                        <m:sty m:val="p"/>
-                      </m:rPr>
-                      <m:t>Normal</m:t>
-                    </m:r>
-                    <m:d>
-                      <m:dPr>
-                        <m:begChr m:val="("/>
-                        <m:sepChr m:val=""/>
-                        <m:endChr m:val=")"/>
-                        <m:grow/>
-                      </m:dPr>
-                      <m:e>
-                        <m:r>
-                          <m:t>0</m:t>
-                        </m:r>
-                        <m:r>
-                          <m:rPr>
-                            <m:sty m:val="p"/>
-                          </m:rPr>
-                          <m:t>,</m:t>
-                        </m:r>
-                        <m:r>
-                          <m:t>0.1</m:t>
-                        </m:r>
-                      </m:e>
-                    </m:d>
-                  </m:oMath>
-                </a14:m>
-                <a:r>
-                  <a:rPr/>
-                  <a:t>.</a:t>
-                </a:r>
-              </a:p>
-              <a:p>
-                <a:pPr lvl="0" indent="0" marL="1270000">
-                  <a:buNone/>
-                </a:pPr>
-                <a:r>
-                  <a:rPr sz="2000"/>
-                  <a:t>“The definition of the input variability space is one of the most delicate steps in the application of GSA.” — Pianosi et al. (2016)</a:t>
-                </a:r>
-              </a:p>
-            </p:txBody>
-          </p:sp>
-        </mc:Choice>
-      </mc:AlternateContent>
-    </p:spTree>
-  </p:cSld>
-</p:sld>
-</file>
-
-<file path=ppt/slides/slide19.xml><?xml version="1.0" encoding="utf-8"?>
-<p:sld xmlns:a="http://schemas.openxmlformats.org/drawingml/2006/main" xmlns:r="http://schemas.openxmlformats.org/officeDocument/2006/relationships" xmlns:p="http://schemas.openxmlformats.org/presentationml/2006/main">
-  <p:cSld>
-    <p:spTree>
-      <p:nvGrpSpPr>
-        <p:cNvPr id="1" name=""/>
-        <p:cNvGrpSpPr/>
-        <p:nvPr/>
-      </p:nvGrpSpPr>
-      <p:grpSpPr>
-        <a:xfrm>
-          <a:off x="0" y="0"/>
-          <a:ext cx="0" cy="0"/>
-          <a:chOff x="0" y="0"/>
-          <a:chExt cx="0" cy="0"/>
-        </a:xfrm>
-      </p:grpSpPr>
-      <p:sp>
-        <p:nvSpPr>
-          <p:cNvPr id="2" name="Title 1"/>
-          <p:cNvSpPr>
-            <a:spLocks noGrp="1"/>
-          </p:cNvSpPr>
-          <p:nvPr>
-            <p:ph type="title"/>
-          </p:nvPr>
-        </p:nvSpPr>
-        <p:spPr/>
-        <p:txBody>
-          <a:bodyPr/>
-          <a:lstStyle/>
-          <a:p>
-            <a:pPr lvl="0" indent="0" marL="0">
-              <a:buNone/>
-            </a:pPr>
-            <a:r>
-              <a:rPr/>
-              <a:t>Summary</a:t>
-            </a:r>
-          </a:p>
-        </p:txBody>
-      </p:sp>
-      <p:sp>
-        <p:nvSpPr>
-          <p:cNvPr id="3" name="Content Placeholder 2"/>
-          <p:cNvSpPr>
-            <a:spLocks noGrp="1"/>
-          </p:cNvSpPr>
-          <p:nvPr>
-            <p:ph idx="1"/>
-          </p:nvPr>
-        </p:nvSpPr>
-        <p:spPr/>
-        <p:txBody>
-          <a:bodyPr/>
-          <a:lstStyle/>
-          <a:p>
-            <a:pPr lvl="0"/>
-            <a:r>
-              <a:rPr b="1"/>
-              <a:t>VOI</a:t>
-            </a:r>
-            <a:r>
-              <a:rPr/>
-              <a:t>: which uncertainty affects the </a:t>
-            </a:r>
-            <a:r>
-              <a:rPr b="1"/>
-              <a:t>decision</a:t>
-            </a:r>
-            <a:r>
-              <a:rPr/>
-              <a:t>?</a:t>
-            </a:r>
-          </a:p>
-          <a:p>
-            <a:pPr lvl="0"/>
-            <a:r>
-              <a:rPr b="1"/>
-              <a:t>GSA</a:t>
-            </a:r>
-            <a:r>
-              <a:rPr/>
-              <a:t>: which uncertainty affects the </a:t>
-            </a:r>
-            <a:r>
-              <a:rPr b="1"/>
-              <a:t>output</a:t>
-            </a:r>
-            <a:r>
-              <a:rPr/>
-              <a:t>?</a:t>
-            </a:r>
-          </a:p>
-          <a:p>
-            <a:pPr lvl="0"/>
-            <a:r>
-              <a:rPr/>
-              <a:t>These are </a:t>
-            </a:r>
-            <a:r>
-              <a:rPr b="1"/>
-              <a:t>not the same</a:t>
-            </a:r>
-            <a:r>
-              <a:rPr/>
-              <a:t> — answers can disagree</a:t>
-            </a:r>
-          </a:p>
-          <a:p>
-            <a:pPr lvl="0"/>
-            <a:r>
-              <a:rPr/>
-              <a:t>Both require </a:t>
-            </a:r>
-            <a:r>
-              <a:rPr b="1"/>
-              <a:t>probability distributions</a:t>
-            </a:r>
-            <a:r>
-              <a:rPr/>
-              <a:t> over inputs</a:t>
-            </a:r>
-          </a:p>
-          <a:p>
-            <a:pPr lvl="0"/>
-            <a:r>
-              <a:rPr/>
-              <a:t>When you can’t specify distributions → </a:t>
-            </a:r>
-            <a:r>
-              <a:rPr b="1"/>
-              <a:t>deep uncertainty</a:t>
-            </a:r>
-            <a:r>
-              <a:rPr/>
-              <a:t> (Week 8)</a:t>
-            </a:r>
-          </a:p>
-        </p:txBody>
-      </p:sp>
-    </p:spTree>
-  </p:cSld>
-</p:sld>
-</file>
-
-<file path=ppt/slides/slide2.xml><?xml version="1.0" encoding="utf-8"?>
-<p:sld xmlns:a="http://schemas.openxmlformats.org/drawingml/2006/main" xmlns:r="http://schemas.openxmlformats.org/officeDocument/2006/relationships" xmlns:p="http://schemas.openxmlformats.org/presentationml/2006/main">
-  <p:cSld>
-    <p:spTree>
-      <p:nvGrpSpPr>
-        <p:cNvPr id="1" name=""/>
-        <p:cNvGrpSpPr/>
-        <p:nvPr/>
-      </p:nvGrpSpPr>
-      <p:grpSpPr>
-        <a:xfrm>
-          <a:off x="0" y="0"/>
-          <a:ext cx="0" cy="0"/>
-          <a:chOff x="0" y="0"/>
-          <a:chExt cx="0" cy="0"/>
-        </a:xfrm>
-      </p:grpSpPr>
-      <p:sp>
-        <p:nvSpPr>
-          <p:cNvPr id="3" name="Content Placeholder 2"/>
-          <p:cNvSpPr>
-            <a:spLocks noGrp="1"/>
-          </p:cNvSpPr>
-          <p:nvPr>
-            <p:ph idx="1"/>
-          </p:nvPr>
-        </p:nvSpPr>
-        <p:spPr/>
-        <p:txBody>
-          <a:bodyPr/>
-          <a:lstStyle/>
-          <a:p>
-            <a:pPr lvl="0" indent="0" marL="0">
-              <a:buNone/>
-            </a:pPr>
-            <a:r>
-              <a:rPr b="1"/>
-              <a:t>Draft Material:</a:t>
-            </a:r>
-            <a:r>
-              <a:rPr/>
-              <a:t> This content is under development and subject to change.</a:t>
-            </a:r>
-          </a:p>
-        </p:txBody>
-      </p:sp>
-    </p:spTree>
-  </p:cSld>
-</p:sld>
-</file>
-
-<file path=ppt/slides/slide20.xml><?xml version="1.0" encoding="utf-8"?>
-<p:sld xmlns:a="http://schemas.openxmlformats.org/drawingml/2006/main" xmlns:r="http://schemas.openxmlformats.org/officeDocument/2006/relationships" xmlns:p="http://schemas.openxmlformats.org/presentationml/2006/main">
-  <p:cSld>
-    <p:spTree>
-      <p:nvGrpSpPr>
-        <p:cNvPr id="1" name=""/>
-        <p:cNvGrpSpPr/>
-        <p:nvPr/>
-      </p:nvGrpSpPr>
-      <p:grpSpPr>
-        <a:xfrm>
-          <a:off x="0" y="0"/>
-          <a:ext cx="0" cy="0"/>
-          <a:chOff x="0" y="0"/>
-          <a:chExt cx="0" cy="0"/>
-        </a:xfrm>
-      </p:grpSpPr>
-      <p:sp>
-        <p:nvSpPr>
-          <p:cNvPr id="2" name="Title 1"/>
-          <p:cNvSpPr>
-            <a:spLocks noGrp="1"/>
-          </p:cNvSpPr>
-          <p:nvPr>
-            <p:ph type="title"/>
-          </p:nvPr>
-        </p:nvSpPr>
-        <p:spPr/>
-        <p:txBody>
-          <a:bodyPr/>
-          <a:lstStyle/>
-          <a:p>
-            <a:pPr lvl="0" indent="0" marL="0">
-              <a:buNone/>
-            </a:pPr>
-            <a:r>
-              <a:rPr/>
-              <a:t>References</a:t>
-            </a:r>
-          </a:p>
-        </p:txBody>
-      </p:sp>
-      <p:sp>
-        <p:nvSpPr>
-          <p:cNvPr id="3" name="Content Placeholder 2"/>
-          <p:cNvSpPr>
-            <a:spLocks noGrp="1"/>
-          </p:cNvSpPr>
-          <p:nvPr>
-            <p:ph idx="1"/>
-          </p:nvPr>
-        </p:nvSpPr>
-        <p:spPr/>
-        <p:txBody>
-          <a:bodyPr/>
-          <a:lstStyle/>
-          <a:p>
-            <a:pPr lvl="0" indent="0" marL="0">
-              <a:buNone/>
-            </a:pPr>
-            <a:r>
-              <a:rPr/>
-              <a:t>Pianosi, Francesca, Keith Beven, Jim Freer, Jim W. Hall, Jonathan Rougier, David B. Stephenson, and Thorsten Wagener. 2016. “Sensitivity Analysis of Environmental Models: A Systematic Review with Practical Workflow.” </a:t>
-            </a:r>
-            <a:r>
-              <a:rPr i="1"/>
-              <a:t>Environmental Modelling &amp; Software</a:t>
-            </a:r>
-            <a:r>
-              <a:rPr/>
-              <a:t> 79 (May): 214–32. </a:t>
-            </a:r>
-            <a:r>
-              <a:rPr>
-                <a:hlinkClick r:id="rId2"/>
-              </a:rPr>
-              <a:t>https://doi.org/10/f8n6zw</a:t>
-            </a:r>
-            <a:r>
-              <a:rPr/>
-              <a:t>.</a:t>
-            </a:r>
-          </a:p>
-          <a:p>
-            <a:pPr lvl="0" indent="0" marL="0">
-              <a:buNone/>
-            </a:pPr>
-            <a:r>
-              <a:rPr/>
-              <a:t>Reed, Patrick M., Antonia Hadjimichael, Keyvan Malek, Tina Karimi, Chris R. Vernon, Vivek Srikrishnan, Rohini S. Gupta, et al. 2022. </a:t>
-            </a:r>
-            <a:r>
-              <a:rPr i="1"/>
-              <a:t>Addressing Uncertainty in Multisector Dynamics Research</a:t>
-            </a:r>
-            <a:r>
-              <a:rPr/>
-              <a:t>. Zenodo. </a:t>
-            </a:r>
-            <a:r>
-              <a:rPr>
-                <a:hlinkClick r:id="rId3"/>
-              </a:rPr>
-              <a:t>https://doi.org/10.5281/zenodo.6110623</a:t>
-            </a:r>
-            <a:r>
-              <a:rPr/>
-              <a:t>.</a:t>
-            </a:r>
-          </a:p>
-          <a:p>
-            <a:pPr lvl="0" indent="0" marL="0">
-              <a:buNone/>
-            </a:pPr>
-            <a:r>
-              <a:rPr/>
-              <a:t>Saltelli, Andrea, Marco Ratto, Terry Andres, Francesca Campolongo, Jessica Cariboni, Debora Gatelli, Michaela Saisana, and Stefano Tarantola. 2008. </a:t>
-            </a:r>
-            <a:r>
-              <a:rPr i="1"/>
-              <a:t>Global Sensitivity Analysis: The Primer</a:t>
-            </a:r>
-            <a:r>
-              <a:rPr/>
-              <a:t>. John Wiley &amp; Sons, Ltd. </a:t>
-            </a:r>
-            <a:r>
-              <a:rPr>
-                <a:hlinkClick r:id="rId4"/>
-              </a:rPr>
-              <a:t>http://onlinelibrary.wiley.com/doi/abs/10.1002/9780470725184.ch1</a:t>
-            </a:r>
-            <a:r>
-              <a:rPr/>
-              <a:t>.</a:t>
-            </a:r>
-          </a:p>
-        </p:txBody>
-      </p:sp>
-    </p:spTree>
-  </p:cSld>
-</p:sld>
-</file>
-
-<file path=ppt/slides/slide3.xml><?xml version="1.0" encoding="utf-8"?>
-<p:sld xmlns:a="http://schemas.openxmlformats.org/drawingml/2006/main" xmlns:r="http://schemas.openxmlformats.org/officeDocument/2006/relationships" xmlns:p="http://schemas.openxmlformats.org/presentationml/2006/main">
-  <p:cSld>
-    <p:spTree>
-      <p:nvGrpSpPr>
-        <p:cNvPr id="1" name=""/>
-        <p:cNvGrpSpPr/>
-        <p:nvPr/>
-      </p:nvGrpSpPr>
-      <p:grpSpPr>
-        <a:xfrm>
-          <a:off x="0" y="0"/>
-          <a:ext cx="0" cy="0"/>
-          <a:chOff x="0" y="0"/>
-          <a:chExt cx="0" cy="0"/>
-        </a:xfrm>
-      </p:grpSpPr>
-      <p:sp>
-        <p:nvSpPr>
-          <p:cNvPr id="2" name="Title 1"/>
-          <p:cNvSpPr>
-            <a:spLocks noGrp="1"/>
-          </p:cNvSpPr>
-          <p:nvPr>
-            <p:ph type="title"/>
-          </p:nvPr>
-        </p:nvSpPr>
-        <p:spPr/>
-        <p:txBody>
-          <a:bodyPr/>
-          <a:lstStyle/>
-          <a:p>
-            <a:pPr lvl="0" indent="0" marL="0">
-              <a:buNone/>
-            </a:pPr>
-            <a:r>
-              <a:rPr/>
-              <a:t>Reading</a:t>
-            </a:r>
-          </a:p>
-        </p:txBody>
-      </p:sp>
-      <p:sp>
-        <p:nvSpPr>
-          <p:cNvPr id="3" name="Content Placeholder 2"/>
-          <p:cNvSpPr>
-            <a:spLocks noGrp="1"/>
-          </p:cNvSpPr>
-          <p:nvPr>
-            <p:ph idx="1"/>
-          </p:nvPr>
-        </p:nvSpPr>
-        <p:spPr/>
-        <p:txBody>
-          <a:bodyPr/>
-          <a:lstStyle/>
-          <a:p>
-            <a:pPr lvl="0"/>
-            <a:r>
-              <a:rPr>
-                <a:hlinkClick r:id="rId2"/>
-              </a:rPr>
-              <a:t>Sensitivity Analysis: The Basics</a:t>
-            </a:r>
-            <a:r>
-              <a:rPr/>
-              <a:t> from Reed et al. (2022)</a:t>
-            </a:r>
-          </a:p>
-          <a:p>
-            <a:pPr lvl="0"/>
-            <a:r>
-              <a:rPr/>
-              <a:t>Pianosi et al. (2016)</a:t>
-            </a:r>
-          </a:p>
-          <a:p>
-            <a:pPr lvl="0"/>
-            <a:r>
-              <a:rPr/>
-              <a:t>Saltelli et al. (2008)</a:t>
-            </a:r>
-          </a:p>
-        </p:txBody>
-      </p:sp>
-    </p:spTree>
-  </p:cSld>
-</p:sld>
-</file>
-
-<file path=ppt/slides/slide4.xml><?xml version="1.0" encoding="utf-8"?>
-<p:sld xmlns:a="http://schemas.openxmlformats.org/drawingml/2006/main" xmlns:r="http://schemas.openxmlformats.org/officeDocument/2006/relationships" xmlns:p="http://schemas.openxmlformats.org/presentationml/2006/main">
-  <p:cSld>
-    <p:spTree>
-      <p:nvGrpSpPr>
-        <p:cNvPr id="1" name=""/>
-        <p:cNvGrpSpPr/>
-        <p:nvPr/>
-      </p:nvGrpSpPr>
-      <p:grpSpPr>
-        <a:xfrm>
-          <a:off x="0" y="0"/>
-          <a:ext cx="0" cy="0"/>
-          <a:chOff x="0" y="0"/>
-          <a:chExt cx="0" cy="0"/>
-        </a:xfrm>
-      </p:grpSpPr>
-      <p:sp>
-        <p:nvSpPr>
-          <p:cNvPr id="2" name="Title 1"/>
-          <p:cNvSpPr>
-            <a:spLocks noGrp="1"/>
-          </p:cNvSpPr>
-          <p:nvPr>
-            <p:ph type="title"/>
-          </p:nvPr>
-        </p:nvSpPr>
-        <p:spPr/>
-        <p:txBody>
-          <a:bodyPr/>
-          <a:lstStyle/>
-          <a:p>
-            <a:pPr lvl="0" indent="0" marL="0">
-              <a:buNone/>
-            </a:pPr>
-            <a:r>
-              <a:rPr/>
-              <a:t>Two Questions About Uncertainty</a:t>
-            </a:r>
-          </a:p>
-        </p:txBody>
-      </p:sp>
-      <p:sp>
-        <p:nvSpPr>
-          <p:cNvPr id="3" name="Content Placeholder 2"/>
-          <p:cNvSpPr>
-            <a:spLocks noGrp="1"/>
-          </p:cNvSpPr>
-          <p:nvPr>
-            <p:ph idx="1"/>
-          </p:nvPr>
-        </p:nvSpPr>
-        <p:spPr/>
-        <p:txBody>
-          <a:bodyPr/>
-          <a:lstStyle/>
-          <a:p>
-            <a:pPr lvl="0"/>
-            <a:r>
-              <a:rPr b="1"/>
-              <a:t>VOI</a:t>
-            </a:r>
-            <a:r>
-              <a:rPr/>
-              <a:t>: Which uncertainty, if resolved, would most change my </a:t>
-            </a:r>
-            <a:r>
-              <a:rPr b="1"/>
-              <a:t>decision</a:t>
-            </a:r>
-            <a:r>
-              <a:rPr/>
-              <a:t>?</a:t>
-            </a:r>
-          </a:p>
-          <a:p>
-            <a:pPr lvl="0"/>
-            <a:r>
-              <a:rPr b="1"/>
-              <a:t>GSA</a:t>
-            </a:r>
-            <a:r>
-              <a:rPr/>
-              <a:t>: Which uncertainty contributes most to the variability in my </a:t>
-            </a:r>
-            <a:r>
-              <a:rPr b="1"/>
-              <a:t>output</a:t>
-            </a:r>
-            <a:r>
-              <a:rPr/>
-              <a:t>?</a:t>
-            </a:r>
-          </a:p>
-          <a:p>
-            <a:pPr lvl="0" indent="0" marL="0">
-              <a:buNone/>
-            </a:pPr>
-            <a:r>
-              <a:rPr/>
-              <a:t>These are </a:t>
-            </a:r>
-            <a:r>
-              <a:rPr b="1"/>
-              <a:t>not the same question</a:t>
-            </a:r>
-            <a:r>
-              <a:rPr/>
-              <a:t>, and the answers can disagree.</a:t>
-            </a:r>
-          </a:p>
-        </p:txBody>
-      </p:sp>
-    </p:spTree>
-  </p:cSld>
-</p:sld>
-</file>
-
-<file path=ppt/slides/slide5.xml><?xml version="1.0" encoding="utf-8"?>
-<p:sld xmlns:a="http://schemas.openxmlformats.org/drawingml/2006/main" xmlns:r="http://schemas.openxmlformats.org/officeDocument/2006/relationships" xmlns:p="http://schemas.openxmlformats.org/presentationml/2006/main">
-  <p:cSld>
-    <p:spTree>
-      <p:nvGrpSpPr>
-        <p:cNvPr id="1" name=""/>
-        <p:cNvGrpSpPr/>
-        <p:nvPr/>
-      </p:nvGrpSpPr>
-      <p:grpSpPr>
-        <a:xfrm>
-          <a:off x="0" y="0"/>
-          <a:ext cx="0" cy="0"/>
-          <a:chOff x="0" y="0"/>
-          <a:chExt cx="0" cy="0"/>
-        </a:xfrm>
-      </p:grpSpPr>
-      <p:sp>
-        <p:nvSpPr>
-          <p:cNvPr id="2" name="Title 1"/>
-          <p:cNvSpPr>
-            <a:spLocks noGrp="1"/>
-          </p:cNvSpPr>
-          <p:nvPr>
-            <p:ph type="title"/>
-          </p:nvPr>
-        </p:nvSpPr>
-        <p:spPr/>
-        <p:txBody>
-          <a:bodyPr/>
-          <a:lstStyle/>
-          <a:p>
-            <a:pPr lvl="0" indent="0" marL="0">
-              <a:buNone/>
-            </a:pPr>
-            <a:r>
-              <a:rPr/>
-              <a:t>What Is Sensitivity Analysis?</a:t>
-            </a:r>
-          </a:p>
-        </p:txBody>
-      </p:sp>
-      <mc:AlternateContent xmlns:mc="http://schemas.openxmlformats.org/markup-compatibility/2006">
-        <mc:Choice xmlns:a14="http://schemas.microsoft.com/office/drawing/2010/main" Requires="a14">
-          <p:sp>
-            <p:nvSpPr>
-              <p:cNvPr id="3" name="Content Placeholder 2"/>
-              <p:cNvSpPr>
-                <a:spLocks noGrp="1"/>
-              </p:cNvSpPr>
-              <p:nvPr>
-                <p:ph idx="1"/>
-              </p:nvPr>
-            </p:nvSpPr>
-            <p:spPr/>
-            <p:txBody>
-              <a:bodyPr/>
-              <a:lstStyle/>
-              <a:p>
-                <a:pPr lvl="0" indent="0" marL="0">
-                  <a:buNone/>
-                </a:pPr>
-                <a:r>
-                  <a:rPr/>
-                  <a:t>SA investigates how variation in a model’s output is attributed to variation in its inputs (Pianosi et al. 2016).</a:t>
-                </a:r>
-              </a:p>
-              <a:p>
-                <a:pPr lvl="0" indent="0" marL="0">
-                  <a:buNone/>
-                </a:pPr>
-                <a14:m>
-                  <m:oMathPara xmlns:m="http://schemas.openxmlformats.org/officeDocument/2006/math">
-                    <m:oMathParaPr>
-                      <m:jc m:val="center"/>
-                    </m:oMathParaPr>
-                    <m:oMath>
-                      <m:r>
-                        <m:t>Y</m:t>
-                      </m:r>
-                      <m:r>
-                        <m:rPr>
-                          <m:sty m:val="p"/>
-                        </m:rPr>
-                        <m:t>=</m:t>
-                      </m:r>
-                      <m:r>
-                        <m:t>g</m:t>
-                      </m:r>
-                      <m:d>
-                        <m:dPr>
-                          <m:begChr m:val="("/>
-                          <m:sepChr m:val=""/>
-                          <m:endChr m:val=")"/>
-                          <m:grow/>
-                        </m:dPr>
-                        <m:e>
-                          <m:sSub>
-                            <m:e>
-                              <m:r>
-                                <m:t>X</m:t>
-                              </m:r>
-                            </m:e>
-                            <m:sub>
-                              <m:r>
-                                <m:t>1</m:t>
-                              </m:r>
-                            </m:sub>
-                          </m:sSub>
-                          <m:r>
-                            <m:rPr>
-                              <m:sty m:val="p"/>
-                            </m:rPr>
-                            <m:t>,</m:t>
-                          </m:r>
-                          <m:sSub>
-                            <m:e>
-                              <m:r>
-                                <m:t>X</m:t>
-                              </m:r>
-                            </m:e>
-                            <m:sub>
-                              <m:r>
-                                <m:t>2</m:t>
-                              </m:r>
-                            </m:sub>
-                          </m:sSub>
-                          <m:r>
-                            <m:rPr>
-                              <m:sty m:val="p"/>
-                            </m:rPr>
-                            <m:t>,</m:t>
-                          </m:r>
-                          <m:r>
-                            <m:rPr>
-                              <m:sty m:val="p"/>
-                            </m:rPr>
-                            <m:t>…</m:t>
-                          </m:r>
-                          <m:r>
-                            <m:rPr>
-                              <m:sty m:val="p"/>
-                            </m:rPr>
-                            <m:t>,</m:t>
-                          </m:r>
-                          <m:sSub>
-                            <m:e>
-                              <m:r>
-                                <m:t>X</m:t>
-                              </m:r>
-                            </m:e>
-                            <m:sub>
-                              <m:r>
-                                <m:t>M</m:t>
-                              </m:r>
-                            </m:sub>
-                          </m:sSub>
-                        </m:e>
-                      </m:d>
-                    </m:oMath>
-                  </m:oMathPara>
-                </a14:m>
-              </a:p>
-              <a:p>
-                <a:pPr lvl="0"/>
-                <a:r>
-                  <a:rPr/>
-                  <a:t>Which inputs cause the largest variation in </a:t>
-                </a:r>
-                <a14:m>
-                  <m:oMath xmlns:m="http://schemas.openxmlformats.org/officeDocument/2006/math">
-                    <m:r>
-                      <m:t>Y</m:t>
-                    </m:r>
-                  </m:oMath>
-                </a14:m>
-                <a:r>
-                  <a:rPr/>
-                  <a:t>?</a:t>
-                </a:r>
-              </a:p>
-              <a:p>
-                <a:pPr lvl="0"/>
-                <a:r>
-                  <a:rPr/>
-                  <a:t>Are there inputs whose variability has negligible effect?</a:t>
-                </a:r>
-              </a:p>
-              <a:p>
-                <a:pPr lvl="0"/>
-                <a:r>
-                  <a:rPr/>
-                  <a:t>Are there </a:t>
-                </a:r>
-                <a:r>
-                  <a:rPr b="1"/>
-                  <a:t>interactions</a:t>
-                </a:r>
-                <a:r>
-                  <a:rPr/>
-                  <a:t> between inputs?</a:t>
-                </a:r>
-              </a:p>
-            </p:txBody>
-          </p:sp>
-        </mc:Choice>
-      </mc:AlternateContent>
-    </p:spTree>
-  </p:cSld>
-</p:sld>
-</file>
-
-<file path=ppt/slides/slide6.xml><?xml version="1.0" encoding="utf-8"?>
-<p:sld xmlns:a="http://schemas.openxmlformats.org/drawingml/2006/main" xmlns:r="http://schemas.openxmlformats.org/officeDocument/2006/relationships" xmlns:p="http://schemas.openxmlformats.org/presentationml/2006/main">
-  <p:cSld>
-    <p:spTree>
-      <p:nvGrpSpPr>
-        <p:cNvPr id="1" name=""/>
-        <p:cNvGrpSpPr/>
-        <p:nvPr/>
-      </p:nvGrpSpPr>
-      <p:grpSpPr>
-        <a:xfrm>
-          <a:off x="0" y="0"/>
-          <a:ext cx="0" cy="0"/>
-          <a:chOff x="0" y="0"/>
-          <a:chExt cx="0" cy="0"/>
-        </a:xfrm>
-      </p:grpSpPr>
-      <p:sp>
-        <p:nvSpPr>
-          <p:cNvPr id="2" name="Title 1"/>
-          <p:cNvSpPr>
-            <a:spLocks noGrp="1"/>
-          </p:cNvSpPr>
-          <p:nvPr>
-            <p:ph type="title"/>
-          </p:nvPr>
-        </p:nvSpPr>
-        <p:spPr/>
-        <p:txBody>
-          <a:bodyPr/>
-          <a:lstStyle/>
-          <a:p>
-            <a:pPr lvl="0" indent="0" marL="0">
-              <a:buNone/>
-            </a:pPr>
-            <a:r>
-              <a:rPr/>
-              <a:t>Three Purposes of SA</a:t>
-            </a:r>
-          </a:p>
-        </p:txBody>
-      </p:sp>
-      <p:sp>
-        <p:nvSpPr>
-          <p:cNvPr id="3" name="Content Placeholder 2"/>
-          <p:cNvSpPr>
-            <a:spLocks noGrp="1"/>
-          </p:cNvSpPr>
-          <p:nvPr>
-            <p:ph idx="1"/>
-          </p:nvPr>
-        </p:nvSpPr>
-        <p:spPr/>
-        <p:txBody>
-          <a:bodyPr/>
-          <a:lstStyle/>
-          <a:p>
-            <a:pPr lvl="0" indent="-342900" marL="342900">
-              <a:buAutoNum type="arabicPeriod"/>
-            </a:pPr>
-            <a:r>
-              <a:rPr b="1"/>
-              <a:t>Screening</a:t>
-            </a:r>
-            <a:r>
-              <a:rPr/>
-              <a:t> (factor fixing): which inputs can I safely ignore?</a:t>
-            </a:r>
-          </a:p>
-          <a:p>
-            <a:pPr lvl="0" indent="-342900" marL="342900">
-              <a:buAutoNum type="arabicPeriod"/>
-            </a:pPr>
-            <a:r>
-              <a:rPr b="1"/>
-              <a:t>Ranking</a:t>
-            </a:r>
-            <a:r>
-              <a:rPr/>
-              <a:t> (factor prioritization): which input matters most?</a:t>
-            </a:r>
-          </a:p>
-          <a:p>
-            <a:pPr lvl="0" indent="-342900" marL="342900">
-              <a:buAutoNum type="arabicPeriod"/>
-            </a:pPr>
-            <a:r>
-              <a:rPr b="1"/>
-              <a:t>Mapping</a:t>
-            </a:r>
-            <a:r>
-              <a:rPr/>
-              <a:t>: what input combinations produce extreme outputs?</a:t>
-            </a:r>
-          </a:p>
-          <a:p>
-            <a:pPr lvl="0" indent="0" marL="0">
-              <a:buNone/>
-            </a:pPr>
-            <a:r>
-              <a:rPr/>
-              <a:t>Typical workflow: screen → rank → map.</a:t>
-            </a:r>
-          </a:p>
-        </p:txBody>
-      </p:sp>
-    </p:spTree>
-  </p:cSld>
-</p:sld>
-</file>
-
-<file path=ppt/slides/slide7.xml><?xml version="1.0" encoding="utf-8"?>
-<p:sld xmlns:a="http://schemas.openxmlformats.org/drawingml/2006/main" xmlns:r="http://schemas.openxmlformats.org/officeDocument/2006/relationships" xmlns:p="http://schemas.openxmlformats.org/presentationml/2006/main">
-  <p:cSld>
-    <p:spTree>
-      <p:nvGrpSpPr>
-        <p:cNvPr id="1" name=""/>
-        <p:cNvGrpSpPr/>
-        <p:nvPr/>
-      </p:nvGrpSpPr>
-      <p:grpSpPr>
-        <a:xfrm>
-          <a:off x="0" y="0"/>
-          <a:ext cx="0" cy="0"/>
-          <a:chOff x="0" y="0"/>
-          <a:chExt cx="0" cy="0"/>
-        </a:xfrm>
-      </p:grpSpPr>
-      <p:sp>
-        <p:nvSpPr>
-          <p:cNvPr id="2" name="Title 1"/>
-          <p:cNvSpPr>
-            <a:spLocks noGrp="1"/>
-          </p:cNvSpPr>
-          <p:nvPr>
-            <p:ph type="title"/>
-          </p:nvPr>
-        </p:nvSpPr>
-        <p:spPr/>
-        <p:txBody>
-          <a:bodyPr/>
-          <a:lstStyle/>
-          <a:p>
-            <a:pPr lvl="0" indent="0" marL="0">
-              <a:buNone/>
-            </a:pPr>
-            <a:r>
-              <a:rPr/>
-              <a:t>Local Sensitivity: One-at-a-Time</a:t>
-            </a:r>
-          </a:p>
-        </p:txBody>
-      </p:sp>
-      <mc:AlternateContent xmlns:mc="http://schemas.openxmlformats.org/markup-compatibility/2006">
-        <mc:Choice xmlns:a14="http://schemas.microsoft.com/office/drawing/2010/main" Requires="a14">
-          <p:sp>
-            <p:nvSpPr>
-              <p:cNvPr id="3" name="Content Placeholder 2"/>
-              <p:cNvSpPr>
-                <a:spLocks noGrp="1"/>
-              </p:cNvSpPr>
-              <p:nvPr>
-                <p:ph idx="1"/>
-              </p:nvPr>
-            </p:nvSpPr>
-            <p:spPr/>
-            <p:txBody>
-              <a:bodyPr/>
-              <a:lstStyle/>
-              <a:p>
-                <a:pPr lvl="0" indent="0" marL="0">
-                  <a:buNone/>
-                </a:pPr>
-                <a:r>
-                  <a:rPr/>
-                  <a:t>Vary one input at a baseline </a:t>
-                </a:r>
-                <a14:m>
-                  <m:oMath xmlns:m="http://schemas.openxmlformats.org/officeDocument/2006/math">
-                    <m:acc>
-                      <m:accPr>
-                        <m:chr m:val="‾"/>
-                      </m:accPr>
-                      <m:e>
-                        <m:r>
-                          <m:rPr>
-                            <m:sty m:val="b"/>
-                          </m:rPr>
-                          <m:t>x</m:t>
-                        </m:r>
-                      </m:e>
-                    </m:acc>
-                  </m:oMath>
-                </a14:m>
-                <a:r>
-                  <a:rPr/>
-                  <a:t>, hold all others fixed:</a:t>
-                </a:r>
-              </a:p>
-              <a:p>
-                <a:pPr lvl="0" indent="0" marL="0">
-                  <a:buNone/>
-                </a:pPr>
-                <a14:m>
-                  <m:oMathPara xmlns:m="http://schemas.openxmlformats.org/officeDocument/2006/math">
-                    <m:oMathParaPr>
-                      <m:jc m:val="center"/>
-                    </m:oMathParaPr>
-                    <m:oMath>
-                      <m:sSubSup>
-                        <m:e>
-                          <m:r>
-                            <m:t>S</m:t>
-                          </m:r>
-                        </m:e>
-                        <m:sub>
-                          <m:r>
-                            <m:t>i</m:t>
-                          </m:r>
-                        </m:sub>
-                        <m:sup>
-                          <m:r>
-                            <m:rPr>
-                              <m:nor/>
-                              <m:sty m:val="p"/>
-                            </m:rPr>
-                            <m:t>local</m:t>
-                          </m:r>
-                        </m:sup>
-                      </m:sSubSup>
-                      <m:r>
-                        <m:rPr>
-                          <m:sty m:val="p"/>
-                        </m:rPr>
-                        <m:t>≈</m:t>
-                      </m:r>
-                      <m:f>
-                        <m:fPr>
-                          <m:type m:val="bar"/>
-                        </m:fPr>
-                        <m:num>
-                          <m:r>
-                            <m:rPr>
-                              <m:sty m:val="p"/>
-                            </m:rPr>
-                            <m:t>∂</m:t>
-                          </m:r>
-                          <m:r>
-                            <m:t>g</m:t>
-                          </m:r>
-                        </m:num>
-                        <m:den>
-                          <m:r>
-                            <m:rPr>
-                              <m:sty m:val="p"/>
-                            </m:rPr>
-                            <m:t>∂</m:t>
-                          </m:r>
-                          <m:sSub>
-                            <m:e>
-                              <m:r>
-                                <m:t>x</m:t>
-                              </m:r>
-                            </m:e>
-                            <m:sub>
-                              <m:r>
-                                <m:t>i</m:t>
-                              </m:r>
-                            </m:sub>
-                          </m:sSub>
-                        </m:den>
-                      </m:f>
-                      <m:sSub>
-                        <m:e>
-                          <m:r>
-                            <m:rPr>
-                              <m:sty m:val="p"/>
-                            </m:rPr>
-                            <m:t>|</m:t>
-                          </m:r>
-                        </m:e>
-                        <m:sub>
-                          <m:r>
-                            <m:rPr>
-                              <m:sty m:val="b"/>
-                            </m:rPr>
-                            <m:t>x</m:t>
-                          </m:r>
-                          <m:r>
-                            <m:rPr>
-                              <m:sty m:val="p"/>
-                            </m:rPr>
-                            <m:t>=</m:t>
-                          </m:r>
-                          <m:acc>
-                            <m:accPr>
-                              <m:chr m:val="‾"/>
-                            </m:accPr>
-                            <m:e>
-                              <m:r>
-                                <m:rPr>
-                                  <m:sty m:val="b"/>
-                                </m:rPr>
-                                <m:t>x</m:t>
-                              </m:r>
-                            </m:e>
-                          </m:acc>
-                        </m:sub>
-                      </m:sSub>
-                    </m:oMath>
-                  </m:oMathPara>
-                </a14:m>
-              </a:p>
-              <a:p>
-                <a:pPr lvl="0" indent="0" marL="0">
-                  <a:buNone/>
-                </a:pPr>
-                <a:r>
-                  <a:rPr/>
-                  <a:t>Approximate with a finite difference (</a:t>
-                </a:r>
-                <a14:m>
-                  <m:oMath xmlns:m="http://schemas.openxmlformats.org/officeDocument/2006/math">
-                    <m:r>
-                      <m:t>M</m:t>
-                    </m:r>
-                    <m:r>
-                      <m:rPr>
-                        <m:sty m:val="p"/>
-                      </m:rPr>
-                      <m:t>+</m:t>
-                    </m:r>
-                    <m:r>
-                      <m:t>1</m:t>
-                    </m:r>
-                  </m:oMath>
-                </a14:m>
-                <a:r>
-                  <a:rPr/>
-                  <a:t> evaluations):</a:t>
-                </a:r>
-              </a:p>
-              <a:p>
-                <a:pPr lvl="0" indent="0" marL="0">
-                  <a:buNone/>
-                </a:pPr>
-                <a14:m>
-                  <m:oMathPara xmlns:m="http://schemas.openxmlformats.org/officeDocument/2006/math">
-                    <m:oMathParaPr>
-                      <m:jc m:val="center"/>
-                    </m:oMathParaPr>
-                    <m:oMath>
-                      <m:sSub>
-                        <m:e>
-                          <m:acc>
-                            <m:accPr>
-                              <m:chr m:val="̂"/>
-                            </m:accPr>
-                            <m:e>
-                              <m:r>
-                                <m:t>S</m:t>
-                              </m:r>
-                            </m:e>
-                          </m:acc>
-                        </m:e>
-                        <m:sub>
-                          <m:r>
-                            <m:t>i</m:t>
-                          </m:r>
-                        </m:sub>
-                      </m:sSub>
-                      <m:r>
-                        <m:rPr>
-                          <m:sty m:val="p"/>
-                        </m:rPr>
-                        <m:t>=</m:t>
-                      </m:r>
-                      <m:f>
-                        <m:fPr>
-                          <m:type m:val="bar"/>
-                        </m:fPr>
-                        <m:num>
-                          <m:r>
-                            <m:t>g</m:t>
-                          </m:r>
-                          <m:d>
-                            <m:dPr>
-                              <m:begChr m:val="("/>
-                              <m:sepChr m:val=""/>
-                              <m:endChr m:val=")"/>
-                              <m:grow/>
-                            </m:dPr>
-                            <m:e>
-                              <m:sSub>
-                                <m:e>
-                                  <m:acc>
-                                    <m:accPr>
-                                      <m:chr m:val="‾"/>
-                                    </m:accPr>
-                                    <m:e>
-                                      <m:r>
-                                        <m:t>x</m:t>
-                                      </m:r>
-                                    </m:e>
-                                  </m:acc>
-                                </m:e>
-                                <m:sub>
-                                  <m:r>
-                                    <m:t>1</m:t>
-                                  </m:r>
-                                </m:sub>
-                              </m:sSub>
-                              <m:r>
-                                <m:rPr>
-                                  <m:sty m:val="p"/>
-                                </m:rPr>
-                                <m:t>,</m:t>
-                              </m:r>
-                              <m:r>
-                                <m:rPr>
-                                  <m:sty m:val="p"/>
-                                </m:rPr>
-                                <m:t>…</m:t>
-                              </m:r>
-                              <m:r>
-                                <m:rPr>
-                                  <m:sty m:val="p"/>
-                                </m:rPr>
-                                <m:t>,</m:t>
-                              </m:r>
-                              <m:sSub>
-                                <m:e>
-                                  <m:acc>
-                                    <m:accPr>
-                                      <m:chr m:val="‾"/>
-                                    </m:accPr>
-                                    <m:e>
-                                      <m:r>
-                                        <m:t>x</m:t>
-                                      </m:r>
-                                    </m:e>
-                                  </m:acc>
-                                </m:e>
-                                <m:sub>
-                                  <m:r>
-                                    <m:t>i</m:t>
-                                  </m:r>
-                                </m:sub>
-                              </m:sSub>
-                              <m:r>
-                                <m:rPr>
-                                  <m:sty m:val="p"/>
-                                </m:rPr>
-                                <m:t>+</m:t>
-                              </m:r>
-                              <m:sSub>
-                                <m:e>
-                                  <m:r>
-                                    <m:t>Δ</m:t>
-                                  </m:r>
-                                </m:e>
-                                <m:sub>
-                                  <m:r>
-                                    <m:t>i</m:t>
-                                  </m:r>
-                                </m:sub>
-                              </m:sSub>
-                              <m:r>
-                                <m:rPr>
-                                  <m:sty m:val="p"/>
-                                </m:rPr>
-                                <m:t>,</m:t>
-                              </m:r>
-                              <m:r>
-                                <m:rPr>
-                                  <m:sty m:val="p"/>
-                                </m:rPr>
-                                <m:t>…</m:t>
-                              </m:r>
-                            </m:e>
-                          </m:d>
-                          <m:r>
-                            <m:rPr>
-                              <m:sty m:val="p"/>
-                            </m:rPr>
-                            <m:t>−</m:t>
-                          </m:r>
-                          <m:r>
-                            <m:t>g</m:t>
-                          </m:r>
-                          <m:d>
-                            <m:dPr>
-                              <m:begChr m:val="("/>
-                              <m:sepChr m:val=""/>
-                              <m:endChr m:val=")"/>
-                              <m:grow/>
-                            </m:dPr>
-                            <m:e>
-                              <m:acc>
-                                <m:accPr>
-                                  <m:chr m:val="‾"/>
-                                </m:accPr>
-                                <m:e>
-                                  <m:r>
-                                    <m:rPr>
-                                      <m:sty m:val="b"/>
-                                    </m:rPr>
-                                    <m:t>x</m:t>
-                                  </m:r>
-                                </m:e>
-                              </m:acc>
-                            </m:e>
-                          </m:d>
-                        </m:num>
-                        <m:den>
-                          <m:sSub>
-                            <m:e>
-                              <m:r>
-                                <m:t>Δ</m:t>
-                              </m:r>
-                            </m:e>
-                            <m:sub>
-                              <m:r>
-                                <m:t>i</m:t>
-                              </m:r>
-                            </m:sub>
-                          </m:sSub>
-                        </m:den>
-                      </m:f>
-                    </m:oMath>
-                  </m:oMathPara>
-                </a14:m>
-              </a:p>
-            </p:txBody>
-          </p:sp>
-        </mc:Choice>
-      </mc:AlternateContent>
-    </p:spTree>
-  </p:cSld>
-</p:sld>
-</file>
-
-<file path=ppt/slides/slide8.xml><?xml version="1.0" encoding="utf-8"?>
-<p:sld xmlns:a="http://schemas.openxmlformats.org/drawingml/2006/main" xmlns:r="http://schemas.openxmlformats.org/officeDocument/2006/relationships" xmlns:p="http://schemas.openxmlformats.org/presentationml/2006/main">
-  <p:cSld>
-    <p:spTree>
-      <p:nvGrpSpPr>
-        <p:cNvPr id="1" name=""/>
-        <p:cNvGrpSpPr/>
-        <p:nvPr/>
-      </p:nvGrpSpPr>
-      <p:grpSpPr>
-        <a:xfrm>
-          <a:off x="0" y="0"/>
-          <a:ext cx="0" cy="0"/>
-          <a:chOff x="0" y="0"/>
-          <a:chExt cx="0" cy="0"/>
-        </a:xfrm>
-      </p:grpSpPr>
-      <p:sp>
-        <p:nvSpPr>
-          <p:cNvPr id="2" name="Title 1"/>
-          <p:cNvSpPr>
-            <a:spLocks noGrp="1"/>
-          </p:cNvSpPr>
-          <p:nvPr>
-            <p:ph type="title"/>
-          </p:nvPr>
-        </p:nvSpPr>
-        <p:spPr/>
-        <p:txBody>
-          <a:bodyPr/>
-          <a:lstStyle/>
-          <a:p>
-            <a:pPr lvl="0" indent="0" marL="0">
-              <a:buNone/>
-            </a:pPr>
-            <a:r>
-              <a:rPr/>
-              <a:t>OAT Limitations</a:t>
-            </a:r>
-          </a:p>
-        </p:txBody>
-      </p:sp>
-      <p:sp>
-        <p:nvSpPr>
-          <p:cNvPr id="3" name="Content Placeholder 2"/>
-          <p:cNvSpPr>
-            <a:spLocks noGrp="1"/>
-          </p:cNvSpPr>
-          <p:nvPr>
-            <p:ph idx="1"/>
-          </p:nvPr>
-        </p:nvSpPr>
-        <p:spPr/>
-        <p:txBody>
-          <a:bodyPr/>
-          <a:lstStyle/>
-          <a:p>
-            <a:pPr lvl="0"/>
-            <a:r>
-              <a:rPr/>
-              <a:t>Measures sensitivity at </a:t>
-            </a:r>
-            <a:r>
-              <a:rPr b="1"/>
-              <a:t>one point</a:t>
-            </a:r>
-            <a:r>
-              <a:rPr/>
-              <a:t> — may differ elsewhere</a:t>
-            </a:r>
-          </a:p>
-          <a:p>
-            <a:pPr lvl="0"/>
-            <a:r>
-              <a:rPr/>
-              <a:t>Misses </a:t>
-            </a:r>
-            <a:r>
-              <a:rPr b="1"/>
-              <a:t>interactions</a:t>
-            </a:r>
-            <a:r>
-              <a:rPr/>
-              <a:t> between parameters</a:t>
-            </a:r>
-          </a:p>
-          <a:p>
-            <a:pPr lvl="0"/>
-            <a:r>
-              <a:rPr/>
-              <a:t>Baseline choice is arbitrary</a:t>
-            </a:r>
-          </a:p>
-          <a:p>
-            <a:pPr lvl="0"/>
-            <a:r>
-              <a:rPr/>
-              <a:t>Does not explore the full input range</a:t>
-            </a:r>
-          </a:p>
-        </p:txBody>
-      </p:sp>
-    </p:spTree>
-  </p:cSld>
-</p:sld>
-</file>
-
-<file path=ppt/slides/slide9.xml><?xml version="1.0" encoding="utf-8"?>
-<p:sld xmlns:a="http://schemas.openxmlformats.org/drawingml/2006/main" xmlns:r="http://schemas.openxmlformats.org/officeDocument/2006/relationships" xmlns:p="http://schemas.openxmlformats.org/presentationml/2006/main">
-  <p:cSld>
-    <p:spTree>
-      <p:nvGrpSpPr>
-        <p:cNvPr id="1" name=""/>
-        <p:cNvGrpSpPr/>
-        <p:nvPr/>
-      </p:nvGrpSpPr>
-      <p:grpSpPr>
-        <a:xfrm>
-          <a:off x="0" y="0"/>
-          <a:ext cx="0" cy="0"/>
-          <a:chOff x="0" y="0"/>
-          <a:chExt cx="0" cy="0"/>
-        </a:xfrm>
-      </p:grpSpPr>
-      <p:sp>
-        <p:nvSpPr>
-          <p:cNvPr id="2" name="Title 1"/>
-          <p:cNvSpPr>
-            <a:spLocks noGrp="1"/>
-          </p:cNvSpPr>
-          <p:nvPr>
-            <p:ph type="title"/>
-          </p:nvPr>
-        </p:nvSpPr>
-        <p:spPr/>
-        <p:txBody>
-          <a:bodyPr/>
-          <a:lstStyle/>
-          <a:p>
-            <a:pPr lvl="0" indent="0" marL="0">
-              <a:buNone/>
-            </a:pPr>
-            <a:r>
-              <a:rPr/>
-              <a:t>Going Global</a:t>
-            </a:r>
-          </a:p>
-        </p:txBody>
-      </p:sp>
-      <p:sp>
-        <p:nvSpPr>
-          <p:cNvPr id="3" name="Content Placeholder 2"/>
-          <p:cNvSpPr>
-            <a:spLocks noGrp="1"/>
-          </p:cNvSpPr>
-          <p:nvPr>
-            <p:ph idx="1"/>
-          </p:nvPr>
-        </p:nvSpPr>
-        <p:spPr/>
-        <p:txBody>
-          <a:bodyPr/>
-          <a:lstStyle/>
-          <a:p>
-            <a:pPr lvl="0" indent="0" marL="0">
-              <a:buNone/>
-            </a:pPr>
-            <a:r>
-              <a:rPr b="1"/>
-              <a:t>Global SA</a:t>
-            </a:r>
-            <a:r>
-              <a:rPr/>
-              <a:t> varies all inputs simultaneously across their full ranges.</a:t>
-            </a:r>
-          </a:p>
-          <a:p>
-            <a:pPr lvl="0"/>
-            <a:r>
-              <a:rPr/>
-              <a:t>Captures the full range of each input</a:t>
-            </a:r>
-          </a:p>
-          <a:p>
-            <a:pPr lvl="0"/>
-            <a:r>
-              <a:rPr/>
-              <a:t>Detects nonlinear effects</a:t>
-            </a:r>
-          </a:p>
-          <a:p>
-            <a:pPr lvl="0"/>
-            <a:r>
-              <a:rPr/>
-              <a:t>Captures interactions between inputs</a:t>
-            </a:r>
-          </a:p>
-          <a:p>
-            <a:pPr lvl="0" indent="0" marL="0">
-              <a:buNone/>
-            </a:pPr>
-            <a:r>
-              <a:rPr/>
-              <a:t>Two representative methods: </a:t>
-            </a:r>
-            <a:r>
-              <a:rPr b="1"/>
-              <a:t>Morris</a:t>
-            </a:r>
-            <a:r>
-              <a:rPr/>
-              <a:t> (OAT from many starting points) and </a:t>
-            </a:r>
-            <a:r>
-              <a:rPr b="1"/>
-              <a:t>Sobol indices</a:t>
-            </a:r>
-            <a:r>
-              <a:rPr/>
-              <a:t> (variance decomposition).</a:t>
-            </a:r>
-          </a:p>
-        </p:txBody>
-      </p:sp>
     </p:spTree>
   </p:cSld>
 </p:sld>

--- a/lectures/week-07/gsa.pptx
+++ b/lectures/week-07/gsa.pptx
@@ -6462,21 +6462,21 @@
             </a:pPr>
             <a:r>
               <a:rPr/>
-              <a:t>Reed, Patrick M., Antonia Hadjimichael, Keyvan Malek, Tina Karimi, Chris R. Vernon, Vivek Srikrishnan, Rohini S. Gupta, et al. 2022. </a:t>
+              <a:t>Reed, Patrick M., Antonia Hadjimichael, Richard H. Moss, Christa Brelsford, Casey D. Burleyson, Stuart Cohen, Ana Dyreson, et al. 2022. “Multisector Dynamics: Advancing the Science of Complex Adaptive Human-Earth Systems.” </a:t>
             </a:r>
             <a:r>
               <a:rPr i="1"/>
-              <a:t>Addressing Uncertainty in Multisector Dynamics Research</a:t>
-            </a:r>
-            <a:r>
-              <a:rPr/>
-              <a:t>. Zenodo. </a:t>
+              <a:t>Earth’s Future</a:t>
+            </a:r>
+            <a:r>
+              <a:rPr/>
+              <a:t> 10 (3): e2021EF002621. </a:t>
             </a:r>
             <a:r>
               <a:rPr>
                 <a:hlinkClick r:id="rId3"/>
               </a:rPr>
-              <a:t>https://doi.org/10.5281/zenodo.6110623</a:t>
+              <a:t>https://doi.org/10.1029/2021EF002621</a:t>
             </a:r>
             <a:r>
               <a:rPr/>

--- a/lectures/week-07/gsa.pptx
+++ b/lectures/week-07/gsa.pptx
@@ -4693,7 +4693,7 @@
             <a:br/>
             <a:r>
               <a:rPr/>
-              <a:t>Dr. James Doss-Gollin</a:t>
+              <a:t>James Doss-Gollin</a:t>
             </a:r>
           </a:p>
         </p:txBody>

--- a/lectures/week-07/gsa.pptx
+++ b/lectures/week-07/gsa.pptx
@@ -4804,7 +4804,9 @@
         <p:nvSpPr>
           <p:cNvPr id="1" name="TextBox 3"/>
           <p:cNvSpPr txBox="1"/>
-          <p:nvPr/>
+          <p:nvPr>
+            <p:ph idx="1"/>
+          </p:nvPr>
         </p:nvSpPr>
         <p:spPr>
           <a:xfrm>
@@ -4994,19 +4996,21 @@
                         </m:rPr>
                         <m:t>Var</m:t>
                       </m:r>
-                      <m:d>
-                        <m:dPr>
-                          <m:begChr m:val="("/>
-                          <m:sepChr m:val=""/>
-                          <m:endChr m:val=")"/>
-                          <m:grow/>
-                        </m:dPr>
-                        <m:e>
-                          <m:r>
-                            <m:t>Y</m:t>
-                          </m:r>
-                        </m:e>
-                      </m:d>
+                      <m:r>
+                        <m:rPr>
+                          <m:sty m:val="p"/>
+                        </m:rPr>
+                        <m:t>(</m:t>
+                      </m:r>
+                      <m:r>
+                        <m:t>Y</m:t>
+                      </m:r>
+                      <m:r>
+                        <m:rPr>
+                          <m:sty m:val="p"/>
+                        </m:rPr>
+                        <m:t>)</m:t>
+                      </m:r>
                       <m:r>
                         <m:rPr>
                           <m:sty m:val="p"/>
@@ -5177,42 +5181,44 @@
                       <m:e>
                         <m:r>
                           <m:rPr>
+                            <m:scr m:val="double-struck"/>
                             <m:sty m:val="p"/>
-                            <m:scr m:val="double-struck"/>
                           </m:rPr>
                           <m:t>E</m:t>
                         </m:r>
-                        <m:d>
-                          <m:dPr>
-                            <m:begChr m:val="["/>
-                            <m:sepChr m:val=""/>
-                            <m:endChr m:val="]"/>
-                            <m:grow/>
-                          </m:dPr>
+                        <m:r>
+                          <m:rPr>
+                            <m:sty m:val="p"/>
+                          </m:rPr>
+                          <m:t>[</m:t>
+                        </m:r>
+                        <m:r>
+                          <m:t>Y</m:t>
+                        </m:r>
+                        <m:r>
+                          <m:rPr>
+                            <m:sty m:val="p"/>
+                          </m:rPr>
+                          <m:t>∣</m:t>
+                        </m:r>
+                        <m:sSub>
                           <m:e>
                             <m:r>
-                              <m:t>Y</m:t>
+                              <m:t>X</m:t>
                             </m:r>
+                          </m:e>
+                          <m:sub>
                             <m:r>
-                              <m:rPr>
-                                <m:sty m:val="p"/>
-                              </m:rPr>
-                              <m:t>∣</m:t>
+                              <m:t>i</m:t>
                             </m:r>
-                            <m:sSub>
-                              <m:e>
-                                <m:r>
-                                  <m:t>X</m:t>
-                                </m:r>
-                              </m:e>
-                              <m:sub>
-                                <m:r>
-                                  <m:t>i</m:t>
-                                </m:r>
-                              </m:sub>
-                            </m:sSub>
-                          </m:e>
-                        </m:d>
+                          </m:sub>
+                        </m:sSub>
+                        <m:r>
+                          <m:rPr>
+                            <m:sty m:val="p"/>
+                          </m:rPr>
+                          <m:t>]</m:t>
+                        </m:r>
                       </m:e>
                     </m:d>
                   </m:oMath>
@@ -5468,42 +5474,44 @@
                             <m:e>
                               <m:r>
                                 <m:rPr>
+                                  <m:scr m:val="double-struck"/>
                                   <m:sty m:val="p"/>
-                                  <m:scr m:val="double-struck"/>
                                 </m:rPr>
                                 <m:t>E</m:t>
                               </m:r>
-                              <m:d>
-                                <m:dPr>
-                                  <m:begChr m:val="["/>
-                                  <m:sepChr m:val=""/>
-                                  <m:endChr m:val="]"/>
-                                  <m:grow/>
-                                </m:dPr>
+                              <m:r>
+                                <m:rPr>
+                                  <m:sty m:val="p"/>
+                                </m:rPr>
+                                <m:t>[</m:t>
+                              </m:r>
+                              <m:r>
+                                <m:t>Y</m:t>
+                              </m:r>
+                              <m:r>
+                                <m:rPr>
+                                  <m:sty m:val="p"/>
+                                </m:rPr>
+                                <m:t>∣</m:t>
+                              </m:r>
+                              <m:sSub>
                                 <m:e>
                                   <m:r>
-                                    <m:t>Y</m:t>
+                                    <m:t>X</m:t>
                                   </m:r>
+                                </m:e>
+                                <m:sub>
                                   <m:r>
-                                    <m:rPr>
-                                      <m:sty m:val="p"/>
-                                    </m:rPr>
-                                    <m:t>∣</m:t>
+                                    <m:t>i</m:t>
                                   </m:r>
-                                  <m:sSub>
-                                    <m:e>
-                                      <m:r>
-                                        <m:t>X</m:t>
-                                      </m:r>
-                                    </m:e>
-                                    <m:sub>
-                                      <m:r>
-                                        <m:t>i</m:t>
-                                      </m:r>
-                                    </m:sub>
-                                  </m:sSub>
-                                </m:e>
-                              </m:d>
+                                </m:sub>
+                              </m:sSub>
+                              <m:r>
+                                <m:rPr>
+                                  <m:sty m:val="p"/>
+                                </m:rPr>
+                                <m:t>]</m:t>
+                              </m:r>
                             </m:e>
                           </m:d>
                         </m:num>
@@ -5515,19 +5523,21 @@
                             </m:rPr>
                             <m:t>Var</m:t>
                           </m:r>
-                          <m:d>
-                            <m:dPr>
-                              <m:begChr m:val="("/>
-                              <m:sepChr m:val=""/>
-                              <m:endChr m:val=")"/>
-                              <m:grow/>
-                            </m:dPr>
-                            <m:e>
-                              <m:r>
-                                <m:t>Y</m:t>
-                              </m:r>
-                            </m:e>
-                          </m:d>
+                          <m:r>
+                            <m:rPr>
+                              <m:sty m:val="p"/>
+                            </m:rPr>
+                            <m:t>(</m:t>
+                          </m:r>
+                          <m:r>
+                            <m:t>Y</m:t>
+                          </m:r>
+                          <m:r>
+                            <m:rPr>
+                              <m:sty m:val="p"/>
+                            </m:rPr>
+                            <m:t>)</m:t>
+                          </m:r>
                         </m:den>
                       </m:f>
                     </m:oMath>
@@ -5643,48 +5653,50 @@
                             <m:e>
                               <m:r>
                                 <m:rPr>
+                                  <m:scr m:val="double-struck"/>
                                   <m:sty m:val="p"/>
-                                  <m:scr m:val="double-struck"/>
                                 </m:rPr>
                                 <m:t>E</m:t>
                               </m:r>
-                              <m:d>
-                                <m:dPr>
-                                  <m:begChr m:val="["/>
-                                  <m:sepChr m:val=""/>
-                                  <m:endChr m:val="]"/>
-                                  <m:grow/>
-                                </m:dPr>
+                              <m:r>
+                                <m:rPr>
+                                  <m:sty m:val="p"/>
+                                </m:rPr>
+                                <m:t>[</m:t>
+                              </m:r>
+                              <m:r>
+                                <m:t>Y</m:t>
+                              </m:r>
+                              <m:r>
+                                <m:rPr>
+                                  <m:sty m:val="p"/>
+                                </m:rPr>
+                                <m:t>∣</m:t>
+                              </m:r>
+                              <m:sSub>
                                 <m:e>
                                   <m:r>
-                                    <m:t>Y</m:t>
+                                    <m:t>X</m:t>
                                   </m:r>
+                                </m:e>
+                                <m:sub>
                                   <m:r>
                                     <m:rPr>
                                       <m:sty m:val="p"/>
                                     </m:rPr>
-                                    <m:t>∣</m:t>
+                                    <m:t>∼</m:t>
                                   </m:r>
-                                  <m:sSub>
-                                    <m:e>
-                                      <m:r>
-                                        <m:t>X</m:t>
-                                      </m:r>
-                                    </m:e>
-                                    <m:sub>
-                                      <m:r>
-                                        <m:rPr>
-                                          <m:sty m:val="p"/>
-                                        </m:rPr>
-                                        <m:t>∼</m:t>
-                                      </m:r>
-                                      <m:r>
-                                        <m:t>i</m:t>
-                                      </m:r>
-                                    </m:sub>
-                                  </m:sSub>
-                                </m:e>
-                              </m:d>
+                                  <m:r>
+                                    <m:t>i</m:t>
+                                  </m:r>
+                                </m:sub>
+                              </m:sSub>
+                              <m:r>
+                                <m:rPr>
+                                  <m:sty m:val="p"/>
+                                </m:rPr>
+                                <m:t>]</m:t>
+                              </m:r>
                             </m:e>
                           </m:d>
                         </m:num>
@@ -5696,19 +5708,21 @@
                             </m:rPr>
                             <m:t>Var</m:t>
                           </m:r>
-                          <m:d>
-                            <m:dPr>
-                              <m:begChr m:val="("/>
-                              <m:sepChr m:val=""/>
-                              <m:endChr m:val=")"/>
-                              <m:grow/>
-                            </m:dPr>
-                            <m:e>
-                              <m:r>
-                                <m:t>Y</m:t>
-                              </m:r>
-                            </m:e>
-                          </m:d>
+                          <m:r>
+                            <m:rPr>
+                              <m:sty m:val="p"/>
+                            </m:rPr>
+                            <m:t>(</m:t>
+                          </m:r>
+                          <m:r>
+                            <m:t>Y</m:t>
+                          </m:r>
+                          <m:r>
+                            <m:rPr>
+                              <m:sty m:val="p"/>
+                            </m:rPr>
+                            <m:t>)</m:t>
+                          </m:r>
                         </m:den>
                       </m:f>
                     </m:oMath>
@@ -6065,58 +6079,60 @@
                     <m:r>
                       <m:t>p</m:t>
                     </m:r>
-                    <m:d>
-                      <m:dPr>
-                        <m:begChr m:val="("/>
-                        <m:sepChr m:val=""/>
-                        <m:endChr m:val=")"/>
-                        <m:grow/>
-                      </m:dPr>
+                    <m:r>
+                      <m:rPr>
+                        <m:sty m:val="p"/>
+                      </m:rPr>
+                      <m:t>(</m:t>
+                    </m:r>
+                    <m:sSub>
                       <m:e>
-                        <m:sSub>
-                          <m:e>
-                            <m:r>
-                              <m:t>X</m:t>
-                            </m:r>
-                          </m:e>
-                          <m:sub>
-                            <m:r>
-                              <m:t>1</m:t>
-                            </m:r>
-                          </m:sub>
-                        </m:sSub>
                         <m:r>
-                          <m:rPr>
-                            <m:sty m:val="p"/>
-                          </m:rPr>
-                          <m:t>,</m:t>
+                          <m:t>X</m:t>
                         </m:r>
+                      </m:e>
+                      <m:sub>
                         <m:r>
-                          <m:rPr>
-                            <m:sty m:val="p"/>
-                          </m:rPr>
-                          <m:t>…</m:t>
+                          <m:t>1</m:t>
                         </m:r>
+                      </m:sub>
+                    </m:sSub>
+                    <m:r>
+                      <m:rPr>
+                        <m:sty m:val="p"/>
+                      </m:rPr>
+                      <m:t>,</m:t>
+                    </m:r>
+                    <m:r>
+                      <m:rPr>
+                        <m:sty m:val="p"/>
+                      </m:rPr>
+                      <m:t>…</m:t>
+                    </m:r>
+                    <m:r>
+                      <m:rPr>
+                        <m:sty m:val="p"/>
+                      </m:rPr>
+                      <m:t>,</m:t>
+                    </m:r>
+                    <m:sSub>
+                      <m:e>
                         <m:r>
-                          <m:rPr>
-                            <m:sty m:val="p"/>
-                          </m:rPr>
-                          <m:t>,</m:t>
+                          <m:t>X</m:t>
                         </m:r>
-                        <m:sSub>
-                          <m:e>
-                            <m:r>
-                              <m:t>X</m:t>
-                            </m:r>
-                          </m:e>
-                          <m:sub>
-                            <m:r>
-                              <m:t>M</m:t>
-                            </m:r>
-                          </m:sub>
-                        </m:sSub>
                       </m:e>
-                    </m:d>
+                      <m:sub>
+                        <m:r>
+                          <m:t>M</m:t>
+                        </m:r>
+                      </m:sub>
+                    </m:sSub>
+                    <m:r>
+                      <m:rPr>
+                        <m:sty m:val="p"/>
+                      </m:rPr>
+                      <m:t>)</m:t>
+                    </m:r>
                   </m:oMath>
                 </a14:m>
                 <a:r>
@@ -6137,34 +6153,36 @@
                       </m:rPr>
                       <m:t>Uniform</m:t>
                     </m:r>
-                    <m:d>
-                      <m:dPr>
-                        <m:begChr m:val="("/>
-                        <m:sepChr m:val=""/>
-                        <m:endChr m:val=")"/>
-                        <m:grow/>
-                      </m:dPr>
-                      <m:e>
-                        <m:r>
-                          <m:rPr>
-                            <m:sty m:val="p"/>
-                          </m:rPr>
-                          <m:t>−</m:t>
-                        </m:r>
-                        <m:r>
-                          <m:t>π</m:t>
-                        </m:r>
-                        <m:r>
-                          <m:rPr>
-                            <m:sty m:val="p"/>
-                          </m:rPr>
-                          <m:t>,</m:t>
-                        </m:r>
-                        <m:r>
-                          <m:t>π</m:t>
-                        </m:r>
-                      </m:e>
-                    </m:d>
+                    <m:r>
+                      <m:rPr>
+                        <m:sty m:val="p"/>
+                      </m:rPr>
+                      <m:t>(</m:t>
+                    </m:r>
+                    <m:r>
+                      <m:rPr>
+                        <m:sty m:val="p"/>
+                      </m:rPr>
+                      <m:t>−</m:t>
+                    </m:r>
+                    <m:r>
+                      <m:t>π</m:t>
+                    </m:r>
+                    <m:r>
+                      <m:rPr>
+                        <m:sty m:val="p"/>
+                      </m:rPr>
+                      <m:t>,</m:t>
+                    </m:r>
+                    <m:r>
+                      <m:t>π</m:t>
+                    </m:r>
+                    <m:r>
+                      <m:rPr>
+                        <m:sty m:val="p"/>
+                      </m:rPr>
+                      <m:t>)</m:t>
+                    </m:r>
                   </m:oMath>
                 </a14:m>
                 <a:r>
@@ -6180,28 +6198,30 @@
                       </m:rPr>
                       <m:t>Normal</m:t>
                     </m:r>
-                    <m:d>
-                      <m:dPr>
-                        <m:begChr m:val="("/>
-                        <m:sepChr m:val=""/>
-                        <m:endChr m:val=")"/>
-                        <m:grow/>
-                      </m:dPr>
-                      <m:e>
-                        <m:r>
-                          <m:t>0</m:t>
-                        </m:r>
-                        <m:r>
-                          <m:rPr>
-                            <m:sty m:val="p"/>
-                          </m:rPr>
-                          <m:t>,</m:t>
-                        </m:r>
-                        <m:r>
-                          <m:t>0.1</m:t>
-                        </m:r>
-                      </m:e>
-                    </m:d>
+                    <m:r>
+                      <m:rPr>
+                        <m:sty m:val="p"/>
+                      </m:rPr>
+                      <m:t>(</m:t>
+                    </m:r>
+                    <m:r>
+                      <m:t>0</m:t>
+                    </m:r>
+                    <m:r>
+                      <m:rPr>
+                        <m:sty m:val="p"/>
+                      </m:rPr>
+                      <m:t>,</m:t>
+                    </m:r>
+                    <m:r>
+                      <m:t>0.1</m:t>
+                    </m:r>
+                    <m:r>
+                      <m:rPr>
+                        <m:sty m:val="p"/>
+                      </m:rPr>
+                      <m:t>)</m:t>
+                    </m:r>
                   </m:oMath>
                 </a14:m>
                 <a:r>
@@ -6435,7 +6455,7 @@
             </a:pPr>
             <a:r>
               <a:rPr/>
-              <a:t>Pianosi, Francesca, Keith Beven, Jim Freer, Jim W. Hall, Jonathan Rougier, David B. Stephenson, and Thorsten Wagener. 2016. “Sensitivity Analysis of Environmental Models: A Systematic Review with Practical Workflow.” </a:t>
+              <a:t>Pianosi, Francesca, Keith Beven, Jim Freer, et al. 2016. “Sensitivity Analysis of Environmental Models: A Systematic Review with Practical Workflow.” </a:t>
             </a:r>
             <a:r>
               <a:rPr i="1"/>
@@ -6462,7 +6482,7 @@
             </a:pPr>
             <a:r>
               <a:rPr/>
-              <a:t>Reed, Patrick M., Antonia Hadjimichael, Richard H. Moss, Christa Brelsford, Casey D. Burleyson, Stuart Cohen, Ana Dyreson, et al. 2022. “Multisector Dynamics: Advancing the Science of Complex Adaptive Human-Earth Systems.” </a:t>
+              <a:t>Reed, Patrick M., Antonia Hadjimichael, Richard H. Moss, et al. 2022. “Multisector Dynamics: Advancing the Science of Complex Adaptive Human-Earth Systems.” </a:t>
             </a:r>
             <a:r>
               <a:rPr i="1"/>
@@ -6489,7 +6509,7 @@
             </a:pPr>
             <a:r>
               <a:rPr/>
-              <a:t>Saltelli, Andrea, Marco Ratto, Terry Andres, Francesca Campolongo, Jessica Cariboni, Debora Gatelli, Michaela Saisana, and Stefano Tarantola. 2008. </a:t>
+              <a:t>Saltelli, Andrea, Marco Ratto, Terry Andres, et al. 2008. </a:t>
             </a:r>
             <a:r>
               <a:rPr i="1"/>
@@ -6814,76 +6834,78 @@
                       <m:r>
                         <m:t>g</m:t>
                       </m:r>
-                      <m:d>
-                        <m:dPr>
-                          <m:begChr m:val="("/>
-                          <m:sepChr m:val=""/>
-                          <m:endChr m:val=")"/>
-                          <m:grow/>
-                        </m:dPr>
+                      <m:r>
+                        <m:rPr>
+                          <m:sty m:val="p"/>
+                        </m:rPr>
+                        <m:t>(</m:t>
+                      </m:r>
+                      <m:sSub>
                         <m:e>
-                          <m:sSub>
-                            <m:e>
-                              <m:r>
-                                <m:t>X</m:t>
-                              </m:r>
-                            </m:e>
-                            <m:sub>
-                              <m:r>
-                                <m:t>1</m:t>
-                              </m:r>
-                            </m:sub>
-                          </m:sSub>
                           <m:r>
-                            <m:rPr>
-                              <m:sty m:val="p"/>
-                            </m:rPr>
-                            <m:t>,</m:t>
+                            <m:t>X</m:t>
                           </m:r>
-                          <m:sSub>
-                            <m:e>
-                              <m:r>
-                                <m:t>X</m:t>
-                              </m:r>
-                            </m:e>
-                            <m:sub>
-                              <m:r>
-                                <m:t>2</m:t>
-                              </m:r>
-                            </m:sub>
-                          </m:sSub>
+                        </m:e>
+                        <m:sub>
                           <m:r>
-                            <m:rPr>
-                              <m:sty m:val="p"/>
-                            </m:rPr>
-                            <m:t>,</m:t>
+                            <m:t>1</m:t>
                           </m:r>
+                        </m:sub>
+                      </m:sSub>
+                      <m:r>
+                        <m:rPr>
+                          <m:sty m:val="p"/>
+                        </m:rPr>
+                        <m:t>,</m:t>
+                      </m:r>
+                      <m:sSub>
+                        <m:e>
                           <m:r>
-                            <m:rPr>
-                              <m:sty m:val="p"/>
-                            </m:rPr>
-                            <m:t>…</m:t>
+                            <m:t>X</m:t>
                           </m:r>
+                        </m:e>
+                        <m:sub>
                           <m:r>
-                            <m:rPr>
-                              <m:sty m:val="p"/>
-                            </m:rPr>
-                            <m:t>,</m:t>
+                            <m:t>2</m:t>
                           </m:r>
-                          <m:sSub>
-                            <m:e>
-                              <m:r>
-                                <m:t>X</m:t>
-                              </m:r>
-                            </m:e>
-                            <m:sub>
-                              <m:r>
-                                <m:t>M</m:t>
-                              </m:r>
-                            </m:sub>
-                          </m:sSub>
+                        </m:sub>
+                      </m:sSub>
+                      <m:r>
+                        <m:rPr>
+                          <m:sty m:val="p"/>
+                        </m:rPr>
+                        <m:t>,</m:t>
+                      </m:r>
+                      <m:r>
+                        <m:rPr>
+                          <m:sty m:val="p"/>
+                        </m:rPr>
+                        <m:t>…</m:t>
+                      </m:r>
+                      <m:r>
+                        <m:rPr>
+                          <m:sty m:val="p"/>
+                        </m:rPr>
+                        <m:t>,</m:t>
+                      </m:r>
+                      <m:sSub>
+                        <m:e>
+                          <m:r>
+                            <m:t>X</m:t>
+                          </m:r>
                         </m:e>
-                      </m:d>
+                        <m:sub>
+                          <m:r>
+                            <m:t>M</m:t>
+                          </m:r>
+                        </m:sub>
+                      </m:sSub>
+                      <m:r>
+                        <m:rPr>
+                          <m:sty m:val="p"/>
+                        </m:rPr>
+                        <m:t>)</m:t>
+                      </m:r>
                     </m:oMath>
                   </m:oMathPara>
                 </a14:m>
@@ -7322,102 +7344,107 @@
                           <m:r>
                             <m:t>g</m:t>
                           </m:r>
-                          <m:d>
-                            <m:dPr>
-                              <m:begChr m:val="("/>
-                              <m:sepChr m:val=""/>
-                              <m:endChr m:val=")"/>
-                              <m:grow/>
-                            </m:dPr>
+                          <m:r>
+                            <m:rPr>
+                              <m:sty m:val="p"/>
+                            </m:rPr>
+                            <m:t>(</m:t>
+                          </m:r>
+                          <m:sSub>
                             <m:e>
-                              <m:sSub>
+                              <m:acc>
+                                <m:accPr>
+                                  <m:chr m:val="‾"/>
+                                </m:accPr>
                                 <m:e>
-                                  <m:acc>
-                                    <m:accPr>
-                                      <m:chr m:val="‾"/>
-                                    </m:accPr>
-                                    <m:e>
-                                      <m:r>
-                                        <m:t>x</m:t>
-                                      </m:r>
-                                    </m:e>
-                                  </m:acc>
+                                  <m:r>
+                                    <m:t>x</m:t>
+                                  </m:r>
                                 </m:e>
-                                <m:sub>
+                              </m:acc>
+                            </m:e>
+                            <m:sub>
+                              <m:r>
+                                <m:t>1</m:t>
+                              </m:r>
+                            </m:sub>
+                          </m:sSub>
+                          <m:r>
+                            <m:rPr>
+                              <m:sty m:val="p"/>
+                            </m:rPr>
+                            <m:t>,</m:t>
+                          </m:r>
+                          <m:r>
+                            <m:rPr>
+                              <m:sty m:val="p"/>
+                            </m:rPr>
+                            <m:t>…</m:t>
+                          </m:r>
+                          <m:r>
+                            <m:rPr>
+                              <m:sty m:val="p"/>
+                            </m:rPr>
+                            <m:t>,</m:t>
+                          </m:r>
+                          <m:sSub>
+                            <m:e>
+                              <m:acc>
+                                <m:accPr>
+                                  <m:chr m:val="‾"/>
+                                </m:accPr>
+                                <m:e>
                                   <m:r>
-                                    <m:t>1</m:t>
+                                    <m:t>x</m:t>
                                   </m:r>
-                                </m:sub>
-                              </m:sSub>
+                                </m:e>
+                              </m:acc>
+                            </m:e>
+                            <m:sub>
+                              <m:r>
+                                <m:t>i</m:t>
+                              </m:r>
+                            </m:sub>
+                          </m:sSub>
+                          <m:r>
+                            <m:rPr>
+                              <m:sty m:val="p"/>
+                            </m:rPr>
+                            <m:t>+</m:t>
+                          </m:r>
+                          <m:sSub>
+                            <m:e>
                               <m:r>
                                 <m:rPr>
                                   <m:sty m:val="p"/>
                                 </m:rPr>
-                                <m:t>,</m:t>
-                              </m:r>
-                              <m:r>
-                                <m:rPr>
-                                  <m:sty m:val="p"/>
-                                </m:rPr>
-                                <m:t>…</m:t>
-                              </m:r>
-                              <m:r>
-                                <m:rPr>
-                                  <m:sty m:val="p"/>
-                                </m:rPr>
-                                <m:t>,</m:t>
-                              </m:r>
-                              <m:sSub>
-                                <m:e>
-                                  <m:acc>
-                                    <m:accPr>
-                                      <m:chr m:val="‾"/>
-                                    </m:accPr>
-                                    <m:e>
-                                      <m:r>
-                                        <m:t>x</m:t>
-                                      </m:r>
-                                    </m:e>
-                                  </m:acc>
-                                </m:e>
-                                <m:sub>
-                                  <m:r>
-                                    <m:t>i</m:t>
-                                  </m:r>
-                                </m:sub>
-                              </m:sSub>
-                              <m:r>
-                                <m:rPr>
-                                  <m:sty m:val="p"/>
-                                </m:rPr>
-                                <m:t>+</m:t>
-                              </m:r>
-                              <m:sSub>
-                                <m:e>
-                                  <m:r>
-                                    <m:t>Δ</m:t>
-                                  </m:r>
-                                </m:e>
-                                <m:sub>
-                                  <m:r>
-                                    <m:t>i</m:t>
-                                  </m:r>
-                                </m:sub>
-                              </m:sSub>
-                              <m:r>
-                                <m:rPr>
-                                  <m:sty m:val="p"/>
-                                </m:rPr>
-                                <m:t>,</m:t>
-                              </m:r>
-                              <m:r>
-                                <m:rPr>
-                                  <m:sty m:val="p"/>
-                                </m:rPr>
-                                <m:t>…</m:t>
+                                <m:t>Δ</m:t>
                               </m:r>
                             </m:e>
-                          </m:d>
+                            <m:sub>
+                              <m:r>
+                                <m:t>i</m:t>
+                              </m:r>
+                            </m:sub>
+                          </m:sSub>
+                          <m:r>
+                            <m:rPr>
+                              <m:sty m:val="p"/>
+                            </m:rPr>
+                            <m:t>,</m:t>
+                          </m:r>
+                          <m:r>
+                            <m:rPr>
+                              <m:sty m:val="p"/>
+                            </m:rPr>
+                            <m:t>…</m:t>
+                          </m:r>
+                          <m:r>
+                            <m:rPr>
+                              <m:sty m:val="p"/>
+                            </m:rPr>
+                            <m:t>)</m:t>
+                          </m:r>
                           <m:r>
                             <m:rPr>
                               <m:sty m:val="p"/>
@@ -7427,34 +7454,39 @@
                           <m:r>
                             <m:t>g</m:t>
                           </m:r>
-                          <m:d>
-                            <m:dPr>
-                              <m:begChr m:val="("/>
-                              <m:sepChr m:val=""/>
-                              <m:endChr m:val=")"/>
-                              <m:grow/>
-                            </m:dPr>
+                          <m:r>
+                            <m:rPr>
+                              <m:sty m:val="p"/>
+                            </m:rPr>
+                            <m:t>(</m:t>
+                          </m:r>
+                          <m:acc>
+                            <m:accPr>
+                              <m:chr m:val="‾"/>
+                            </m:accPr>
                             <m:e>
-                              <m:acc>
-                                <m:accPr>
-                                  <m:chr m:val="‾"/>
-                                </m:accPr>
-                                <m:e>
-                                  <m:r>
-                                    <m:rPr>
-                                      <m:sty m:val="b"/>
-                                    </m:rPr>
-                                    <m:t>x</m:t>
-                                  </m:r>
-                                </m:e>
-                              </m:acc>
+                              <m:r>
+                                <m:rPr>
+                                  <m:sty m:val="b"/>
+                                </m:rPr>
+                                <m:t>x</m:t>
+                              </m:r>
                             </m:e>
-                          </m:d>
+                          </m:acc>
+                          <m:r>
+                            <m:rPr>
+                              <m:sty m:val="p"/>
+                            </m:rPr>
+                            <m:t>)</m:t>
+                          </m:r>
                         </m:num>
                         <m:den>
                           <m:sSub>
                             <m:e>
                               <m:r>
+                                <m:rPr>
+                                  <m:sty m:val="p"/>
+                                </m:rPr>
                                 <m:t>Δ</m:t>
                               </m:r>
                             </m:e>
@@ -7852,82 +7884,87 @@
                           <m:r>
                             <m:t>g</m:t>
                           </m:r>
-                          <m:d>
-                            <m:dPr>
-                              <m:begChr m:val="("/>
-                              <m:sepChr m:val=""/>
-                              <m:endChr m:val=")"/>
-                              <m:grow/>
-                            </m:dPr>
+                          <m:r>
+                            <m:rPr>
+                              <m:sty m:val="p"/>
+                            </m:rPr>
+                            <m:t>(</m:t>
+                          </m:r>
+                          <m:r>
+                            <m:rPr>
+                              <m:sty m:val="p"/>
+                            </m:rPr>
+                            <m:t>…</m:t>
+                          </m:r>
+                          <m:r>
+                            <m:rPr>
+                              <m:sty m:val="p"/>
+                            </m:rPr>
+                            <m:t>,</m:t>
+                          </m:r>
+                          <m:sSubSup>
+                            <m:e>
+                              <m:acc>
+                                <m:accPr>
+                                  <m:chr m:val="‾"/>
+                                </m:accPr>
+                                <m:e>
+                                  <m:r>
+                                    <m:t>x</m:t>
+                                  </m:r>
+                                </m:e>
+                              </m:acc>
+                            </m:e>
+                            <m:sub>
+                              <m:r>
+                                <m:t>i</m:t>
+                              </m:r>
+                            </m:sub>
+                            <m:sup>
+                              <m:r>
+                                <m:t>j</m:t>
+                              </m:r>
+                            </m:sup>
+                          </m:sSubSup>
+                          <m:r>
+                            <m:rPr>
+                              <m:sty m:val="p"/>
+                            </m:rPr>
+                            <m:t>+</m:t>
+                          </m:r>
+                          <m:sSub>
                             <m:e>
                               <m:r>
                                 <m:rPr>
                                   <m:sty m:val="p"/>
                                 </m:rPr>
-                                <m:t>…</m:t>
-                              </m:r>
-                              <m:r>
-                                <m:rPr>
-                                  <m:sty m:val="p"/>
-                                </m:rPr>
-                                <m:t>,</m:t>
-                              </m:r>
-                              <m:sSubSup>
-                                <m:e>
-                                  <m:acc>
-                                    <m:accPr>
-                                      <m:chr m:val="‾"/>
-                                    </m:accPr>
-                                    <m:e>
-                                      <m:r>
-                                        <m:t>x</m:t>
-                                      </m:r>
-                                    </m:e>
-                                  </m:acc>
-                                </m:e>
-                                <m:sub>
-                                  <m:r>
-                                    <m:t>i</m:t>
-                                  </m:r>
-                                </m:sub>
-                                <m:sup>
-                                  <m:r>
-                                    <m:t>j</m:t>
-                                  </m:r>
-                                </m:sup>
-                              </m:sSubSup>
-                              <m:r>
-                                <m:rPr>
-                                  <m:sty m:val="p"/>
-                                </m:rPr>
-                                <m:t>+</m:t>
-                              </m:r>
-                              <m:sSub>
-                                <m:e>
-                                  <m:r>
-                                    <m:t>Δ</m:t>
-                                  </m:r>
-                                </m:e>
-                                <m:sub>
-                                  <m:r>
-                                    <m:t>i</m:t>
-                                  </m:r>
-                                </m:sub>
-                              </m:sSub>
-                              <m:r>
-                                <m:rPr>
-                                  <m:sty m:val="p"/>
-                                </m:rPr>
-                                <m:t>,</m:t>
-                              </m:r>
-                              <m:r>
-                                <m:rPr>
-                                  <m:sty m:val="p"/>
-                                </m:rPr>
-                                <m:t>…</m:t>
+                                <m:t>Δ</m:t>
                               </m:r>
                             </m:e>
-                          </m:d>
+                            <m:sub>
+                              <m:r>
+                                <m:t>i</m:t>
+                              </m:r>
+                            </m:sub>
+                          </m:sSub>
+                          <m:r>
+                            <m:rPr>
+                              <m:sty m:val="p"/>
+                            </m:rPr>
+                            <m:t>,</m:t>
+                          </m:r>
+                          <m:r>
+                            <m:rPr>
+                              <m:sty m:val="p"/>
+                            </m:rPr>
+                            <m:t>…</m:t>
+                          </m:r>
+                          <m:r>
+                            <m:rPr>
+                              <m:sty m:val="p"/>
+                            </m:rPr>
+                            <m:t>)</m:t>
+                          </m:r>
                           <m:r>
                             <m:rPr>
                               <m:sty m:val="p"/>
@@ -7937,69 +7974,74 @@
                           <m:r>
                             <m:t>g</m:t>
                           </m:r>
-                          <m:d>
-                            <m:dPr>
-                              <m:begChr m:val="("/>
-                              <m:sepChr m:val=""/>
-                              <m:endChr m:val=")"/>
-                              <m:grow/>
-                            </m:dPr>
+                          <m:r>
+                            <m:rPr>
+                              <m:sty m:val="p"/>
+                            </m:rPr>
+                            <m:t>(</m:t>
+                          </m:r>
+                          <m:r>
+                            <m:rPr>
+                              <m:sty m:val="p"/>
+                            </m:rPr>
+                            <m:t>…</m:t>
+                          </m:r>
+                          <m:r>
+                            <m:rPr>
+                              <m:sty m:val="p"/>
+                            </m:rPr>
+                            <m:t>,</m:t>
+                          </m:r>
+                          <m:sSubSup>
+                            <m:e>
+                              <m:acc>
+                                <m:accPr>
+                                  <m:chr m:val="‾"/>
+                                </m:accPr>
+                                <m:e>
+                                  <m:r>
+                                    <m:t>x</m:t>
+                                  </m:r>
+                                </m:e>
+                              </m:acc>
+                            </m:e>
+                            <m:sub>
+                              <m:r>
+                                <m:t>i</m:t>
+                              </m:r>
+                            </m:sub>
+                            <m:sup>
+                              <m:r>
+                                <m:t>j</m:t>
+                              </m:r>
+                            </m:sup>
+                          </m:sSubSup>
+                          <m:r>
+                            <m:rPr>
+                              <m:sty m:val="p"/>
+                            </m:rPr>
+                            <m:t>,</m:t>
+                          </m:r>
+                          <m:r>
+                            <m:rPr>
+                              <m:sty m:val="p"/>
+                            </m:rPr>
+                            <m:t>…</m:t>
+                          </m:r>
+                          <m:r>
+                            <m:rPr>
+                              <m:sty m:val="p"/>
+                            </m:rPr>
+                            <m:t>)</m:t>
+                          </m:r>
+                        </m:num>
+                        <m:den>
+                          <m:sSub>
                             <m:e>
                               <m:r>
                                 <m:rPr>
                                   <m:sty m:val="p"/>
                                 </m:rPr>
-                                <m:t>…</m:t>
-                              </m:r>
-                              <m:r>
-                                <m:rPr>
-                                  <m:sty m:val="p"/>
-                                </m:rPr>
-                                <m:t>,</m:t>
-                              </m:r>
-                              <m:sSubSup>
-                                <m:e>
-                                  <m:acc>
-                                    <m:accPr>
-                                      <m:chr m:val="‾"/>
-                                    </m:accPr>
-                                    <m:e>
-                                      <m:r>
-                                        <m:t>x</m:t>
-                                      </m:r>
-                                    </m:e>
-                                  </m:acc>
-                                </m:e>
-                                <m:sub>
-                                  <m:r>
-                                    <m:t>i</m:t>
-                                  </m:r>
-                                </m:sub>
-                                <m:sup>
-                                  <m:r>
-                                    <m:t>j</m:t>
-                                  </m:r>
-                                </m:sup>
-                              </m:sSubSup>
-                              <m:r>
-                                <m:rPr>
-                                  <m:sty m:val="p"/>
-                                </m:rPr>
-                                <m:t>,</m:t>
-                              </m:r>
-                              <m:r>
-                                <m:rPr>
-                                  <m:sty m:val="p"/>
-                                </m:rPr>
-                                <m:t>…</m:t>
-                              </m:r>
-                            </m:e>
-                          </m:d>
-                        </m:num>
-                        <m:den>
-                          <m:sSub>
-                            <m:e>
-                              <m:r>
                                 <m:t>Δ</m:t>
                               </m:r>
                             </m:e>
@@ -8032,31 +8074,33 @@
                 </a:r>
                 <a14:m>
                   <m:oMath xmlns:m="http://schemas.openxmlformats.org/officeDocument/2006/math">
-                    <m:d>
-                      <m:dPr>
-                        <m:begChr m:val="|"/>
-                        <m:sepChr m:val=""/>
-                        <m:endChr m:val="|"/>
-                        <m:grow/>
-                      </m:dPr>
+                    <m:r>
+                      <m:rPr>
+                        <m:sty m:val="p"/>
+                      </m:rPr>
+                      <m:t>|</m:t>
+                    </m:r>
+                    <m:r>
+                      <m:t>E</m:t>
+                    </m:r>
+                    <m:sSub>
                       <m:e>
                         <m:r>
                           <m:t>E</m:t>
                         </m:r>
-                        <m:sSub>
-                          <m:e>
-                            <m:r>
-                              <m:t>E</m:t>
-                            </m:r>
-                          </m:e>
-                          <m:sub>
-                            <m:r>
-                              <m:t>i</m:t>
-                            </m:r>
-                          </m:sub>
-                        </m:sSub>
                       </m:e>
-                    </m:d>
+                      <m:sub>
+                        <m:r>
+                          <m:t>i</m:t>
+                        </m:r>
+                      </m:sub>
+                    </m:sSub>
+                    <m:r>
+                      <m:rPr>
+                        <m:sty m:val="p"/>
+                      </m:rPr>
+                      <m:t>|</m:t>
+                    </m:r>
                   </m:oMath>
                 </a14:m>
                 <a:r>
@@ -8107,28 +8151,30 @@
                     <m:r>
                       <m:t>r</m:t>
                     </m:r>
-                    <m:d>
-                      <m:dPr>
-                        <m:begChr m:val="("/>
-                        <m:sepChr m:val=""/>
-                        <m:endChr m:val=")"/>
-                        <m:grow/>
-                      </m:dPr>
-                      <m:e>
-                        <m:r>
-                          <m:t>M</m:t>
-                        </m:r>
-                        <m:r>
-                          <m:rPr>
-                            <m:sty m:val="p"/>
-                          </m:rPr>
-                          <m:t>+</m:t>
-                        </m:r>
-                        <m:r>
-                          <m:t>1</m:t>
-                        </m:r>
-                      </m:e>
-                    </m:d>
+                    <m:r>
+                      <m:rPr>
+                        <m:sty m:val="p"/>
+                      </m:rPr>
+                      <m:t>(</m:t>
+                    </m:r>
+                    <m:r>
+                      <m:t>M</m:t>
+                    </m:r>
+                    <m:r>
+                      <m:rPr>
+                        <m:sty m:val="p"/>
+                      </m:rPr>
+                      <m:t>+</m:t>
+                    </m:r>
+                    <m:r>
+                      <m:t>1</m:t>
+                    </m:r>
+                    <m:r>
+                      <m:rPr>
+                        <m:sty m:val="p"/>
+                      </m:rPr>
+                      <m:t>)</m:t>
+                    </m:r>
                   </m:oMath>
                 </a14:m>
                 <a:r>
